--- a/MLOps/MLOPs.pptx
+++ b/MLOps/MLOPs.pptx
@@ -5,7 +5,7 @@
     <p:sldMasterId id="2147483648" r:id="rId1"/>
   </p:sldMasterIdLst>
   <p:notesMasterIdLst>
-    <p:notesMasterId r:id="rId10"/>
+    <p:notesMasterId r:id="rId13"/>
   </p:notesMasterIdLst>
   <p:sldIdLst>
     <p:sldId id="256" r:id="rId2"/>
@@ -15,7 +15,10 @@
     <p:sldId id="262" r:id="rId6"/>
     <p:sldId id="258" r:id="rId7"/>
     <p:sldId id="259" r:id="rId8"/>
-    <p:sldId id="263" r:id="rId9"/>
+    <p:sldId id="265" r:id="rId9"/>
+    <p:sldId id="266" r:id="rId10"/>
+    <p:sldId id="263" r:id="rId11"/>
+    <p:sldId id="264" r:id="rId12"/>
   </p:sldIdLst>
   <p:sldSz cx="12192000" cy="6858000"/>
   <p:notesSz cx="6858000" cy="9144000"/>
@@ -204,7 +207,7 @@
           <a:p>
             <a:fld id="{175B9DE0-307C-44AA-9A14-2F76096277F0}" type="datetimeFigureOut">
               <a:rPr lang="en-IN" smtClean="0"/>
-              <a:t>21-10-2026</a:t>
+              <a:t>23-10-2026</a:t>
             </a:fld>
             <a:endParaRPr lang="en-IN"/>
           </a:p>
@@ -629,7 +632,7 @@
           <a:p>
             <a:fld id="{6EBA79C2-4FE3-4D0C-AFFB-D4FCE050D5EA}" type="datetimeFigureOut">
               <a:rPr lang="en-IN" smtClean="0"/>
-              <a:t>21-10-2026</a:t>
+              <a:t>23-10-2026</a:t>
             </a:fld>
             <a:endParaRPr lang="en-IN"/>
           </a:p>
@@ -866,7 +869,7 @@
           <a:p>
             <a:fld id="{6EBA79C2-4FE3-4D0C-AFFB-D4FCE050D5EA}" type="datetimeFigureOut">
               <a:rPr lang="en-IN" smtClean="0"/>
-              <a:t>21-10-2026</a:t>
+              <a:t>23-10-2026</a:t>
             </a:fld>
             <a:endParaRPr lang="en-IN"/>
           </a:p>
@@ -1076,7 +1079,7 @@
           <a:p>
             <a:fld id="{6EBA79C2-4FE3-4D0C-AFFB-D4FCE050D5EA}" type="datetimeFigureOut">
               <a:rPr lang="en-IN" smtClean="0"/>
-              <a:t>21-10-2026</a:t>
+              <a:t>23-10-2026</a:t>
             </a:fld>
             <a:endParaRPr lang="en-IN"/>
           </a:p>
@@ -1284,7 +1287,7 @@
           <a:p>
             <a:fld id="{6EBA79C2-4FE3-4D0C-AFFB-D4FCE050D5EA}" type="datetimeFigureOut">
               <a:rPr lang="en-IN" smtClean="0"/>
-              <a:t>21-10-2026</a:t>
+              <a:t>23-10-2026</a:t>
             </a:fld>
             <a:endParaRPr lang="en-IN"/>
           </a:p>
@@ -1597,7 +1600,7 @@
           <a:p>
             <a:fld id="{6EBA79C2-4FE3-4D0C-AFFB-D4FCE050D5EA}" type="datetimeFigureOut">
               <a:rPr lang="en-IN" smtClean="0"/>
-              <a:t>21-10-2026</a:t>
+              <a:t>23-10-2026</a:t>
             </a:fld>
             <a:endParaRPr lang="en-IN"/>
           </a:p>
@@ -1865,7 +1868,7 @@
           <a:p>
             <a:fld id="{6EBA79C2-4FE3-4D0C-AFFB-D4FCE050D5EA}" type="datetimeFigureOut">
               <a:rPr lang="en-IN" smtClean="0"/>
-              <a:t>21-10-2026</a:t>
+              <a:t>23-10-2026</a:t>
             </a:fld>
             <a:endParaRPr lang="en-IN"/>
           </a:p>
@@ -2280,7 +2283,7 @@
           <a:p>
             <a:fld id="{6EBA79C2-4FE3-4D0C-AFFB-D4FCE050D5EA}" type="datetimeFigureOut">
               <a:rPr lang="en-IN" smtClean="0"/>
-              <a:t>21-10-2026</a:t>
+              <a:t>23-10-2026</a:t>
             </a:fld>
             <a:endParaRPr lang="en-IN"/>
           </a:p>
@@ -2422,7 +2425,7 @@
           <a:p>
             <a:fld id="{6EBA79C2-4FE3-4D0C-AFFB-D4FCE050D5EA}" type="datetimeFigureOut">
               <a:rPr lang="en-IN" smtClean="0"/>
-              <a:t>21-10-2026</a:t>
+              <a:t>23-10-2026</a:t>
             </a:fld>
             <a:endParaRPr lang="en-IN"/>
           </a:p>
@@ -2535,7 +2538,7 @@
           <a:p>
             <a:fld id="{6EBA79C2-4FE3-4D0C-AFFB-D4FCE050D5EA}" type="datetimeFigureOut">
               <a:rPr lang="en-IN" smtClean="0"/>
-              <a:t>21-10-2026</a:t>
+              <a:t>23-10-2026</a:t>
             </a:fld>
             <a:endParaRPr lang="en-IN"/>
           </a:p>
@@ -2848,7 +2851,7 @@
           <a:p>
             <a:fld id="{6EBA79C2-4FE3-4D0C-AFFB-D4FCE050D5EA}" type="datetimeFigureOut">
               <a:rPr lang="en-IN" smtClean="0"/>
-              <a:t>21-10-2026</a:t>
+              <a:t>23-10-2026</a:t>
             </a:fld>
             <a:endParaRPr lang="en-IN"/>
           </a:p>
@@ -3137,7 +3140,7 @@
           <a:p>
             <a:fld id="{6EBA79C2-4FE3-4D0C-AFFB-D4FCE050D5EA}" type="datetimeFigureOut">
               <a:rPr lang="en-IN" smtClean="0"/>
-              <a:t>21-10-2026</a:t>
+              <a:t>23-10-2026</a:t>
             </a:fld>
             <a:endParaRPr lang="en-IN"/>
           </a:p>
@@ -3385,7 +3388,7 @@
             <a:fld id="{6EBA79C2-4FE3-4D0C-AFFB-D4FCE050D5EA}" type="datetimeFigureOut">
               <a:rPr lang="en-IN" smtClean="0"/>
               <a:pPr/>
-              <a:t>21-10-2026</a:t>
+              <a:t>23-10-2026</a:t>
             </a:fld>
             <a:endParaRPr lang="en-IN"/>
           </a:p>
@@ -3950,2715 +3953,7 @@
 </p:sld>
 </file>
 
-<file path=ppt/slides/slide2.xml><?xml version="1.0" encoding="utf-8"?>
-<p:sld xmlns:a="http://schemas.openxmlformats.org/drawingml/2006/main" xmlns:r="http://schemas.openxmlformats.org/officeDocument/2006/relationships" xmlns:p="http://schemas.openxmlformats.org/presentationml/2006/main">
-  <p:cSld>
-    <p:bg>
-      <p:bgPr>
-        <a:solidFill>
-          <a:schemeClr val="tx1"/>
-        </a:solidFill>
-        <a:effectLst/>
-      </p:bgPr>
-    </p:bg>
-    <p:spTree>
-      <p:nvGrpSpPr>
-        <p:cNvPr id="1" name="">
-          <a:extLst>
-            <a:ext uri="{FF2B5EF4-FFF2-40B4-BE49-F238E27FC236}">
-              <a16:creationId xmlns:a16="http://schemas.microsoft.com/office/drawing/2014/main" id="{F0DF0F9D-9903-25F0-8A74-AC133B72836A}"/>
-            </a:ext>
-          </a:extLst>
-        </p:cNvPr>
-        <p:cNvGrpSpPr/>
-        <p:nvPr/>
-      </p:nvGrpSpPr>
-      <p:grpSpPr>
-        <a:xfrm>
-          <a:off x="0" y="0"/>
-          <a:ext cx="0" cy="0"/>
-          <a:chOff x="0" y="0"/>
-          <a:chExt cx="0" cy="0"/>
-        </a:xfrm>
-      </p:grpSpPr>
-      <p:sp>
-        <p:nvSpPr>
-          <p:cNvPr id="3" name="TextBox 2">
-            <a:extLst>
-              <a:ext uri="{FF2B5EF4-FFF2-40B4-BE49-F238E27FC236}">
-                <a16:creationId xmlns:a16="http://schemas.microsoft.com/office/drawing/2014/main" id="{7DB19A1F-E8D1-61E1-4D25-BCE1C60D168E}"/>
-              </a:ext>
-            </a:extLst>
-          </p:cNvPr>
-          <p:cNvSpPr txBox="1"/>
-          <p:nvPr/>
-        </p:nvSpPr>
-        <p:spPr>
-          <a:xfrm>
-            <a:off x="118872" y="112448"/>
-            <a:ext cx="10643616" cy="2677656"/>
-          </a:xfrm>
-          <a:prstGeom prst="rect">
-            <a:avLst/>
-          </a:prstGeom>
-          <a:noFill/>
-        </p:spPr>
-        <p:txBody>
-          <a:bodyPr wrap="square">
-            <a:spAutoFit/>
-          </a:bodyPr>
-          <a:lstStyle/>
-          <a:p>
-            <a:pPr>
-              <a:buNone/>
-            </a:pPr>
-            <a:r>
-              <a:rPr lang="en-IN" sz="2400" b="1">
-                <a:solidFill>
-                  <a:schemeClr val="accent6">
-                    <a:lumMod val="60000"/>
-                    <a:lumOff val="40000"/>
-                  </a:schemeClr>
-                </a:solidFill>
-              </a:rPr>
-              <a:t>What is MLOps? </a:t>
-            </a:r>
-          </a:p>
-          <a:p>
-            <a:pPr>
-              <a:buNone/>
-            </a:pPr>
-            <a:endParaRPr lang="en-IN" sz="2400" b="1">
-              <a:solidFill>
-                <a:schemeClr val="accent6">
-                  <a:lumMod val="60000"/>
-                  <a:lumOff val="40000"/>
-                </a:schemeClr>
-              </a:solidFill>
-            </a:endParaRPr>
-          </a:p>
-          <a:p>
-            <a:pPr>
-              <a:buNone/>
-            </a:pPr>
-            <a:r>
-              <a:rPr lang="en-IN" sz="2400">
-                <a:solidFill>
-                  <a:schemeClr val="accent6">
-                    <a:lumMod val="60000"/>
-                    <a:lumOff val="40000"/>
-                  </a:schemeClr>
-                </a:solidFill>
-              </a:rPr>
-              <a:t>MLOps is a processes used to </a:t>
-            </a:r>
-          </a:p>
-          <a:p>
-            <a:pPr marL="342900" indent="-342900">
-              <a:buFont typeface="Arial" panose="020B0604020202020204" pitchFamily="34" charset="0"/>
-              <a:buChar char="•"/>
-            </a:pPr>
-            <a:r>
-              <a:rPr lang="en-IN" sz="2400">
-                <a:solidFill>
-                  <a:schemeClr val="accent6">
-                    <a:lumMod val="60000"/>
-                    <a:lumOff val="40000"/>
-                  </a:schemeClr>
-                </a:solidFill>
-              </a:rPr>
-              <a:t>Develop, </a:t>
-            </a:r>
-          </a:p>
-          <a:p>
-            <a:pPr marL="342900" indent="-342900">
-              <a:buFont typeface="Arial" panose="020B0604020202020204" pitchFamily="34" charset="0"/>
-              <a:buChar char="•"/>
-            </a:pPr>
-            <a:r>
-              <a:rPr lang="en-IN" sz="2400">
-                <a:solidFill>
-                  <a:schemeClr val="accent6">
-                    <a:lumMod val="60000"/>
-                    <a:lumOff val="40000"/>
-                  </a:schemeClr>
-                </a:solidFill>
-              </a:rPr>
-              <a:t>Deploy, </a:t>
-            </a:r>
-          </a:p>
-          <a:p>
-            <a:pPr marL="342900" indent="-342900">
-              <a:buFont typeface="Arial" panose="020B0604020202020204" pitchFamily="34" charset="0"/>
-              <a:buChar char="•"/>
-            </a:pPr>
-            <a:r>
-              <a:rPr lang="en-IN" sz="2400">
-                <a:solidFill>
-                  <a:schemeClr val="accent6">
-                    <a:lumMod val="60000"/>
-                    <a:lumOff val="40000"/>
-                  </a:schemeClr>
-                </a:solidFill>
-              </a:rPr>
-              <a:t>Monitor (and maintain)</a:t>
-            </a:r>
-          </a:p>
-          <a:p>
-            <a:pPr>
-              <a:buNone/>
-            </a:pPr>
-            <a:r>
-              <a:rPr lang="en-IN" sz="2400">
-                <a:solidFill>
-                  <a:schemeClr val="accent6">
-                    <a:lumMod val="60000"/>
-                    <a:lumOff val="40000"/>
-                  </a:schemeClr>
-                </a:solidFill>
-              </a:rPr>
-              <a:t>machine learning models in real-world applications.</a:t>
-            </a:r>
-          </a:p>
-        </p:txBody>
-      </p:sp>
-      <p:sp>
-        <p:nvSpPr>
-          <p:cNvPr id="2" name="Oval 1">
-            <a:extLst>
-              <a:ext uri="{FF2B5EF4-FFF2-40B4-BE49-F238E27FC236}">
-                <a16:creationId xmlns:a16="http://schemas.microsoft.com/office/drawing/2014/main" id="{76BF32FD-FDAD-ACA8-8595-D9B4BDE6C99D}"/>
-              </a:ext>
-            </a:extLst>
-          </p:cNvPr>
-          <p:cNvSpPr/>
-          <p:nvPr/>
-        </p:nvSpPr>
-        <p:spPr>
-          <a:xfrm>
-            <a:off x="256032" y="3310128"/>
-            <a:ext cx="1737360" cy="1517904"/>
-          </a:xfrm>
-          <a:prstGeom prst="ellipse">
-            <a:avLst/>
-          </a:prstGeom>
-        </p:spPr>
-        <p:style>
-          <a:lnRef idx="2">
-            <a:schemeClr val="accent1">
-              <a:shade val="15000"/>
-            </a:schemeClr>
-          </a:lnRef>
-          <a:fillRef idx="1">
-            <a:schemeClr val="accent1"/>
-          </a:fillRef>
-          <a:effectRef idx="0">
-            <a:schemeClr val="accent1"/>
-          </a:effectRef>
-          <a:fontRef idx="minor">
-            <a:schemeClr val="lt1"/>
-          </a:fontRef>
-        </p:style>
-        <p:txBody>
-          <a:bodyPr rtlCol="0" anchor="ctr"/>
-          <a:lstStyle/>
-          <a:p>
-            <a:pPr algn="ctr"/>
-            <a:r>
-              <a:rPr lang="en-US" sz="2400"/>
-              <a:t>Develop</a:t>
-            </a:r>
-            <a:endParaRPr lang="en-IN" sz="2400"/>
-          </a:p>
-        </p:txBody>
-      </p:sp>
-      <p:sp>
-        <p:nvSpPr>
-          <p:cNvPr id="5" name="Oval 4">
-            <a:extLst>
-              <a:ext uri="{FF2B5EF4-FFF2-40B4-BE49-F238E27FC236}">
-                <a16:creationId xmlns:a16="http://schemas.microsoft.com/office/drawing/2014/main" id="{76FC4383-7F1E-4E7E-9E89-36370BE0C59D}"/>
-              </a:ext>
-            </a:extLst>
-          </p:cNvPr>
-          <p:cNvSpPr/>
-          <p:nvPr/>
-        </p:nvSpPr>
-        <p:spPr>
-          <a:xfrm>
-            <a:off x="3948684" y="3310128"/>
-            <a:ext cx="1737360" cy="1517904"/>
-          </a:xfrm>
-          <a:prstGeom prst="ellipse">
-            <a:avLst/>
-          </a:prstGeom>
-        </p:spPr>
-        <p:style>
-          <a:lnRef idx="2">
-            <a:schemeClr val="accent1">
-              <a:shade val="15000"/>
-            </a:schemeClr>
-          </a:lnRef>
-          <a:fillRef idx="1">
-            <a:schemeClr val="accent1"/>
-          </a:fillRef>
-          <a:effectRef idx="0">
-            <a:schemeClr val="accent1"/>
-          </a:effectRef>
-          <a:fontRef idx="minor">
-            <a:schemeClr val="lt1"/>
-          </a:fontRef>
-        </p:style>
-        <p:txBody>
-          <a:bodyPr rtlCol="0" anchor="ctr"/>
-          <a:lstStyle/>
-          <a:p>
-            <a:pPr algn="ctr"/>
-            <a:r>
-              <a:rPr lang="en-US" sz="2400"/>
-              <a:t>Deploy</a:t>
-            </a:r>
-            <a:endParaRPr lang="en-IN" sz="2400"/>
-          </a:p>
-        </p:txBody>
-      </p:sp>
-      <p:sp>
-        <p:nvSpPr>
-          <p:cNvPr id="7" name="Oval 6">
-            <a:extLst>
-              <a:ext uri="{FF2B5EF4-FFF2-40B4-BE49-F238E27FC236}">
-                <a16:creationId xmlns:a16="http://schemas.microsoft.com/office/drawing/2014/main" id="{CCF946AD-4D03-3398-171F-7DA3B8AF0529}"/>
-              </a:ext>
-            </a:extLst>
-          </p:cNvPr>
-          <p:cNvSpPr/>
-          <p:nvPr/>
-        </p:nvSpPr>
-        <p:spPr>
-          <a:xfrm>
-            <a:off x="2138172" y="5321808"/>
-            <a:ext cx="1737360" cy="1517904"/>
-          </a:xfrm>
-          <a:prstGeom prst="ellipse">
-            <a:avLst/>
-          </a:prstGeom>
-        </p:spPr>
-        <p:style>
-          <a:lnRef idx="2">
-            <a:schemeClr val="accent1">
-              <a:shade val="15000"/>
-            </a:schemeClr>
-          </a:lnRef>
-          <a:fillRef idx="1">
-            <a:schemeClr val="accent1"/>
-          </a:fillRef>
-          <a:effectRef idx="0">
-            <a:schemeClr val="accent1"/>
-          </a:effectRef>
-          <a:fontRef idx="minor">
-            <a:schemeClr val="lt1"/>
-          </a:fontRef>
-        </p:style>
-        <p:txBody>
-          <a:bodyPr rtlCol="0" anchor="ctr"/>
-          <a:lstStyle/>
-          <a:p>
-            <a:pPr algn="ctr"/>
-            <a:r>
-              <a:rPr lang="en-US" sz="2400"/>
-              <a:t>Monitor</a:t>
-            </a:r>
-            <a:endParaRPr lang="en-IN" sz="2400"/>
-          </a:p>
-        </p:txBody>
-      </p:sp>
-      <p:sp>
-        <p:nvSpPr>
-          <p:cNvPr id="9" name="Arrow: Right 8">
-            <a:extLst>
-              <a:ext uri="{FF2B5EF4-FFF2-40B4-BE49-F238E27FC236}">
-                <a16:creationId xmlns:a16="http://schemas.microsoft.com/office/drawing/2014/main" id="{54423705-D30D-83DB-1AD0-75C0A3F6067E}"/>
-              </a:ext>
-            </a:extLst>
-          </p:cNvPr>
-          <p:cNvSpPr/>
-          <p:nvPr/>
-        </p:nvSpPr>
-        <p:spPr>
-          <a:xfrm>
-            <a:off x="2578608" y="3602736"/>
-            <a:ext cx="557784" cy="521208"/>
-          </a:xfrm>
-          <a:prstGeom prst="rightArrow">
-            <a:avLst/>
-          </a:prstGeom>
-        </p:spPr>
-        <p:style>
-          <a:lnRef idx="2">
-            <a:schemeClr val="accent1">
-              <a:shade val="15000"/>
-            </a:schemeClr>
-          </a:lnRef>
-          <a:fillRef idx="1">
-            <a:schemeClr val="accent1"/>
-          </a:fillRef>
-          <a:effectRef idx="0">
-            <a:schemeClr val="accent1"/>
-          </a:effectRef>
-          <a:fontRef idx="minor">
-            <a:schemeClr val="lt1"/>
-          </a:fontRef>
-        </p:style>
-        <p:txBody>
-          <a:bodyPr rtlCol="0" anchor="ctr"/>
-          <a:lstStyle/>
-          <a:p>
-            <a:pPr algn="ctr"/>
-            <a:endParaRPr lang="en-IN"/>
-          </a:p>
-        </p:txBody>
-      </p:sp>
-      <p:sp>
-        <p:nvSpPr>
-          <p:cNvPr id="11" name="Arrow: Right 10">
-            <a:extLst>
-              <a:ext uri="{FF2B5EF4-FFF2-40B4-BE49-F238E27FC236}">
-                <a16:creationId xmlns:a16="http://schemas.microsoft.com/office/drawing/2014/main" id="{DF126E34-6A4C-DD3D-4EB6-04AAC898B4B7}"/>
-              </a:ext>
-            </a:extLst>
-          </p:cNvPr>
-          <p:cNvSpPr/>
-          <p:nvPr/>
-        </p:nvSpPr>
-        <p:spPr>
-          <a:xfrm rot="7512883">
-            <a:off x="3875532" y="4828032"/>
-            <a:ext cx="557784" cy="521208"/>
-          </a:xfrm>
-          <a:prstGeom prst="rightArrow">
-            <a:avLst/>
-          </a:prstGeom>
-        </p:spPr>
-        <p:style>
-          <a:lnRef idx="2">
-            <a:schemeClr val="accent1">
-              <a:shade val="15000"/>
-            </a:schemeClr>
-          </a:lnRef>
-          <a:fillRef idx="1">
-            <a:schemeClr val="accent1"/>
-          </a:fillRef>
-          <a:effectRef idx="0">
-            <a:schemeClr val="accent1"/>
-          </a:effectRef>
-          <a:fontRef idx="minor">
-            <a:schemeClr val="lt1"/>
-          </a:fontRef>
-        </p:style>
-        <p:txBody>
-          <a:bodyPr rtlCol="0" anchor="ctr"/>
-          <a:lstStyle/>
-          <a:p>
-            <a:pPr algn="ctr"/>
-            <a:endParaRPr lang="en-IN"/>
-          </a:p>
-        </p:txBody>
-      </p:sp>
-      <p:sp>
-        <p:nvSpPr>
-          <p:cNvPr id="13" name="Arrow: Right 12">
-            <a:extLst>
-              <a:ext uri="{FF2B5EF4-FFF2-40B4-BE49-F238E27FC236}">
-                <a16:creationId xmlns:a16="http://schemas.microsoft.com/office/drawing/2014/main" id="{1E0E1AB4-BF4D-5E29-F3E2-5FAD25AE5534}"/>
-              </a:ext>
-            </a:extLst>
-          </p:cNvPr>
-          <p:cNvSpPr/>
-          <p:nvPr/>
-        </p:nvSpPr>
-        <p:spPr>
-          <a:xfrm rot="13580051">
-            <a:off x="1625974" y="4805171"/>
-            <a:ext cx="557784" cy="521208"/>
-          </a:xfrm>
-          <a:prstGeom prst="rightArrow">
-            <a:avLst/>
-          </a:prstGeom>
-        </p:spPr>
-        <p:style>
-          <a:lnRef idx="2">
-            <a:schemeClr val="accent1">
-              <a:shade val="15000"/>
-            </a:schemeClr>
-          </a:lnRef>
-          <a:fillRef idx="1">
-            <a:schemeClr val="accent1"/>
-          </a:fillRef>
-          <a:effectRef idx="0">
-            <a:schemeClr val="accent1"/>
-          </a:effectRef>
-          <a:fontRef idx="minor">
-            <a:schemeClr val="lt1"/>
-          </a:fontRef>
-        </p:style>
-        <p:txBody>
-          <a:bodyPr rtlCol="0" anchor="ctr"/>
-          <a:lstStyle/>
-          <a:p>
-            <a:pPr algn="ctr"/>
-            <a:endParaRPr lang="en-IN"/>
-          </a:p>
-        </p:txBody>
-      </p:sp>
-    </p:spTree>
-    <p:extLst>
-      <p:ext uri="{BB962C8B-B14F-4D97-AF65-F5344CB8AC3E}">
-        <p14:creationId xmlns:p14="http://schemas.microsoft.com/office/powerpoint/2010/main" val="3625312855"/>
-      </p:ext>
-    </p:extLst>
-  </p:cSld>
-  <p:clrMapOvr>
-    <a:masterClrMapping/>
-  </p:clrMapOvr>
-</p:sld>
-</file>
-
-<file path=ppt/slides/slide3.xml><?xml version="1.0" encoding="utf-8"?>
-<p:sld xmlns:a="http://schemas.openxmlformats.org/drawingml/2006/main" xmlns:r="http://schemas.openxmlformats.org/officeDocument/2006/relationships" xmlns:p="http://schemas.openxmlformats.org/presentationml/2006/main">
-  <p:cSld>
-    <p:bg>
-      <p:bgPr>
-        <a:solidFill>
-          <a:schemeClr val="tx1"/>
-        </a:solidFill>
-        <a:effectLst/>
-      </p:bgPr>
-    </p:bg>
-    <p:spTree>
-      <p:nvGrpSpPr>
-        <p:cNvPr id="1" name="">
-          <a:extLst>
-            <a:ext uri="{FF2B5EF4-FFF2-40B4-BE49-F238E27FC236}">
-              <a16:creationId xmlns:a16="http://schemas.microsoft.com/office/drawing/2014/main" id="{9F92120F-C0A4-512E-83D7-D1CB19EF0E6A}"/>
-            </a:ext>
-          </a:extLst>
-        </p:cNvPr>
-        <p:cNvGrpSpPr/>
-        <p:nvPr/>
-      </p:nvGrpSpPr>
-      <p:grpSpPr>
-        <a:xfrm>
-          <a:off x="0" y="0"/>
-          <a:ext cx="0" cy="0"/>
-          <a:chOff x="0" y="0"/>
-          <a:chExt cx="0" cy="0"/>
-        </a:xfrm>
-      </p:grpSpPr>
-      <p:sp>
-        <p:nvSpPr>
-          <p:cNvPr id="3" name="TextBox 2">
-            <a:extLst>
-              <a:ext uri="{FF2B5EF4-FFF2-40B4-BE49-F238E27FC236}">
-                <a16:creationId xmlns:a16="http://schemas.microsoft.com/office/drawing/2014/main" id="{8A71138C-18D1-1325-03A2-DFF98EBC6FC6}"/>
-              </a:ext>
-            </a:extLst>
-          </p:cNvPr>
-          <p:cNvSpPr txBox="1"/>
-          <p:nvPr/>
-        </p:nvSpPr>
-        <p:spPr>
-          <a:xfrm>
-            <a:off x="287682" y="36928"/>
-            <a:ext cx="11828118" cy="1938992"/>
-          </a:xfrm>
-          <a:prstGeom prst="rect">
-            <a:avLst/>
-          </a:prstGeom>
-          <a:noFill/>
-        </p:spPr>
-        <p:txBody>
-          <a:bodyPr wrap="square">
-            <a:spAutoFit/>
-          </a:bodyPr>
-          <a:lstStyle/>
-          <a:p>
-            <a:pPr>
-              <a:buNone/>
-            </a:pPr>
-            <a:r>
-              <a:rPr lang="en-IN" sz="2400" b="1">
-                <a:solidFill>
-                  <a:schemeClr val="accent6">
-                    <a:lumMod val="60000"/>
-                    <a:lumOff val="40000"/>
-                  </a:schemeClr>
-                </a:solidFill>
-              </a:rPr>
-              <a:t>Development</a:t>
-            </a:r>
-          </a:p>
-          <a:p>
-            <a:endParaRPr lang="en-IN" sz="2400" b="1">
-              <a:solidFill>
-                <a:schemeClr val="accent6">
-                  <a:lumMod val="60000"/>
-                  <a:lumOff val="40000"/>
-                </a:schemeClr>
-              </a:solidFill>
-            </a:endParaRPr>
-          </a:p>
-          <a:p>
-            <a:r>
-              <a:rPr lang="en-IN" sz="2400">
-                <a:solidFill>
-                  <a:schemeClr val="accent6">
-                    <a:lumMod val="60000"/>
-                    <a:lumOff val="40000"/>
-                  </a:schemeClr>
-                </a:solidFill>
-              </a:rPr>
-              <a:t>1. </a:t>
-            </a:r>
-            <a:r>
-              <a:rPr lang="en-IN" sz="2400" b="1">
-                <a:solidFill>
-                  <a:schemeClr val="accent6">
-                    <a:lumMod val="60000"/>
-                    <a:lumOff val="40000"/>
-                  </a:schemeClr>
-                </a:solidFill>
-              </a:rPr>
-              <a:t>Data Collection and Validation</a:t>
-            </a:r>
-            <a:r>
-              <a:rPr lang="en-IN" sz="2400">
-                <a:solidFill>
-                  <a:schemeClr val="accent6">
-                    <a:lumMod val="60000"/>
-                    <a:lumOff val="40000"/>
-                  </a:schemeClr>
-                </a:solidFill>
-              </a:rPr>
-              <a:t>:  Collect, validate, clean, and version the data.</a:t>
-            </a:r>
-          </a:p>
-          <a:p>
-            <a:r>
-              <a:rPr lang="en-IN" sz="2400">
-                <a:solidFill>
-                  <a:schemeClr val="accent6">
-                    <a:lumMod val="60000"/>
-                    <a:lumOff val="40000"/>
-                  </a:schemeClr>
-                </a:solidFill>
-              </a:rPr>
-              <a:t>2. </a:t>
-            </a:r>
-            <a:r>
-              <a:rPr lang="en-IN" sz="2400" b="1">
-                <a:solidFill>
-                  <a:schemeClr val="accent6">
-                    <a:lumMod val="60000"/>
-                    <a:lumOff val="40000"/>
-                  </a:schemeClr>
-                </a:solidFill>
-              </a:rPr>
-              <a:t>Model Training and Experimentation</a:t>
-            </a:r>
-            <a:r>
-              <a:rPr lang="en-IN" sz="2400">
-                <a:solidFill>
-                  <a:schemeClr val="accent6">
-                    <a:lumMod val="60000"/>
-                    <a:lumOff val="40000"/>
-                  </a:schemeClr>
-                </a:solidFill>
-              </a:rPr>
-              <a:t>: Train models, tune hyperparameters, record metrics.</a:t>
-            </a:r>
-          </a:p>
-          <a:p>
-            <a:r>
-              <a:rPr lang="en-IN" sz="2400">
-                <a:solidFill>
-                  <a:schemeClr val="accent6">
-                    <a:lumMod val="60000"/>
-                    <a:lumOff val="40000"/>
-                  </a:schemeClr>
-                </a:solidFill>
-              </a:rPr>
-              <a:t>3. </a:t>
-            </a:r>
-            <a:r>
-              <a:rPr lang="en-IN" sz="2400" b="1">
-                <a:solidFill>
-                  <a:schemeClr val="accent6">
-                    <a:lumMod val="60000"/>
-                    <a:lumOff val="40000"/>
-                  </a:schemeClr>
-                </a:solidFill>
-              </a:rPr>
-              <a:t>Model Evaluation and Approval</a:t>
-            </a:r>
-            <a:r>
-              <a:rPr lang="en-IN" sz="2400">
-                <a:solidFill>
-                  <a:schemeClr val="accent6">
-                    <a:lumMod val="60000"/>
-                    <a:lumOff val="40000"/>
-                  </a:schemeClr>
-                </a:solidFill>
-              </a:rPr>
-              <a:t>: Test accuracy, robustness, fairness, and biz requirements.</a:t>
-            </a:r>
-          </a:p>
-        </p:txBody>
-      </p:sp>
-      <p:sp>
-        <p:nvSpPr>
-          <p:cNvPr id="6" name="Oval 5">
-            <a:extLst>
-              <a:ext uri="{FF2B5EF4-FFF2-40B4-BE49-F238E27FC236}">
-                <a16:creationId xmlns:a16="http://schemas.microsoft.com/office/drawing/2014/main" id="{3E257BE4-6F24-87B3-10BB-4D37698B3BE3}"/>
-              </a:ext>
-            </a:extLst>
-          </p:cNvPr>
-          <p:cNvSpPr/>
-          <p:nvPr/>
-        </p:nvSpPr>
-        <p:spPr>
-          <a:xfrm>
-            <a:off x="256032" y="3310128"/>
-            <a:ext cx="1737360" cy="1517904"/>
-          </a:xfrm>
-          <a:prstGeom prst="ellipse">
-            <a:avLst/>
-          </a:prstGeom>
-        </p:spPr>
-        <p:style>
-          <a:lnRef idx="2">
-            <a:schemeClr val="accent1">
-              <a:shade val="15000"/>
-            </a:schemeClr>
-          </a:lnRef>
-          <a:fillRef idx="1">
-            <a:schemeClr val="accent1"/>
-          </a:fillRef>
-          <a:effectRef idx="0">
-            <a:schemeClr val="accent1"/>
-          </a:effectRef>
-          <a:fontRef idx="minor">
-            <a:schemeClr val="lt1"/>
-          </a:fontRef>
-        </p:style>
-        <p:txBody>
-          <a:bodyPr rtlCol="0" anchor="ctr"/>
-          <a:lstStyle/>
-          <a:p>
-            <a:pPr algn="ctr"/>
-            <a:r>
-              <a:rPr lang="en-US" sz="2400"/>
-              <a:t>Develop</a:t>
-            </a:r>
-            <a:endParaRPr lang="en-IN" sz="2400"/>
-          </a:p>
-        </p:txBody>
-      </p:sp>
-      <p:sp>
-        <p:nvSpPr>
-          <p:cNvPr id="10" name="Oval 9">
-            <a:extLst>
-              <a:ext uri="{FF2B5EF4-FFF2-40B4-BE49-F238E27FC236}">
-                <a16:creationId xmlns:a16="http://schemas.microsoft.com/office/drawing/2014/main" id="{C886FD61-5EB4-D803-38C4-933705B952D9}"/>
-              </a:ext>
-            </a:extLst>
-          </p:cNvPr>
-          <p:cNvSpPr/>
-          <p:nvPr/>
-        </p:nvSpPr>
-        <p:spPr>
-          <a:xfrm>
-            <a:off x="3948684" y="3310128"/>
-            <a:ext cx="1737360" cy="1517904"/>
-          </a:xfrm>
-          <a:prstGeom prst="ellipse">
-            <a:avLst/>
-          </a:prstGeom>
-        </p:spPr>
-        <p:style>
-          <a:lnRef idx="2">
-            <a:schemeClr val="accent1">
-              <a:shade val="15000"/>
-            </a:schemeClr>
-          </a:lnRef>
-          <a:fillRef idx="1">
-            <a:schemeClr val="accent1"/>
-          </a:fillRef>
-          <a:effectRef idx="0">
-            <a:schemeClr val="accent1"/>
-          </a:effectRef>
-          <a:fontRef idx="minor">
-            <a:schemeClr val="lt1"/>
-          </a:fontRef>
-        </p:style>
-        <p:txBody>
-          <a:bodyPr rtlCol="0" anchor="ctr"/>
-          <a:lstStyle/>
-          <a:p>
-            <a:pPr algn="ctr"/>
-            <a:r>
-              <a:rPr lang="en-US" sz="2400"/>
-              <a:t>Deploy</a:t>
-            </a:r>
-            <a:endParaRPr lang="en-IN" sz="2400"/>
-          </a:p>
-        </p:txBody>
-      </p:sp>
-      <p:sp>
-        <p:nvSpPr>
-          <p:cNvPr id="14" name="Oval 13">
-            <a:extLst>
-              <a:ext uri="{FF2B5EF4-FFF2-40B4-BE49-F238E27FC236}">
-                <a16:creationId xmlns:a16="http://schemas.microsoft.com/office/drawing/2014/main" id="{2FA068F8-62B7-FBCC-BFB2-D95DB71B15FA}"/>
-              </a:ext>
-            </a:extLst>
-          </p:cNvPr>
-          <p:cNvSpPr/>
-          <p:nvPr/>
-        </p:nvSpPr>
-        <p:spPr>
-          <a:xfrm>
-            <a:off x="2138172" y="5321808"/>
-            <a:ext cx="1737360" cy="1517904"/>
-          </a:xfrm>
-          <a:prstGeom prst="ellipse">
-            <a:avLst/>
-          </a:prstGeom>
-        </p:spPr>
-        <p:style>
-          <a:lnRef idx="2">
-            <a:schemeClr val="accent1">
-              <a:shade val="15000"/>
-            </a:schemeClr>
-          </a:lnRef>
-          <a:fillRef idx="1">
-            <a:schemeClr val="accent1"/>
-          </a:fillRef>
-          <a:effectRef idx="0">
-            <a:schemeClr val="accent1"/>
-          </a:effectRef>
-          <a:fontRef idx="minor">
-            <a:schemeClr val="lt1"/>
-          </a:fontRef>
-        </p:style>
-        <p:txBody>
-          <a:bodyPr rtlCol="0" anchor="ctr"/>
-          <a:lstStyle/>
-          <a:p>
-            <a:pPr algn="ctr"/>
-            <a:r>
-              <a:rPr lang="en-US" sz="2400"/>
-              <a:t>Monitor</a:t>
-            </a:r>
-            <a:endParaRPr lang="en-IN" sz="2400"/>
-          </a:p>
-        </p:txBody>
-      </p:sp>
-      <p:sp>
-        <p:nvSpPr>
-          <p:cNvPr id="16" name="Arrow: Right 15">
-            <a:extLst>
-              <a:ext uri="{FF2B5EF4-FFF2-40B4-BE49-F238E27FC236}">
-                <a16:creationId xmlns:a16="http://schemas.microsoft.com/office/drawing/2014/main" id="{B3314D71-526D-EABD-55E8-6E48D1AD36F4}"/>
-              </a:ext>
-            </a:extLst>
-          </p:cNvPr>
-          <p:cNvSpPr/>
-          <p:nvPr/>
-        </p:nvSpPr>
-        <p:spPr>
-          <a:xfrm>
-            <a:off x="2578608" y="3602736"/>
-            <a:ext cx="557784" cy="521208"/>
-          </a:xfrm>
-          <a:prstGeom prst="rightArrow">
-            <a:avLst/>
-          </a:prstGeom>
-        </p:spPr>
-        <p:style>
-          <a:lnRef idx="2">
-            <a:schemeClr val="accent1">
-              <a:shade val="15000"/>
-            </a:schemeClr>
-          </a:lnRef>
-          <a:fillRef idx="1">
-            <a:schemeClr val="accent1"/>
-          </a:fillRef>
-          <a:effectRef idx="0">
-            <a:schemeClr val="accent1"/>
-          </a:effectRef>
-          <a:fontRef idx="minor">
-            <a:schemeClr val="lt1"/>
-          </a:fontRef>
-        </p:style>
-        <p:txBody>
-          <a:bodyPr rtlCol="0" anchor="ctr"/>
-          <a:lstStyle/>
-          <a:p>
-            <a:pPr algn="ctr"/>
-            <a:endParaRPr lang="en-IN"/>
-          </a:p>
-        </p:txBody>
-      </p:sp>
-      <p:sp>
-        <p:nvSpPr>
-          <p:cNvPr id="18" name="Arrow: Right 17">
-            <a:extLst>
-              <a:ext uri="{FF2B5EF4-FFF2-40B4-BE49-F238E27FC236}">
-                <a16:creationId xmlns:a16="http://schemas.microsoft.com/office/drawing/2014/main" id="{E59D4832-2646-DF37-9735-24027088BDE6}"/>
-              </a:ext>
-            </a:extLst>
-          </p:cNvPr>
-          <p:cNvSpPr/>
-          <p:nvPr/>
-        </p:nvSpPr>
-        <p:spPr>
-          <a:xfrm rot="7512883">
-            <a:off x="3875532" y="4828032"/>
-            <a:ext cx="557784" cy="521208"/>
-          </a:xfrm>
-          <a:prstGeom prst="rightArrow">
-            <a:avLst/>
-          </a:prstGeom>
-        </p:spPr>
-        <p:style>
-          <a:lnRef idx="2">
-            <a:schemeClr val="accent1">
-              <a:shade val="15000"/>
-            </a:schemeClr>
-          </a:lnRef>
-          <a:fillRef idx="1">
-            <a:schemeClr val="accent1"/>
-          </a:fillRef>
-          <a:effectRef idx="0">
-            <a:schemeClr val="accent1"/>
-          </a:effectRef>
-          <a:fontRef idx="minor">
-            <a:schemeClr val="lt1"/>
-          </a:fontRef>
-        </p:style>
-        <p:txBody>
-          <a:bodyPr rtlCol="0" anchor="ctr"/>
-          <a:lstStyle/>
-          <a:p>
-            <a:pPr algn="ctr"/>
-            <a:endParaRPr lang="en-IN"/>
-          </a:p>
-        </p:txBody>
-      </p:sp>
-      <p:sp>
-        <p:nvSpPr>
-          <p:cNvPr id="20" name="Arrow: Right 19">
-            <a:extLst>
-              <a:ext uri="{FF2B5EF4-FFF2-40B4-BE49-F238E27FC236}">
-                <a16:creationId xmlns:a16="http://schemas.microsoft.com/office/drawing/2014/main" id="{D05933D7-3AF3-EF84-4390-BC2CF27ECBAD}"/>
-              </a:ext>
-            </a:extLst>
-          </p:cNvPr>
-          <p:cNvSpPr/>
-          <p:nvPr/>
-        </p:nvSpPr>
-        <p:spPr>
-          <a:xfrm rot="13580051">
-            <a:off x="1625974" y="4805171"/>
-            <a:ext cx="557784" cy="521208"/>
-          </a:xfrm>
-          <a:prstGeom prst="rightArrow">
-            <a:avLst/>
-          </a:prstGeom>
-        </p:spPr>
-        <p:style>
-          <a:lnRef idx="2">
-            <a:schemeClr val="accent1">
-              <a:shade val="15000"/>
-            </a:schemeClr>
-          </a:lnRef>
-          <a:fillRef idx="1">
-            <a:schemeClr val="accent1"/>
-          </a:fillRef>
-          <a:effectRef idx="0">
-            <a:schemeClr val="accent1"/>
-          </a:effectRef>
-          <a:fontRef idx="minor">
-            <a:schemeClr val="lt1"/>
-          </a:fontRef>
-        </p:style>
-        <p:txBody>
-          <a:bodyPr rtlCol="0" anchor="ctr"/>
-          <a:lstStyle/>
-          <a:p>
-            <a:pPr algn="ctr"/>
-            <a:endParaRPr lang="en-IN"/>
-          </a:p>
-        </p:txBody>
-      </p:sp>
-      <p:sp>
-        <p:nvSpPr>
-          <p:cNvPr id="34" name="TextBox 33">
-            <a:extLst>
-              <a:ext uri="{FF2B5EF4-FFF2-40B4-BE49-F238E27FC236}">
-                <a16:creationId xmlns:a16="http://schemas.microsoft.com/office/drawing/2014/main" id="{0BD86805-629C-B9A0-4135-3A83F7CACD87}"/>
-              </a:ext>
-            </a:extLst>
-          </p:cNvPr>
-          <p:cNvSpPr txBox="1"/>
-          <p:nvPr/>
-        </p:nvSpPr>
-        <p:spPr>
-          <a:xfrm>
-            <a:off x="6201741" y="4029146"/>
-            <a:ext cx="6094476" cy="2585323"/>
-          </a:xfrm>
-          <a:prstGeom prst="rect">
-            <a:avLst/>
-          </a:prstGeom>
-          <a:noFill/>
-        </p:spPr>
-        <p:txBody>
-          <a:bodyPr wrap="square">
-            <a:spAutoFit/>
-          </a:bodyPr>
-          <a:lstStyle/>
-          <a:p>
-            <a:r>
-              <a:rPr lang="en-IN">
-                <a:solidFill>
-                  <a:schemeClr val="accent6">
-                    <a:lumMod val="60000"/>
-                    <a:lumOff val="40000"/>
-                  </a:schemeClr>
-                </a:solidFill>
-              </a:rPr>
-              <a:t>A real-world example: House price prediction</a:t>
-            </a:r>
-          </a:p>
-          <a:p>
-            <a:r>
-              <a:rPr lang="en-IN">
-                <a:solidFill>
-                  <a:schemeClr val="accent6">
-                    <a:lumMod val="60000"/>
-                    <a:lumOff val="40000"/>
-                  </a:schemeClr>
-                </a:solidFill>
-              </a:rPr>
-              <a:t>Imagine a company builds a house price prediction application.</a:t>
-            </a:r>
-          </a:p>
-          <a:p>
-            <a:endParaRPr lang="en-IN">
-              <a:solidFill>
-                <a:schemeClr val="accent6">
-                  <a:lumMod val="60000"/>
-                  <a:lumOff val="40000"/>
-                </a:schemeClr>
-              </a:solidFill>
-            </a:endParaRPr>
-          </a:p>
-          <a:p>
-            <a:r>
-              <a:rPr lang="en-IN">
-                <a:solidFill>
-                  <a:schemeClr val="accent6">
-                    <a:lumMod val="60000"/>
-                    <a:lumOff val="40000"/>
-                  </a:schemeClr>
-                </a:solidFill>
-              </a:rPr>
-              <a:t>1) Collect historical house prices, locations, property sizes, and numbers of bedrooms.</a:t>
-            </a:r>
-          </a:p>
-          <a:p>
-            <a:endParaRPr lang="en-IN">
-              <a:solidFill>
-                <a:schemeClr val="accent6">
-                  <a:lumMod val="60000"/>
-                  <a:lumOff val="40000"/>
-                </a:schemeClr>
-              </a:solidFill>
-            </a:endParaRPr>
-          </a:p>
-          <a:p>
-            <a:r>
-              <a:rPr lang="en-IN">
-                <a:solidFill>
-                  <a:schemeClr val="accent6">
-                    <a:lumMod val="60000"/>
-                    <a:lumOff val="40000"/>
-                  </a:schemeClr>
-                </a:solidFill>
-              </a:rPr>
-              <a:t>2 ) Train a regression model </a:t>
-            </a:r>
-          </a:p>
-          <a:p>
-            <a:endParaRPr lang="en-IN">
-              <a:solidFill>
-                <a:schemeClr val="accent6">
-                  <a:lumMod val="60000"/>
-                  <a:lumOff val="40000"/>
-                </a:schemeClr>
-              </a:solidFill>
-            </a:endParaRPr>
-          </a:p>
-          <a:p>
-            <a:r>
-              <a:rPr lang="en-IN">
-                <a:solidFill>
-                  <a:schemeClr val="accent6">
-                    <a:lumMod val="60000"/>
-                    <a:lumOff val="40000"/>
-                  </a:schemeClr>
-                </a:solidFill>
-              </a:rPr>
-              <a:t>3) Evaluate it using metrics such as MAE and RMSE.</a:t>
-            </a:r>
-          </a:p>
-        </p:txBody>
-      </p:sp>
-      <p:pic>
-        <p:nvPicPr>
-          <p:cNvPr id="41" name="Picture 40" descr="Projeto de Casa Popular - Funcional, Moderna e Acessível! - Serviços - João de Deus, Petrolina 1477269806 | OLX">
-            <a:extLst>
-              <a:ext uri="{FF2B5EF4-FFF2-40B4-BE49-F238E27FC236}">
-                <a16:creationId xmlns:a16="http://schemas.microsoft.com/office/drawing/2014/main" id="{1BD80153-A45C-213D-91C8-2C2F7C4B597B}"/>
-              </a:ext>
-            </a:extLst>
-          </p:cNvPr>
-          <p:cNvPicPr>
-            <a:picLocks noChangeAspect="1"/>
-          </p:cNvPicPr>
-          <p:nvPr/>
-        </p:nvPicPr>
-        <p:blipFill>
-          <a:blip r:embed="rId2">
-            <a:extLst>
-              <a:ext uri="{28A0092B-C50C-407E-A947-70E740481C1C}">
-                <a14:useLocalDpi xmlns:a14="http://schemas.microsoft.com/office/drawing/2010/main" val="0"/>
-              </a:ext>
-            </a:extLst>
-          </a:blip>
-          <a:srcRect/>
-          <a:stretch>
-            <a:fillRect/>
-          </a:stretch>
-        </p:blipFill>
-        <p:spPr bwMode="auto">
-          <a:xfrm>
-            <a:off x="10307285" y="2035753"/>
-            <a:ext cx="1737360" cy="1737360"/>
-          </a:xfrm>
-          <a:prstGeom prst="rect">
-            <a:avLst/>
-          </a:prstGeom>
-          <a:noFill/>
-          <a:ln>
-            <a:noFill/>
-          </a:ln>
-        </p:spPr>
-      </p:pic>
-    </p:spTree>
-    <p:extLst>
-      <p:ext uri="{BB962C8B-B14F-4D97-AF65-F5344CB8AC3E}">
-        <p14:creationId xmlns:p14="http://schemas.microsoft.com/office/powerpoint/2010/main" val="2011146020"/>
-      </p:ext>
-    </p:extLst>
-  </p:cSld>
-  <p:clrMapOvr>
-    <a:masterClrMapping/>
-  </p:clrMapOvr>
-</p:sld>
-</file>
-
-<file path=ppt/slides/slide4.xml><?xml version="1.0" encoding="utf-8"?>
-<p:sld xmlns:a="http://schemas.openxmlformats.org/drawingml/2006/main" xmlns:r="http://schemas.openxmlformats.org/officeDocument/2006/relationships" xmlns:p="http://schemas.openxmlformats.org/presentationml/2006/main">
-  <p:cSld>
-    <p:bg>
-      <p:bgPr>
-        <a:solidFill>
-          <a:schemeClr val="tx1"/>
-        </a:solidFill>
-        <a:effectLst/>
-      </p:bgPr>
-    </p:bg>
-    <p:spTree>
-      <p:nvGrpSpPr>
-        <p:cNvPr id="1" name="">
-          <a:extLst>
-            <a:ext uri="{FF2B5EF4-FFF2-40B4-BE49-F238E27FC236}">
-              <a16:creationId xmlns:a16="http://schemas.microsoft.com/office/drawing/2014/main" id="{240CA770-003F-AF1E-E751-D14EBB899D5C}"/>
-            </a:ext>
-          </a:extLst>
-        </p:cNvPr>
-        <p:cNvGrpSpPr/>
-        <p:nvPr/>
-      </p:nvGrpSpPr>
-      <p:grpSpPr>
-        <a:xfrm>
-          <a:off x="0" y="0"/>
-          <a:ext cx="0" cy="0"/>
-          <a:chOff x="0" y="0"/>
-          <a:chExt cx="0" cy="0"/>
-        </a:xfrm>
-      </p:grpSpPr>
-      <p:sp>
-        <p:nvSpPr>
-          <p:cNvPr id="3" name="TextBox 2">
-            <a:extLst>
-              <a:ext uri="{FF2B5EF4-FFF2-40B4-BE49-F238E27FC236}">
-                <a16:creationId xmlns:a16="http://schemas.microsoft.com/office/drawing/2014/main" id="{FC63EF94-0236-B1F8-1EB6-80D0F1E2A7AE}"/>
-              </a:ext>
-            </a:extLst>
-          </p:cNvPr>
-          <p:cNvSpPr txBox="1"/>
-          <p:nvPr/>
-        </p:nvSpPr>
-        <p:spPr>
-          <a:xfrm>
-            <a:off x="287682" y="36928"/>
-            <a:ext cx="11828118" cy="1200329"/>
-          </a:xfrm>
-          <a:prstGeom prst="rect">
-            <a:avLst/>
-          </a:prstGeom>
-          <a:noFill/>
-        </p:spPr>
-        <p:txBody>
-          <a:bodyPr wrap="square">
-            <a:spAutoFit/>
-          </a:bodyPr>
-          <a:lstStyle/>
-          <a:p>
-            <a:r>
-              <a:rPr lang="en-IN" sz="2400" b="1" u="sng">
-                <a:solidFill>
-                  <a:schemeClr val="accent6">
-                    <a:lumMod val="60000"/>
-                    <a:lumOff val="40000"/>
-                  </a:schemeClr>
-                </a:solidFill>
-              </a:rPr>
-              <a:t>Deployment</a:t>
-            </a:r>
-          </a:p>
-          <a:p>
-            <a:endParaRPr lang="en-IN" sz="2400">
-              <a:solidFill>
-                <a:schemeClr val="accent6">
-                  <a:lumMod val="60000"/>
-                  <a:lumOff val="40000"/>
-                </a:schemeClr>
-              </a:solidFill>
-            </a:endParaRPr>
-          </a:p>
-          <a:p>
-            <a:r>
-              <a:rPr lang="en-IN" sz="2400">
-                <a:solidFill>
-                  <a:schemeClr val="accent6">
-                    <a:lumMod val="60000"/>
-                    <a:lumOff val="40000"/>
-                  </a:schemeClr>
-                </a:solidFill>
-              </a:rPr>
-              <a:t>Expose the approved model through an API, application, or batch job.</a:t>
-            </a:r>
-          </a:p>
-        </p:txBody>
-      </p:sp>
-      <p:sp>
-        <p:nvSpPr>
-          <p:cNvPr id="6" name="Oval 5">
-            <a:extLst>
-              <a:ext uri="{FF2B5EF4-FFF2-40B4-BE49-F238E27FC236}">
-                <a16:creationId xmlns:a16="http://schemas.microsoft.com/office/drawing/2014/main" id="{BE5E1DA2-F94C-F312-E42E-B71B9115FD0D}"/>
-              </a:ext>
-            </a:extLst>
-          </p:cNvPr>
-          <p:cNvSpPr/>
-          <p:nvPr/>
-        </p:nvSpPr>
-        <p:spPr>
-          <a:xfrm>
-            <a:off x="256032" y="3310128"/>
-            <a:ext cx="1737360" cy="1517904"/>
-          </a:xfrm>
-          <a:prstGeom prst="ellipse">
-            <a:avLst/>
-          </a:prstGeom>
-        </p:spPr>
-        <p:style>
-          <a:lnRef idx="2">
-            <a:schemeClr val="accent1">
-              <a:shade val="15000"/>
-            </a:schemeClr>
-          </a:lnRef>
-          <a:fillRef idx="1">
-            <a:schemeClr val="accent1"/>
-          </a:fillRef>
-          <a:effectRef idx="0">
-            <a:schemeClr val="accent1"/>
-          </a:effectRef>
-          <a:fontRef idx="minor">
-            <a:schemeClr val="lt1"/>
-          </a:fontRef>
-        </p:style>
-        <p:txBody>
-          <a:bodyPr rtlCol="0" anchor="ctr"/>
-          <a:lstStyle/>
-          <a:p>
-            <a:pPr algn="ctr"/>
-            <a:r>
-              <a:rPr lang="en-US" sz="2400"/>
-              <a:t>Develop</a:t>
-            </a:r>
-            <a:endParaRPr lang="en-IN" sz="2400"/>
-          </a:p>
-        </p:txBody>
-      </p:sp>
-      <p:sp>
-        <p:nvSpPr>
-          <p:cNvPr id="10" name="Oval 9">
-            <a:extLst>
-              <a:ext uri="{FF2B5EF4-FFF2-40B4-BE49-F238E27FC236}">
-                <a16:creationId xmlns:a16="http://schemas.microsoft.com/office/drawing/2014/main" id="{135FF29C-30C1-E2CF-B18F-2B5F3EE873A1}"/>
-              </a:ext>
-            </a:extLst>
-          </p:cNvPr>
-          <p:cNvSpPr/>
-          <p:nvPr/>
-        </p:nvSpPr>
-        <p:spPr>
-          <a:xfrm>
-            <a:off x="3948684" y="3310128"/>
-            <a:ext cx="1737360" cy="1517904"/>
-          </a:xfrm>
-          <a:prstGeom prst="ellipse">
-            <a:avLst/>
-          </a:prstGeom>
-        </p:spPr>
-        <p:style>
-          <a:lnRef idx="2">
-            <a:schemeClr val="accent1">
-              <a:shade val="15000"/>
-            </a:schemeClr>
-          </a:lnRef>
-          <a:fillRef idx="1">
-            <a:schemeClr val="accent1"/>
-          </a:fillRef>
-          <a:effectRef idx="0">
-            <a:schemeClr val="accent1"/>
-          </a:effectRef>
-          <a:fontRef idx="minor">
-            <a:schemeClr val="lt1"/>
-          </a:fontRef>
-        </p:style>
-        <p:txBody>
-          <a:bodyPr rtlCol="0" anchor="ctr"/>
-          <a:lstStyle/>
-          <a:p>
-            <a:pPr algn="ctr"/>
-            <a:r>
-              <a:rPr lang="en-US" sz="2400"/>
-              <a:t>Deploy</a:t>
-            </a:r>
-            <a:endParaRPr lang="en-IN" sz="2400"/>
-          </a:p>
-        </p:txBody>
-      </p:sp>
-      <p:sp>
-        <p:nvSpPr>
-          <p:cNvPr id="14" name="Oval 13">
-            <a:extLst>
-              <a:ext uri="{FF2B5EF4-FFF2-40B4-BE49-F238E27FC236}">
-                <a16:creationId xmlns:a16="http://schemas.microsoft.com/office/drawing/2014/main" id="{1A338EBF-9423-F8E7-A2FA-36CF634C94D2}"/>
-              </a:ext>
-            </a:extLst>
-          </p:cNvPr>
-          <p:cNvSpPr/>
-          <p:nvPr/>
-        </p:nvSpPr>
-        <p:spPr>
-          <a:xfrm>
-            <a:off x="2138172" y="5321808"/>
-            <a:ext cx="1737360" cy="1517904"/>
-          </a:xfrm>
-          <a:prstGeom prst="ellipse">
-            <a:avLst/>
-          </a:prstGeom>
-        </p:spPr>
-        <p:style>
-          <a:lnRef idx="2">
-            <a:schemeClr val="accent1">
-              <a:shade val="15000"/>
-            </a:schemeClr>
-          </a:lnRef>
-          <a:fillRef idx="1">
-            <a:schemeClr val="accent1"/>
-          </a:fillRef>
-          <a:effectRef idx="0">
-            <a:schemeClr val="accent1"/>
-          </a:effectRef>
-          <a:fontRef idx="minor">
-            <a:schemeClr val="lt1"/>
-          </a:fontRef>
-        </p:style>
-        <p:txBody>
-          <a:bodyPr rtlCol="0" anchor="ctr"/>
-          <a:lstStyle/>
-          <a:p>
-            <a:pPr algn="ctr"/>
-            <a:r>
-              <a:rPr lang="en-US" sz="2400"/>
-              <a:t>Monitor</a:t>
-            </a:r>
-            <a:endParaRPr lang="en-IN" sz="2400"/>
-          </a:p>
-        </p:txBody>
-      </p:sp>
-      <p:sp>
-        <p:nvSpPr>
-          <p:cNvPr id="16" name="Arrow: Right 15">
-            <a:extLst>
-              <a:ext uri="{FF2B5EF4-FFF2-40B4-BE49-F238E27FC236}">
-                <a16:creationId xmlns:a16="http://schemas.microsoft.com/office/drawing/2014/main" id="{8E37CB7F-3461-44F8-D8B1-0DEC73D07198}"/>
-              </a:ext>
-            </a:extLst>
-          </p:cNvPr>
-          <p:cNvSpPr/>
-          <p:nvPr/>
-        </p:nvSpPr>
-        <p:spPr>
-          <a:xfrm>
-            <a:off x="2578608" y="3602736"/>
-            <a:ext cx="557784" cy="521208"/>
-          </a:xfrm>
-          <a:prstGeom prst="rightArrow">
-            <a:avLst/>
-          </a:prstGeom>
-        </p:spPr>
-        <p:style>
-          <a:lnRef idx="2">
-            <a:schemeClr val="accent1">
-              <a:shade val="15000"/>
-            </a:schemeClr>
-          </a:lnRef>
-          <a:fillRef idx="1">
-            <a:schemeClr val="accent1"/>
-          </a:fillRef>
-          <a:effectRef idx="0">
-            <a:schemeClr val="accent1"/>
-          </a:effectRef>
-          <a:fontRef idx="minor">
-            <a:schemeClr val="lt1"/>
-          </a:fontRef>
-        </p:style>
-        <p:txBody>
-          <a:bodyPr rtlCol="0" anchor="ctr"/>
-          <a:lstStyle/>
-          <a:p>
-            <a:pPr algn="ctr"/>
-            <a:endParaRPr lang="en-IN"/>
-          </a:p>
-        </p:txBody>
-      </p:sp>
-      <p:sp>
-        <p:nvSpPr>
-          <p:cNvPr id="18" name="Arrow: Right 17">
-            <a:extLst>
-              <a:ext uri="{FF2B5EF4-FFF2-40B4-BE49-F238E27FC236}">
-                <a16:creationId xmlns:a16="http://schemas.microsoft.com/office/drawing/2014/main" id="{9DA63D79-8998-60AC-D6C5-8E65E0D69465}"/>
-              </a:ext>
-            </a:extLst>
-          </p:cNvPr>
-          <p:cNvSpPr/>
-          <p:nvPr/>
-        </p:nvSpPr>
-        <p:spPr>
-          <a:xfrm rot="7512883">
-            <a:off x="3875532" y="4828032"/>
-            <a:ext cx="557784" cy="521208"/>
-          </a:xfrm>
-          <a:prstGeom prst="rightArrow">
-            <a:avLst/>
-          </a:prstGeom>
-        </p:spPr>
-        <p:style>
-          <a:lnRef idx="2">
-            <a:schemeClr val="accent1">
-              <a:shade val="15000"/>
-            </a:schemeClr>
-          </a:lnRef>
-          <a:fillRef idx="1">
-            <a:schemeClr val="accent1"/>
-          </a:fillRef>
-          <a:effectRef idx="0">
-            <a:schemeClr val="accent1"/>
-          </a:effectRef>
-          <a:fontRef idx="minor">
-            <a:schemeClr val="lt1"/>
-          </a:fontRef>
-        </p:style>
-        <p:txBody>
-          <a:bodyPr rtlCol="0" anchor="ctr"/>
-          <a:lstStyle/>
-          <a:p>
-            <a:pPr algn="ctr"/>
-            <a:endParaRPr lang="en-IN"/>
-          </a:p>
-        </p:txBody>
-      </p:sp>
-      <p:sp>
-        <p:nvSpPr>
-          <p:cNvPr id="20" name="Arrow: Right 19">
-            <a:extLst>
-              <a:ext uri="{FF2B5EF4-FFF2-40B4-BE49-F238E27FC236}">
-                <a16:creationId xmlns:a16="http://schemas.microsoft.com/office/drawing/2014/main" id="{02E90B5B-CFCF-CF81-1D8A-0849A5D2C210}"/>
-              </a:ext>
-            </a:extLst>
-          </p:cNvPr>
-          <p:cNvSpPr/>
-          <p:nvPr/>
-        </p:nvSpPr>
-        <p:spPr>
-          <a:xfrm rot="13580051">
-            <a:off x="1625974" y="4805171"/>
-            <a:ext cx="557784" cy="521208"/>
-          </a:xfrm>
-          <a:prstGeom prst="rightArrow">
-            <a:avLst/>
-          </a:prstGeom>
-        </p:spPr>
-        <p:style>
-          <a:lnRef idx="2">
-            <a:schemeClr val="accent1">
-              <a:shade val="15000"/>
-            </a:schemeClr>
-          </a:lnRef>
-          <a:fillRef idx="1">
-            <a:schemeClr val="accent1"/>
-          </a:fillRef>
-          <a:effectRef idx="0">
-            <a:schemeClr val="accent1"/>
-          </a:effectRef>
-          <a:fontRef idx="minor">
-            <a:schemeClr val="lt1"/>
-          </a:fontRef>
-        </p:style>
-        <p:txBody>
-          <a:bodyPr rtlCol="0" anchor="ctr"/>
-          <a:lstStyle/>
-          <a:p>
-            <a:pPr algn="ctr"/>
-            <a:endParaRPr lang="en-IN"/>
-          </a:p>
-        </p:txBody>
-      </p:sp>
-      <p:sp>
-        <p:nvSpPr>
-          <p:cNvPr id="22" name="TextBox 21">
-            <a:extLst>
-              <a:ext uri="{FF2B5EF4-FFF2-40B4-BE49-F238E27FC236}">
-                <a16:creationId xmlns:a16="http://schemas.microsoft.com/office/drawing/2014/main" id="{429E6BC2-D2C7-4D61-8DEE-0066FBA41428}"/>
-              </a:ext>
-            </a:extLst>
-          </p:cNvPr>
-          <p:cNvSpPr txBox="1"/>
-          <p:nvPr/>
-        </p:nvSpPr>
-        <p:spPr>
-          <a:xfrm>
-            <a:off x="5686044" y="3863340"/>
-            <a:ext cx="6094476" cy="923330"/>
-          </a:xfrm>
-          <a:prstGeom prst="rect">
-            <a:avLst/>
-          </a:prstGeom>
-          <a:noFill/>
-        </p:spPr>
-        <p:txBody>
-          <a:bodyPr wrap="square">
-            <a:spAutoFit/>
-          </a:bodyPr>
-          <a:lstStyle/>
-          <a:p>
-            <a:pPr>
-              <a:buNone/>
-            </a:pPr>
-            <a:r>
-              <a:rPr lang="en-IN">
-                <a:solidFill>
-                  <a:schemeClr val="accent6">
-                    <a:lumMod val="60000"/>
-                    <a:lumOff val="40000"/>
-                  </a:schemeClr>
-                </a:solidFill>
-              </a:rPr>
-              <a:t>Example:</a:t>
-            </a:r>
-          </a:p>
-          <a:p>
-            <a:pPr>
-              <a:buNone/>
-            </a:pPr>
-            <a:r>
-              <a:rPr lang="en-IN">
-                <a:solidFill>
-                  <a:schemeClr val="accent6">
-                    <a:lumMod val="60000"/>
-                    <a:lumOff val="40000"/>
-                  </a:schemeClr>
-                </a:solidFill>
-              </a:rPr>
-              <a:t>Package the model in a container and expose a prediction endpoint using FastAPI.</a:t>
-            </a:r>
-          </a:p>
-        </p:txBody>
-      </p:sp>
-      <p:pic>
-        <p:nvPicPr>
-          <p:cNvPr id="26" name="Picture 25" descr="Projeto de Casa Popular - Funcional, Moderna e Acessível! - Serviços - João de Deus, Petrolina 1477269806 | OLX">
-            <a:extLst>
-              <a:ext uri="{FF2B5EF4-FFF2-40B4-BE49-F238E27FC236}">
-                <a16:creationId xmlns:a16="http://schemas.microsoft.com/office/drawing/2014/main" id="{ACF2A893-BD0B-C1E4-0A9F-1D0F4BC8AA83}"/>
-              </a:ext>
-            </a:extLst>
-          </p:cNvPr>
-          <p:cNvPicPr>
-            <a:picLocks noChangeAspect="1"/>
-          </p:cNvPicPr>
-          <p:nvPr/>
-        </p:nvPicPr>
-        <p:blipFill>
-          <a:blip r:embed="rId2">
-            <a:extLst>
-              <a:ext uri="{28A0092B-C50C-407E-A947-70E740481C1C}">
-                <a14:useLocalDpi xmlns:a14="http://schemas.microsoft.com/office/drawing/2010/main" val="0"/>
-              </a:ext>
-            </a:extLst>
-          </a:blip>
-          <a:srcRect/>
-          <a:stretch>
-            <a:fillRect/>
-          </a:stretch>
-        </p:blipFill>
-        <p:spPr bwMode="auto">
-          <a:xfrm>
-            <a:off x="10307285" y="2035753"/>
-            <a:ext cx="1737360" cy="1737360"/>
-          </a:xfrm>
-          <a:prstGeom prst="rect">
-            <a:avLst/>
-          </a:prstGeom>
-          <a:noFill/>
-          <a:ln>
-            <a:noFill/>
-          </a:ln>
-        </p:spPr>
-      </p:pic>
-    </p:spTree>
-    <p:extLst>
-      <p:ext uri="{BB962C8B-B14F-4D97-AF65-F5344CB8AC3E}">
-        <p14:creationId xmlns:p14="http://schemas.microsoft.com/office/powerpoint/2010/main" val="2864195226"/>
-      </p:ext>
-    </p:extLst>
-  </p:cSld>
-  <p:clrMapOvr>
-    <a:masterClrMapping/>
-  </p:clrMapOvr>
-</p:sld>
-</file>
-
-<file path=ppt/slides/slide5.xml><?xml version="1.0" encoding="utf-8"?>
-<p:sld xmlns:a="http://schemas.openxmlformats.org/drawingml/2006/main" xmlns:r="http://schemas.openxmlformats.org/officeDocument/2006/relationships" xmlns:p="http://schemas.openxmlformats.org/presentationml/2006/main">
-  <p:cSld>
-    <p:bg>
-      <p:bgPr>
-        <a:solidFill>
-          <a:schemeClr val="tx1"/>
-        </a:solidFill>
-        <a:effectLst/>
-      </p:bgPr>
-    </p:bg>
-    <p:spTree>
-      <p:nvGrpSpPr>
-        <p:cNvPr id="1" name="">
-          <a:extLst>
-            <a:ext uri="{FF2B5EF4-FFF2-40B4-BE49-F238E27FC236}">
-              <a16:creationId xmlns:a16="http://schemas.microsoft.com/office/drawing/2014/main" id="{8D1AFD39-5E07-C924-9C0F-F35A955969E1}"/>
-            </a:ext>
-          </a:extLst>
-        </p:cNvPr>
-        <p:cNvGrpSpPr/>
-        <p:nvPr/>
-      </p:nvGrpSpPr>
-      <p:grpSpPr>
-        <a:xfrm>
-          <a:off x="0" y="0"/>
-          <a:ext cx="0" cy="0"/>
-          <a:chOff x="0" y="0"/>
-          <a:chExt cx="0" cy="0"/>
-        </a:xfrm>
-      </p:grpSpPr>
-      <p:sp>
-        <p:nvSpPr>
-          <p:cNvPr id="3" name="TextBox 2">
-            <a:extLst>
-              <a:ext uri="{FF2B5EF4-FFF2-40B4-BE49-F238E27FC236}">
-                <a16:creationId xmlns:a16="http://schemas.microsoft.com/office/drawing/2014/main" id="{D2DFA902-35E4-3EF6-07C6-71D0ED3AF2B5}"/>
-              </a:ext>
-            </a:extLst>
-          </p:cNvPr>
-          <p:cNvSpPr txBox="1"/>
-          <p:nvPr/>
-        </p:nvSpPr>
-        <p:spPr>
-          <a:xfrm>
-            <a:off x="287682" y="36928"/>
-            <a:ext cx="3132174" cy="3046988"/>
-          </a:xfrm>
-          <a:prstGeom prst="rect">
-            <a:avLst/>
-          </a:prstGeom>
-          <a:noFill/>
-        </p:spPr>
-        <p:txBody>
-          <a:bodyPr wrap="square">
-            <a:spAutoFit/>
-          </a:bodyPr>
-          <a:lstStyle/>
-          <a:p>
-            <a:r>
-              <a:rPr lang="en-IN" sz="2400" b="1" u="sng">
-                <a:solidFill>
-                  <a:schemeClr val="accent6">
-                    <a:lumMod val="60000"/>
-                    <a:lumOff val="40000"/>
-                  </a:schemeClr>
-                </a:solidFill>
-              </a:rPr>
-              <a:t>Monitoring</a:t>
-            </a:r>
-          </a:p>
-          <a:p>
-            <a:endParaRPr lang="en-IN" sz="2400">
-              <a:solidFill>
-                <a:schemeClr val="accent6">
-                  <a:lumMod val="60000"/>
-                  <a:lumOff val="40000"/>
-                </a:schemeClr>
-              </a:solidFill>
-            </a:endParaRPr>
-          </a:p>
-          <a:p>
-            <a:r>
-              <a:rPr lang="en-IN" sz="2400">
-                <a:solidFill>
-                  <a:schemeClr val="accent6">
-                    <a:lumMod val="60000"/>
-                    <a:lumOff val="40000"/>
-                  </a:schemeClr>
-                </a:solidFill>
-              </a:rPr>
-              <a:t>Track model </a:t>
-            </a:r>
-          </a:p>
-          <a:p>
-            <a:pPr marL="342900" indent="-342900">
-              <a:buFont typeface="Arial" panose="020B0604020202020204" pitchFamily="34" charset="0"/>
-              <a:buChar char="•"/>
-            </a:pPr>
-            <a:r>
-              <a:rPr lang="en-IN" sz="2400">
-                <a:solidFill>
-                  <a:schemeClr val="accent6">
-                    <a:lumMod val="60000"/>
-                    <a:lumOff val="40000"/>
-                  </a:schemeClr>
-                </a:solidFill>
-              </a:rPr>
-              <a:t>quality, </a:t>
-            </a:r>
-          </a:p>
-          <a:p>
-            <a:pPr marL="342900" indent="-342900">
-              <a:buFont typeface="Arial" panose="020B0604020202020204" pitchFamily="34" charset="0"/>
-              <a:buChar char="•"/>
-            </a:pPr>
-            <a:r>
-              <a:rPr lang="en-IN" sz="2400">
-                <a:solidFill>
-                  <a:schemeClr val="accent6">
-                    <a:lumMod val="60000"/>
-                    <a:lumOff val="40000"/>
-                  </a:schemeClr>
-                </a:solidFill>
-              </a:rPr>
-              <a:t>data drift, </a:t>
-            </a:r>
-          </a:p>
-          <a:p>
-            <a:pPr marL="342900" indent="-342900">
-              <a:buFont typeface="Arial" panose="020B0604020202020204" pitchFamily="34" charset="0"/>
-              <a:buChar char="•"/>
-            </a:pPr>
-            <a:r>
-              <a:rPr lang="en-IN" sz="2400">
-                <a:solidFill>
-                  <a:schemeClr val="accent6">
-                    <a:lumMod val="60000"/>
-                    <a:lumOff val="40000"/>
-                  </a:schemeClr>
-                </a:solidFill>
-              </a:rPr>
-              <a:t>latency, </a:t>
-            </a:r>
-          </a:p>
-          <a:p>
-            <a:pPr marL="342900" indent="-342900">
-              <a:buFont typeface="Arial" panose="020B0604020202020204" pitchFamily="34" charset="0"/>
-              <a:buChar char="•"/>
-            </a:pPr>
-            <a:r>
-              <a:rPr lang="en-IN" sz="2400">
-                <a:solidFill>
-                  <a:schemeClr val="accent6">
-                    <a:lumMod val="60000"/>
-                    <a:lumOff val="40000"/>
-                  </a:schemeClr>
-                </a:solidFill>
-              </a:rPr>
-              <a:t>errors, and </a:t>
-            </a:r>
-          </a:p>
-          <a:p>
-            <a:pPr marL="342900" indent="-342900">
-              <a:buFont typeface="Arial" panose="020B0604020202020204" pitchFamily="34" charset="0"/>
-              <a:buChar char="•"/>
-            </a:pPr>
-            <a:r>
-              <a:rPr lang="en-IN" sz="2400">
-                <a:solidFill>
-                  <a:schemeClr val="accent6">
-                    <a:lumMod val="60000"/>
-                    <a:lumOff val="40000"/>
-                  </a:schemeClr>
-                </a:solidFill>
-              </a:rPr>
-              <a:t>resource usage.</a:t>
-            </a:r>
-          </a:p>
-        </p:txBody>
-      </p:sp>
-      <p:sp>
-        <p:nvSpPr>
-          <p:cNvPr id="6" name="Oval 5">
-            <a:extLst>
-              <a:ext uri="{FF2B5EF4-FFF2-40B4-BE49-F238E27FC236}">
-                <a16:creationId xmlns:a16="http://schemas.microsoft.com/office/drawing/2014/main" id="{88539DAB-CEEF-FAD6-CEB3-7063C4B28827}"/>
-              </a:ext>
-            </a:extLst>
-          </p:cNvPr>
-          <p:cNvSpPr/>
-          <p:nvPr/>
-        </p:nvSpPr>
-        <p:spPr>
-          <a:xfrm>
-            <a:off x="256032" y="3310128"/>
-            <a:ext cx="1737360" cy="1517904"/>
-          </a:xfrm>
-          <a:prstGeom prst="ellipse">
-            <a:avLst/>
-          </a:prstGeom>
-        </p:spPr>
-        <p:style>
-          <a:lnRef idx="2">
-            <a:schemeClr val="accent1">
-              <a:shade val="15000"/>
-            </a:schemeClr>
-          </a:lnRef>
-          <a:fillRef idx="1">
-            <a:schemeClr val="accent1"/>
-          </a:fillRef>
-          <a:effectRef idx="0">
-            <a:schemeClr val="accent1"/>
-          </a:effectRef>
-          <a:fontRef idx="minor">
-            <a:schemeClr val="lt1"/>
-          </a:fontRef>
-        </p:style>
-        <p:txBody>
-          <a:bodyPr rtlCol="0" anchor="ctr"/>
-          <a:lstStyle/>
-          <a:p>
-            <a:pPr algn="ctr"/>
-            <a:r>
-              <a:rPr lang="en-US" sz="2400"/>
-              <a:t>Develop</a:t>
-            </a:r>
-            <a:endParaRPr lang="en-IN" sz="2400"/>
-          </a:p>
-        </p:txBody>
-      </p:sp>
-      <p:sp>
-        <p:nvSpPr>
-          <p:cNvPr id="10" name="Oval 9">
-            <a:extLst>
-              <a:ext uri="{FF2B5EF4-FFF2-40B4-BE49-F238E27FC236}">
-                <a16:creationId xmlns:a16="http://schemas.microsoft.com/office/drawing/2014/main" id="{61ABF904-D0A6-F76D-5D00-71DF4766BF03}"/>
-              </a:ext>
-            </a:extLst>
-          </p:cNvPr>
-          <p:cNvSpPr/>
-          <p:nvPr/>
-        </p:nvSpPr>
-        <p:spPr>
-          <a:xfrm>
-            <a:off x="3948684" y="3310128"/>
-            <a:ext cx="1737360" cy="1517904"/>
-          </a:xfrm>
-          <a:prstGeom prst="ellipse">
-            <a:avLst/>
-          </a:prstGeom>
-        </p:spPr>
-        <p:style>
-          <a:lnRef idx="2">
-            <a:schemeClr val="accent1">
-              <a:shade val="15000"/>
-            </a:schemeClr>
-          </a:lnRef>
-          <a:fillRef idx="1">
-            <a:schemeClr val="accent1"/>
-          </a:fillRef>
-          <a:effectRef idx="0">
-            <a:schemeClr val="accent1"/>
-          </a:effectRef>
-          <a:fontRef idx="minor">
-            <a:schemeClr val="lt1"/>
-          </a:fontRef>
-        </p:style>
-        <p:txBody>
-          <a:bodyPr rtlCol="0" anchor="ctr"/>
-          <a:lstStyle/>
-          <a:p>
-            <a:pPr algn="ctr"/>
-            <a:r>
-              <a:rPr lang="en-US" sz="2400"/>
-              <a:t>Deploy</a:t>
-            </a:r>
-            <a:endParaRPr lang="en-IN" sz="2400"/>
-          </a:p>
-        </p:txBody>
-      </p:sp>
-      <p:sp>
-        <p:nvSpPr>
-          <p:cNvPr id="14" name="Oval 13">
-            <a:extLst>
-              <a:ext uri="{FF2B5EF4-FFF2-40B4-BE49-F238E27FC236}">
-                <a16:creationId xmlns:a16="http://schemas.microsoft.com/office/drawing/2014/main" id="{3D235E68-2E3B-199F-24A6-1508DD802DDA}"/>
-              </a:ext>
-            </a:extLst>
-          </p:cNvPr>
-          <p:cNvSpPr/>
-          <p:nvPr/>
-        </p:nvSpPr>
-        <p:spPr>
-          <a:xfrm>
-            <a:off x="2138172" y="5321808"/>
-            <a:ext cx="1737360" cy="1517904"/>
-          </a:xfrm>
-          <a:prstGeom prst="ellipse">
-            <a:avLst/>
-          </a:prstGeom>
-        </p:spPr>
-        <p:style>
-          <a:lnRef idx="2">
-            <a:schemeClr val="accent1">
-              <a:shade val="15000"/>
-            </a:schemeClr>
-          </a:lnRef>
-          <a:fillRef idx="1">
-            <a:schemeClr val="accent1"/>
-          </a:fillRef>
-          <a:effectRef idx="0">
-            <a:schemeClr val="accent1"/>
-          </a:effectRef>
-          <a:fontRef idx="minor">
-            <a:schemeClr val="lt1"/>
-          </a:fontRef>
-        </p:style>
-        <p:txBody>
-          <a:bodyPr rtlCol="0" anchor="ctr"/>
-          <a:lstStyle/>
-          <a:p>
-            <a:pPr algn="ctr"/>
-            <a:r>
-              <a:rPr lang="en-US" sz="2400"/>
-              <a:t>Monitor</a:t>
-            </a:r>
-            <a:endParaRPr lang="en-IN" sz="2400"/>
-          </a:p>
-        </p:txBody>
-      </p:sp>
-      <p:sp>
-        <p:nvSpPr>
-          <p:cNvPr id="16" name="Arrow: Right 15">
-            <a:extLst>
-              <a:ext uri="{FF2B5EF4-FFF2-40B4-BE49-F238E27FC236}">
-                <a16:creationId xmlns:a16="http://schemas.microsoft.com/office/drawing/2014/main" id="{BD66C6E5-3224-EA69-B287-265A0130430B}"/>
-              </a:ext>
-            </a:extLst>
-          </p:cNvPr>
-          <p:cNvSpPr/>
-          <p:nvPr/>
-        </p:nvSpPr>
-        <p:spPr>
-          <a:xfrm>
-            <a:off x="2578608" y="3602736"/>
-            <a:ext cx="557784" cy="521208"/>
-          </a:xfrm>
-          <a:prstGeom prst="rightArrow">
-            <a:avLst/>
-          </a:prstGeom>
-        </p:spPr>
-        <p:style>
-          <a:lnRef idx="2">
-            <a:schemeClr val="accent1">
-              <a:shade val="15000"/>
-            </a:schemeClr>
-          </a:lnRef>
-          <a:fillRef idx="1">
-            <a:schemeClr val="accent1"/>
-          </a:fillRef>
-          <a:effectRef idx="0">
-            <a:schemeClr val="accent1"/>
-          </a:effectRef>
-          <a:fontRef idx="minor">
-            <a:schemeClr val="lt1"/>
-          </a:fontRef>
-        </p:style>
-        <p:txBody>
-          <a:bodyPr rtlCol="0" anchor="ctr"/>
-          <a:lstStyle/>
-          <a:p>
-            <a:pPr algn="ctr"/>
-            <a:endParaRPr lang="en-IN"/>
-          </a:p>
-        </p:txBody>
-      </p:sp>
-      <p:sp>
-        <p:nvSpPr>
-          <p:cNvPr id="18" name="Arrow: Right 17">
-            <a:extLst>
-              <a:ext uri="{FF2B5EF4-FFF2-40B4-BE49-F238E27FC236}">
-                <a16:creationId xmlns:a16="http://schemas.microsoft.com/office/drawing/2014/main" id="{532C1E59-A0D4-618C-2D7B-FECCAAA0F224}"/>
-              </a:ext>
-            </a:extLst>
-          </p:cNvPr>
-          <p:cNvSpPr/>
-          <p:nvPr/>
-        </p:nvSpPr>
-        <p:spPr>
-          <a:xfrm rot="7512883">
-            <a:off x="3875532" y="4828032"/>
-            <a:ext cx="557784" cy="521208"/>
-          </a:xfrm>
-          <a:prstGeom prst="rightArrow">
-            <a:avLst/>
-          </a:prstGeom>
-        </p:spPr>
-        <p:style>
-          <a:lnRef idx="2">
-            <a:schemeClr val="accent1">
-              <a:shade val="15000"/>
-            </a:schemeClr>
-          </a:lnRef>
-          <a:fillRef idx="1">
-            <a:schemeClr val="accent1"/>
-          </a:fillRef>
-          <a:effectRef idx="0">
-            <a:schemeClr val="accent1"/>
-          </a:effectRef>
-          <a:fontRef idx="minor">
-            <a:schemeClr val="lt1"/>
-          </a:fontRef>
-        </p:style>
-        <p:txBody>
-          <a:bodyPr rtlCol="0" anchor="ctr"/>
-          <a:lstStyle/>
-          <a:p>
-            <a:pPr algn="ctr"/>
-            <a:endParaRPr lang="en-IN"/>
-          </a:p>
-        </p:txBody>
-      </p:sp>
-      <p:sp>
-        <p:nvSpPr>
-          <p:cNvPr id="20" name="Arrow: Right 19">
-            <a:extLst>
-              <a:ext uri="{FF2B5EF4-FFF2-40B4-BE49-F238E27FC236}">
-                <a16:creationId xmlns:a16="http://schemas.microsoft.com/office/drawing/2014/main" id="{E7F3C3CD-7558-493A-CA4E-7230855B52A3}"/>
-              </a:ext>
-            </a:extLst>
-          </p:cNvPr>
-          <p:cNvSpPr/>
-          <p:nvPr/>
-        </p:nvSpPr>
-        <p:spPr>
-          <a:xfrm rot="13580051">
-            <a:off x="1625974" y="4805171"/>
-            <a:ext cx="557784" cy="521208"/>
-          </a:xfrm>
-          <a:prstGeom prst="rightArrow">
-            <a:avLst/>
-          </a:prstGeom>
-        </p:spPr>
-        <p:style>
-          <a:lnRef idx="2">
-            <a:schemeClr val="accent1">
-              <a:shade val="15000"/>
-            </a:schemeClr>
-          </a:lnRef>
-          <a:fillRef idx="1">
-            <a:schemeClr val="accent1"/>
-          </a:fillRef>
-          <a:effectRef idx="0">
-            <a:schemeClr val="accent1"/>
-          </a:effectRef>
-          <a:fontRef idx="minor">
-            <a:schemeClr val="lt1"/>
-          </a:fontRef>
-        </p:style>
-        <p:txBody>
-          <a:bodyPr rtlCol="0" anchor="ctr"/>
-          <a:lstStyle/>
-          <a:p>
-            <a:pPr algn="ctr"/>
-            <a:endParaRPr lang="en-IN"/>
-          </a:p>
-        </p:txBody>
-      </p:sp>
-      <p:sp>
-        <p:nvSpPr>
-          <p:cNvPr id="22" name="TextBox 21">
-            <a:extLst>
-              <a:ext uri="{FF2B5EF4-FFF2-40B4-BE49-F238E27FC236}">
-                <a16:creationId xmlns:a16="http://schemas.microsoft.com/office/drawing/2014/main" id="{1BCFCDB8-96C9-9B56-BAFB-BD7746DC4C25}"/>
-              </a:ext>
-            </a:extLst>
-          </p:cNvPr>
-          <p:cNvSpPr txBox="1"/>
-          <p:nvPr/>
-        </p:nvSpPr>
-        <p:spPr>
-          <a:xfrm>
-            <a:off x="4154424" y="5666815"/>
-            <a:ext cx="6094476" cy="1200329"/>
-          </a:xfrm>
-          <a:prstGeom prst="rect">
-            <a:avLst/>
-          </a:prstGeom>
-          <a:noFill/>
-        </p:spPr>
-        <p:txBody>
-          <a:bodyPr wrap="square">
-            <a:spAutoFit/>
-          </a:bodyPr>
-          <a:lstStyle/>
-          <a:p>
-            <a:pPr>
-              <a:buNone/>
-            </a:pPr>
-            <a:r>
-              <a:rPr lang="en-IN">
-                <a:solidFill>
-                  <a:schemeClr val="accent6">
-                    <a:lumMod val="60000"/>
-                    <a:lumOff val="40000"/>
-                  </a:schemeClr>
-                </a:solidFill>
-              </a:rPr>
-              <a:t>Example:</a:t>
-            </a:r>
-          </a:p>
-          <a:p>
-            <a:pPr>
-              <a:buNone/>
-            </a:pPr>
-            <a:r>
-              <a:rPr lang="en-IN">
-                <a:solidFill>
-                  <a:schemeClr val="accent6">
-                    <a:lumMod val="60000"/>
-                    <a:lumOff val="40000"/>
-                  </a:schemeClr>
-                </a:solidFill>
-              </a:rPr>
-              <a:t>Monitor prediction latency and errors. If actual sale prices show that predictions have deteriorated, investigate and retrain when justified.</a:t>
-            </a:r>
-          </a:p>
-        </p:txBody>
-      </p:sp>
-      <p:pic>
-        <p:nvPicPr>
-          <p:cNvPr id="26" name="Picture 25" descr="Projeto de Casa Popular - Funcional, Moderna e Acessível! - Serviços - João de Deus, Petrolina 1477269806 | OLX">
-            <a:extLst>
-              <a:ext uri="{FF2B5EF4-FFF2-40B4-BE49-F238E27FC236}">
-                <a16:creationId xmlns:a16="http://schemas.microsoft.com/office/drawing/2014/main" id="{1599FB0E-D79C-EE6A-A09C-B37D5DA539E5}"/>
-              </a:ext>
-            </a:extLst>
-          </p:cNvPr>
-          <p:cNvPicPr>
-            <a:picLocks noChangeAspect="1"/>
-          </p:cNvPicPr>
-          <p:nvPr/>
-        </p:nvPicPr>
-        <p:blipFill>
-          <a:blip r:embed="rId2">
-            <a:extLst>
-              <a:ext uri="{28A0092B-C50C-407E-A947-70E740481C1C}">
-                <a14:useLocalDpi xmlns:a14="http://schemas.microsoft.com/office/drawing/2010/main" val="0"/>
-              </a:ext>
-            </a:extLst>
-          </a:blip>
-          <a:srcRect/>
-          <a:stretch>
-            <a:fillRect/>
-          </a:stretch>
-        </p:blipFill>
-        <p:spPr bwMode="auto">
-          <a:xfrm>
-            <a:off x="10307285" y="2035753"/>
-            <a:ext cx="1737360" cy="1737360"/>
-          </a:xfrm>
-          <a:prstGeom prst="rect">
-            <a:avLst/>
-          </a:prstGeom>
-          <a:noFill/>
-          <a:ln>
-            <a:noFill/>
-          </a:ln>
-        </p:spPr>
-      </p:pic>
-    </p:spTree>
-    <p:extLst>
-      <p:ext uri="{BB962C8B-B14F-4D97-AF65-F5344CB8AC3E}">
-        <p14:creationId xmlns:p14="http://schemas.microsoft.com/office/powerpoint/2010/main" val="4109745484"/>
-      </p:ext>
-    </p:extLst>
-  </p:cSld>
-  <p:clrMapOvr>
-    <a:masterClrMapping/>
-  </p:clrMapOvr>
-</p:sld>
-</file>
-
-<file path=ppt/slides/slide6.xml><?xml version="1.0" encoding="utf-8"?>
-<p:sld xmlns:a="http://schemas.openxmlformats.org/drawingml/2006/main" xmlns:r="http://schemas.openxmlformats.org/officeDocument/2006/relationships" xmlns:p="http://schemas.openxmlformats.org/presentationml/2006/main">
-  <p:cSld>
-    <p:bg>
-      <p:bgPr>
-        <a:solidFill>
-          <a:schemeClr val="tx1"/>
-        </a:solidFill>
-        <a:effectLst/>
-      </p:bgPr>
-    </p:bg>
-    <p:spTree>
-      <p:nvGrpSpPr>
-        <p:cNvPr id="1" name="">
-          <a:extLst>
-            <a:ext uri="{FF2B5EF4-FFF2-40B4-BE49-F238E27FC236}">
-              <a16:creationId xmlns:a16="http://schemas.microsoft.com/office/drawing/2014/main" id="{EE3ECD5D-704C-5E47-8E9F-837EAD4BFB55}"/>
-            </a:ext>
-          </a:extLst>
-        </p:cNvPr>
-        <p:cNvGrpSpPr/>
-        <p:nvPr/>
-      </p:nvGrpSpPr>
-      <p:grpSpPr>
-        <a:xfrm>
-          <a:off x="0" y="0"/>
-          <a:ext cx="0" cy="0"/>
-          <a:chOff x="0" y="0"/>
-          <a:chExt cx="0" cy="0"/>
-        </a:xfrm>
-      </p:grpSpPr>
-      <p:sp>
-        <p:nvSpPr>
-          <p:cNvPr id="3" name="TextBox 2">
-            <a:extLst>
-              <a:ext uri="{FF2B5EF4-FFF2-40B4-BE49-F238E27FC236}">
-                <a16:creationId xmlns:a16="http://schemas.microsoft.com/office/drawing/2014/main" id="{E0ED9B0D-3D27-3E39-0B4D-BADDCF3BB5F3}"/>
-              </a:ext>
-            </a:extLst>
-          </p:cNvPr>
-          <p:cNvSpPr txBox="1"/>
-          <p:nvPr/>
-        </p:nvSpPr>
-        <p:spPr>
-          <a:xfrm>
-            <a:off x="530352" y="221456"/>
-            <a:ext cx="10643616" cy="461665"/>
-          </a:xfrm>
-          <a:prstGeom prst="rect">
-            <a:avLst/>
-          </a:prstGeom>
-          <a:noFill/>
-        </p:spPr>
-        <p:txBody>
-          <a:bodyPr wrap="square">
-            <a:spAutoFit/>
-          </a:bodyPr>
-          <a:lstStyle/>
-          <a:p>
-            <a:pPr lvl="0"/>
-            <a:r>
-              <a:rPr lang="en-IN" sz="2400" b="1">
-                <a:solidFill>
-                  <a:schemeClr val="accent6">
-                    <a:lumMod val="60000"/>
-                    <a:lumOff val="40000"/>
-                  </a:schemeClr>
-                </a:solidFill>
-              </a:rPr>
-              <a:t>How is it different from Machine Learning ?</a:t>
-            </a:r>
-          </a:p>
-        </p:txBody>
-      </p:sp>
-      <p:sp>
-        <p:nvSpPr>
-          <p:cNvPr id="6" name="TextBox 5">
-            <a:extLst>
-              <a:ext uri="{FF2B5EF4-FFF2-40B4-BE49-F238E27FC236}">
-                <a16:creationId xmlns:a16="http://schemas.microsoft.com/office/drawing/2014/main" id="{9BA9583D-9F94-9E9F-9B29-0083D25675D9}"/>
-              </a:ext>
-            </a:extLst>
-          </p:cNvPr>
-          <p:cNvSpPr txBox="1"/>
-          <p:nvPr/>
-        </p:nvSpPr>
-        <p:spPr>
-          <a:xfrm>
-            <a:off x="203454" y="1612682"/>
-            <a:ext cx="5218938" cy="1938992"/>
-          </a:xfrm>
-          <a:prstGeom prst="rect">
-            <a:avLst/>
-          </a:prstGeom>
-          <a:noFill/>
-        </p:spPr>
-        <p:txBody>
-          <a:bodyPr wrap="square">
-            <a:spAutoFit/>
-          </a:bodyPr>
-          <a:lstStyle/>
-          <a:p>
-            <a:pPr lvl="0"/>
-            <a:r>
-              <a:rPr lang="en-IN" sz="2400">
-                <a:solidFill>
-                  <a:schemeClr val="accent6">
-                    <a:lumMod val="60000"/>
-                    <a:lumOff val="40000"/>
-                  </a:schemeClr>
-                </a:solidFill>
-              </a:rPr>
-              <a:t>Machine Learning (ML) focuses on </a:t>
-            </a:r>
-            <a:r>
-              <a:rPr lang="en-IN" sz="2400" b="1" i="1">
-                <a:solidFill>
-                  <a:schemeClr val="accent6">
-                    <a:lumMod val="60000"/>
-                    <a:lumOff val="40000"/>
-                  </a:schemeClr>
-                </a:solidFill>
-              </a:rPr>
-              <a:t>building a model </a:t>
-            </a:r>
-            <a:r>
-              <a:rPr lang="en-IN" sz="2400">
-                <a:solidFill>
-                  <a:schemeClr val="accent6">
-                    <a:lumMod val="60000"/>
-                    <a:lumOff val="40000"/>
-                  </a:schemeClr>
-                </a:solidFill>
-              </a:rPr>
-              <a:t>that learns from data.</a:t>
-            </a:r>
-          </a:p>
-          <a:p>
-            <a:pPr lvl="0"/>
-            <a:endParaRPr lang="en-IN" sz="2400">
-              <a:solidFill>
-                <a:schemeClr val="accent6">
-                  <a:lumMod val="60000"/>
-                  <a:lumOff val="40000"/>
-                </a:schemeClr>
-              </a:solidFill>
-            </a:endParaRPr>
-          </a:p>
-          <a:p>
-            <a:r>
-              <a:rPr lang="en-IN" sz="2400">
-                <a:solidFill>
-                  <a:schemeClr val="accent6">
-                    <a:lumMod val="60000"/>
-                    <a:lumOff val="40000"/>
-                  </a:schemeClr>
-                </a:solidFill>
-              </a:rPr>
-              <a:t>For example, you build a ML model that predicts house prices with 92% accuracy. </a:t>
-            </a:r>
-          </a:p>
-        </p:txBody>
-      </p:sp>
-      <p:sp>
-        <p:nvSpPr>
-          <p:cNvPr id="10" name="TextBox 9">
-            <a:extLst>
-              <a:ext uri="{FF2B5EF4-FFF2-40B4-BE49-F238E27FC236}">
-                <a16:creationId xmlns:a16="http://schemas.microsoft.com/office/drawing/2014/main" id="{634E80B9-1601-2D61-50AB-0D3A386A3AE2}"/>
-              </a:ext>
-            </a:extLst>
-          </p:cNvPr>
-          <p:cNvSpPr txBox="1"/>
-          <p:nvPr/>
-        </p:nvSpPr>
-        <p:spPr>
-          <a:xfrm>
-            <a:off x="5852160" y="1612682"/>
-            <a:ext cx="6094476" cy="3416320"/>
-          </a:xfrm>
-          <a:prstGeom prst="rect">
-            <a:avLst/>
-          </a:prstGeom>
-          <a:noFill/>
-        </p:spPr>
-        <p:txBody>
-          <a:bodyPr wrap="square">
-            <a:spAutoFit/>
-          </a:bodyPr>
-          <a:lstStyle/>
-          <a:p>
-            <a:pPr lvl="0"/>
-            <a:r>
-              <a:rPr lang="en-IN" sz="2400">
-                <a:solidFill>
-                  <a:schemeClr val="accent6">
-                    <a:lumMod val="60000"/>
-                    <a:lumOff val="40000"/>
-                  </a:schemeClr>
-                </a:solidFill>
-              </a:rPr>
-              <a:t>MLOps focuses on making that model available to users, keeping it reliable, monitoring its performance, and updating it when necessary.</a:t>
-            </a:r>
-          </a:p>
-          <a:p>
-            <a:endParaRPr lang="en-IN" sz="2400">
-              <a:solidFill>
-                <a:schemeClr val="accent6">
-                  <a:lumMod val="60000"/>
-                  <a:lumOff val="40000"/>
-                </a:schemeClr>
-              </a:solidFill>
-            </a:endParaRPr>
-          </a:p>
-          <a:p>
-            <a:r>
-              <a:rPr lang="en-IN" sz="2400">
-                <a:solidFill>
-                  <a:schemeClr val="accent6">
-                    <a:lumMod val="60000"/>
-                    <a:lumOff val="40000"/>
-                  </a:schemeClr>
-                </a:solidFill>
-              </a:rPr>
-              <a:t>MLOps helps you </a:t>
-            </a:r>
-            <a:r>
-              <a:rPr lang="en-IN" sz="2400" b="1" i="1">
-                <a:solidFill>
-                  <a:schemeClr val="accent6">
-                    <a:lumMod val="60000"/>
-                    <a:lumOff val="40000"/>
-                  </a:schemeClr>
-                </a:solidFill>
-              </a:rPr>
-              <a:t>deploy that model into a website, serve predictions to users, track errors, monitor changing data, and retrain </a:t>
-            </a:r>
-            <a:r>
-              <a:rPr lang="en-IN" sz="2400">
-                <a:solidFill>
-                  <a:schemeClr val="accent6">
-                    <a:lumMod val="60000"/>
-                    <a:lumOff val="40000"/>
-                  </a:schemeClr>
-                </a:solidFill>
-              </a:rPr>
-              <a:t>the model when needed.</a:t>
-            </a:r>
-          </a:p>
-          <a:p>
-            <a:pPr lvl="0"/>
-            <a:endParaRPr lang="en-IN" sz="2400">
-              <a:solidFill>
-                <a:schemeClr val="accent6">
-                  <a:lumMod val="60000"/>
-                  <a:lumOff val="40000"/>
-                </a:schemeClr>
-              </a:solidFill>
-            </a:endParaRPr>
-          </a:p>
-        </p:txBody>
-      </p:sp>
-    </p:spTree>
-    <p:extLst>
-      <p:ext uri="{BB962C8B-B14F-4D97-AF65-F5344CB8AC3E}">
-        <p14:creationId xmlns:p14="http://schemas.microsoft.com/office/powerpoint/2010/main" val="36446097"/>
-      </p:ext>
-    </p:extLst>
-  </p:cSld>
-  <p:clrMapOvr>
-    <a:masterClrMapping/>
-  </p:clrMapOvr>
-</p:sld>
-</file>
-
-<file path=ppt/slides/slide7.xml><?xml version="1.0" encoding="utf-8"?>
-<p:sld xmlns:a="http://schemas.openxmlformats.org/drawingml/2006/main" xmlns:r="http://schemas.openxmlformats.org/officeDocument/2006/relationships" xmlns:p="http://schemas.openxmlformats.org/presentationml/2006/main">
-  <p:cSld>
-    <p:bg>
-      <p:bgPr>
-        <a:solidFill>
-          <a:schemeClr val="tx1"/>
-        </a:solidFill>
-        <a:effectLst/>
-      </p:bgPr>
-    </p:bg>
-    <p:spTree>
-      <p:nvGrpSpPr>
-        <p:cNvPr id="1" name="">
-          <a:extLst>
-            <a:ext uri="{FF2B5EF4-FFF2-40B4-BE49-F238E27FC236}">
-              <a16:creationId xmlns:a16="http://schemas.microsoft.com/office/drawing/2014/main" id="{C8EFA0BE-EA72-8E77-57A9-BC7D9365B1F3}"/>
-            </a:ext>
-          </a:extLst>
-        </p:cNvPr>
-        <p:cNvGrpSpPr/>
-        <p:nvPr/>
-      </p:nvGrpSpPr>
-      <p:grpSpPr>
-        <a:xfrm>
-          <a:off x="0" y="0"/>
-          <a:ext cx="0" cy="0"/>
-          <a:chOff x="0" y="0"/>
-          <a:chExt cx="0" cy="0"/>
-        </a:xfrm>
-      </p:grpSpPr>
-      <p:sp>
-        <p:nvSpPr>
-          <p:cNvPr id="3" name="TextBox 2">
-            <a:extLst>
-              <a:ext uri="{FF2B5EF4-FFF2-40B4-BE49-F238E27FC236}">
-                <a16:creationId xmlns:a16="http://schemas.microsoft.com/office/drawing/2014/main" id="{6428C246-90D3-2BB6-0BC9-02BA715370EE}"/>
-              </a:ext>
-            </a:extLst>
-          </p:cNvPr>
-          <p:cNvSpPr txBox="1"/>
-          <p:nvPr/>
-        </p:nvSpPr>
-        <p:spPr>
-          <a:xfrm>
-            <a:off x="530352" y="221456"/>
-            <a:ext cx="10643616" cy="4154984"/>
-          </a:xfrm>
-          <a:prstGeom prst="rect">
-            <a:avLst/>
-          </a:prstGeom>
-          <a:noFill/>
-        </p:spPr>
-        <p:txBody>
-          <a:bodyPr wrap="square">
-            <a:spAutoFit/>
-          </a:bodyPr>
-          <a:lstStyle/>
-          <a:p>
-            <a:r>
-              <a:rPr lang="en-IN" sz="2400" b="1">
-                <a:solidFill>
-                  <a:schemeClr val="accent6">
-                    <a:lumMod val="60000"/>
-                    <a:lumOff val="40000"/>
-                  </a:schemeClr>
-                </a:solidFill>
-              </a:rPr>
-              <a:t>Why do we need MLOps?</a:t>
-            </a:r>
-          </a:p>
-          <a:p>
-            <a:endParaRPr lang="en-IN" sz="2400" b="1">
-              <a:solidFill>
-                <a:schemeClr val="accent6">
-                  <a:lumMod val="60000"/>
-                  <a:lumOff val="40000"/>
-                </a:schemeClr>
-              </a:solidFill>
-            </a:endParaRPr>
-          </a:p>
-          <a:p>
-            <a:r>
-              <a:rPr lang="en-IN" sz="2400">
-                <a:solidFill>
-                  <a:schemeClr val="accent6">
-                    <a:lumMod val="60000"/>
-                    <a:lumOff val="40000"/>
-                  </a:schemeClr>
-                </a:solidFill>
-              </a:rPr>
-              <a:t>Suppose you train a model. It works well during testing, but your organization wants thousands of customers to use it every day.</a:t>
-            </a:r>
-          </a:p>
-          <a:p>
-            <a:r>
-              <a:rPr lang="en-IN" sz="2400">
-                <a:solidFill>
-                  <a:schemeClr val="accent6">
-                    <a:lumMod val="60000"/>
-                    <a:lumOff val="40000"/>
-                  </a:schemeClr>
-                </a:solidFill>
-              </a:rPr>
-              <a:t>Several problems can arise:</a:t>
-            </a:r>
-          </a:p>
-          <a:p>
-            <a:pPr marL="342900" lvl="0" indent="-342900">
-              <a:buFont typeface="Arial" panose="020B0604020202020204" pitchFamily="34" charset="0"/>
-              <a:buChar char="•"/>
-            </a:pPr>
-            <a:r>
-              <a:rPr lang="en-IN" sz="2400">
-                <a:solidFill>
-                  <a:schemeClr val="accent6">
-                    <a:lumMod val="60000"/>
-                    <a:lumOff val="40000"/>
-                  </a:schemeClr>
-                </a:solidFill>
-              </a:rPr>
-              <a:t>How do you deploy the model to a server?</a:t>
-            </a:r>
-          </a:p>
-          <a:p>
-            <a:pPr marL="342900" lvl="0" indent="-342900">
-              <a:buFont typeface="Arial" panose="020B0604020202020204" pitchFamily="34" charset="0"/>
-              <a:buChar char="•"/>
-            </a:pPr>
-            <a:r>
-              <a:rPr lang="en-IN" sz="2400">
-                <a:solidFill>
-                  <a:schemeClr val="accent6">
-                    <a:lumMod val="60000"/>
-                    <a:lumOff val="40000"/>
-                  </a:schemeClr>
-                </a:solidFill>
-              </a:rPr>
-              <a:t>What happens when new data changes the model's accuracy?</a:t>
-            </a:r>
-          </a:p>
-          <a:p>
-            <a:pPr marL="342900" lvl="0" indent="-342900">
-              <a:buFont typeface="Arial" panose="020B0604020202020204" pitchFamily="34" charset="0"/>
-              <a:buChar char="•"/>
-            </a:pPr>
-            <a:r>
-              <a:rPr lang="en-IN" sz="2400">
-                <a:solidFill>
-                  <a:schemeClr val="accent6">
-                    <a:lumMod val="60000"/>
-                    <a:lumOff val="40000"/>
-                  </a:schemeClr>
-                </a:solidFill>
-              </a:rPr>
-              <a:t>How do you retrain the model automatically?</a:t>
-            </a:r>
-          </a:p>
-          <a:p>
-            <a:pPr marL="342900" lvl="0" indent="-342900">
-              <a:buFont typeface="Arial" panose="020B0604020202020204" pitchFamily="34" charset="0"/>
-              <a:buChar char="•"/>
-            </a:pPr>
-            <a:r>
-              <a:rPr lang="en-IN" sz="2400">
-                <a:solidFill>
-                  <a:schemeClr val="accent6">
-                    <a:lumMod val="60000"/>
-                    <a:lumOff val="40000"/>
-                  </a:schemeClr>
-                </a:solidFill>
-              </a:rPr>
-              <a:t>How do you track which model version is currently deployed?</a:t>
-            </a:r>
-          </a:p>
-          <a:p>
-            <a:pPr marL="342900" lvl="0" indent="-342900">
-              <a:buFont typeface="Arial" panose="020B0604020202020204" pitchFamily="34" charset="0"/>
-              <a:buChar char="•"/>
-            </a:pPr>
-            <a:r>
-              <a:rPr lang="en-IN" sz="2400">
-                <a:solidFill>
-                  <a:schemeClr val="accent6">
-                    <a:lumMod val="60000"/>
-                    <a:lumOff val="40000"/>
-                  </a:schemeClr>
-                </a:solidFill>
-              </a:rPr>
-              <a:t>How do you roll back if a new model performs poorly?</a:t>
-            </a:r>
-          </a:p>
-          <a:p>
-            <a:r>
-              <a:rPr lang="en-IN" sz="2400">
-                <a:solidFill>
-                  <a:schemeClr val="accent6">
-                    <a:lumMod val="60000"/>
-                    <a:lumOff val="40000"/>
-                  </a:schemeClr>
-                </a:solidFill>
-              </a:rPr>
-              <a:t>MLOps addresses these challenges.</a:t>
-            </a:r>
-          </a:p>
-        </p:txBody>
-      </p:sp>
-    </p:spTree>
-    <p:extLst>
-      <p:ext uri="{BB962C8B-B14F-4D97-AF65-F5344CB8AC3E}">
-        <p14:creationId xmlns:p14="http://schemas.microsoft.com/office/powerpoint/2010/main" val="2581421227"/>
-      </p:ext>
-    </p:extLst>
-  </p:cSld>
-  <p:clrMapOvr>
-    <a:masterClrMapping/>
-  </p:clrMapOvr>
-</p:sld>
-</file>
-
-<file path=ppt/slides/slide8.xml><?xml version="1.0" encoding="utf-8"?>
+<file path=ppt/slides/slide10.xml><?xml version="1.0" encoding="utf-8"?>
 <p:sld xmlns:a="http://schemas.openxmlformats.org/drawingml/2006/main" xmlns:r="http://schemas.openxmlformats.org/officeDocument/2006/relationships" xmlns:p="http://schemas.openxmlformats.org/presentationml/2006/main">
   <p:cSld>
     <p:bg>
@@ -7287,6 +4582,3284 @@
     <p:extLst>
       <p:ext uri="{BB962C8B-B14F-4D97-AF65-F5344CB8AC3E}">
         <p14:creationId xmlns:p14="http://schemas.microsoft.com/office/powerpoint/2010/main" val="950872953"/>
+      </p:ext>
+    </p:extLst>
+  </p:cSld>
+  <p:clrMapOvr>
+    <a:masterClrMapping/>
+  </p:clrMapOvr>
+</p:sld>
+</file>
+
+<file path=ppt/slides/slide11.xml><?xml version="1.0" encoding="utf-8"?>
+<p:sld xmlns:a="http://schemas.openxmlformats.org/drawingml/2006/main" xmlns:r="http://schemas.openxmlformats.org/officeDocument/2006/relationships" xmlns:p="http://schemas.openxmlformats.org/presentationml/2006/main">
+  <p:cSld>
+    <p:bg>
+      <p:bgPr>
+        <a:solidFill>
+          <a:schemeClr val="tx1"/>
+        </a:solidFill>
+        <a:effectLst/>
+      </p:bgPr>
+    </p:bg>
+    <p:spTree>
+      <p:nvGrpSpPr>
+        <p:cNvPr id="1" name="">
+          <a:extLst>
+            <a:ext uri="{FF2B5EF4-FFF2-40B4-BE49-F238E27FC236}">
+              <a16:creationId xmlns:a16="http://schemas.microsoft.com/office/drawing/2014/main" id="{8F3A6621-DFC0-E9C0-8D8F-A61C83660AB1}"/>
+            </a:ext>
+          </a:extLst>
+        </p:cNvPr>
+        <p:cNvGrpSpPr/>
+        <p:nvPr/>
+      </p:nvGrpSpPr>
+      <p:grpSpPr>
+        <a:xfrm>
+          <a:off x="0" y="0"/>
+          <a:ext cx="0" cy="0"/>
+          <a:chOff x="0" y="0"/>
+          <a:chExt cx="0" cy="0"/>
+        </a:xfrm>
+      </p:grpSpPr>
+      <p:sp>
+        <p:nvSpPr>
+          <p:cNvPr id="3" name="TextBox 2">
+            <a:extLst>
+              <a:ext uri="{FF2B5EF4-FFF2-40B4-BE49-F238E27FC236}">
+                <a16:creationId xmlns:a16="http://schemas.microsoft.com/office/drawing/2014/main" id="{1D997210-7AB7-1E35-B5C0-F20EDC63AB4C}"/>
+              </a:ext>
+            </a:extLst>
+          </p:cNvPr>
+          <p:cNvSpPr txBox="1"/>
+          <p:nvPr/>
+        </p:nvSpPr>
+        <p:spPr>
+          <a:xfrm>
+            <a:off x="530352" y="221456"/>
+            <a:ext cx="10643616" cy="461665"/>
+          </a:xfrm>
+          <a:prstGeom prst="rect">
+            <a:avLst/>
+          </a:prstGeom>
+          <a:noFill/>
+        </p:spPr>
+        <p:txBody>
+          <a:bodyPr wrap="square">
+            <a:spAutoFit/>
+          </a:bodyPr>
+          <a:lstStyle/>
+          <a:p>
+            <a:r>
+              <a:rPr lang="en-IN" sz="2400">
+                <a:solidFill>
+                  <a:schemeClr val="accent6">
+                    <a:lumMod val="60000"/>
+                    <a:lumOff val="40000"/>
+                  </a:schemeClr>
+                </a:solidFill>
+              </a:rPr>
+              <a:t> MLOps tools</a:t>
+            </a:r>
+          </a:p>
+        </p:txBody>
+      </p:sp>
+      <p:pic>
+        <p:nvPicPr>
+          <p:cNvPr id="5" name="Picture 4">
+            <a:extLst>
+              <a:ext uri="{FF2B5EF4-FFF2-40B4-BE49-F238E27FC236}">
+                <a16:creationId xmlns:a16="http://schemas.microsoft.com/office/drawing/2014/main" id="{9DF91B58-9155-7FB8-3F03-CEFA90105F3A}"/>
+              </a:ext>
+            </a:extLst>
+          </p:cNvPr>
+          <p:cNvPicPr>
+            <a:picLocks noChangeAspect="1"/>
+          </p:cNvPicPr>
+          <p:nvPr/>
+        </p:nvPicPr>
+        <p:blipFill>
+          <a:blip r:embed="rId2"/>
+          <a:stretch>
+            <a:fillRect/>
+          </a:stretch>
+        </p:blipFill>
+        <p:spPr>
+          <a:xfrm>
+            <a:off x="7959161" y="2575597"/>
+            <a:ext cx="1705213" cy="2200582"/>
+          </a:xfrm>
+          <a:prstGeom prst="rect">
+            <a:avLst/>
+          </a:prstGeom>
+        </p:spPr>
+      </p:pic>
+      <p:pic>
+        <p:nvPicPr>
+          <p:cNvPr id="7" name="Picture 6">
+            <a:extLst>
+              <a:ext uri="{FF2B5EF4-FFF2-40B4-BE49-F238E27FC236}">
+                <a16:creationId xmlns:a16="http://schemas.microsoft.com/office/drawing/2014/main" id="{7537C318-CA48-9A2A-2E6A-B69FC37F0FA5}"/>
+              </a:ext>
+            </a:extLst>
+          </p:cNvPr>
+          <p:cNvPicPr>
+            <a:picLocks noChangeAspect="1"/>
+          </p:cNvPicPr>
+          <p:nvPr/>
+        </p:nvPicPr>
+        <p:blipFill>
+          <a:blip r:embed="rId3"/>
+          <a:stretch>
+            <a:fillRect/>
+          </a:stretch>
+        </p:blipFill>
+        <p:spPr>
+          <a:xfrm>
+            <a:off x="272673" y="1241911"/>
+            <a:ext cx="7220958" cy="4867954"/>
+          </a:xfrm>
+          <a:prstGeom prst="rect">
+            <a:avLst/>
+          </a:prstGeom>
+        </p:spPr>
+      </p:pic>
+    </p:spTree>
+    <p:extLst>
+      <p:ext uri="{BB962C8B-B14F-4D97-AF65-F5344CB8AC3E}">
+        <p14:creationId xmlns:p14="http://schemas.microsoft.com/office/powerpoint/2010/main" val="2661554937"/>
+      </p:ext>
+    </p:extLst>
+  </p:cSld>
+  <p:clrMapOvr>
+    <a:masterClrMapping/>
+  </p:clrMapOvr>
+</p:sld>
+</file>
+
+<file path=ppt/slides/slide2.xml><?xml version="1.0" encoding="utf-8"?>
+<p:sld xmlns:a="http://schemas.openxmlformats.org/drawingml/2006/main" xmlns:r="http://schemas.openxmlformats.org/officeDocument/2006/relationships" xmlns:p="http://schemas.openxmlformats.org/presentationml/2006/main">
+  <p:cSld>
+    <p:bg>
+      <p:bgPr>
+        <a:solidFill>
+          <a:schemeClr val="tx1"/>
+        </a:solidFill>
+        <a:effectLst/>
+      </p:bgPr>
+    </p:bg>
+    <p:spTree>
+      <p:nvGrpSpPr>
+        <p:cNvPr id="1" name="">
+          <a:extLst>
+            <a:ext uri="{FF2B5EF4-FFF2-40B4-BE49-F238E27FC236}">
+              <a16:creationId xmlns:a16="http://schemas.microsoft.com/office/drawing/2014/main" id="{F0DF0F9D-9903-25F0-8A74-AC133B72836A}"/>
+            </a:ext>
+          </a:extLst>
+        </p:cNvPr>
+        <p:cNvGrpSpPr/>
+        <p:nvPr/>
+      </p:nvGrpSpPr>
+      <p:grpSpPr>
+        <a:xfrm>
+          <a:off x="0" y="0"/>
+          <a:ext cx="0" cy="0"/>
+          <a:chOff x="0" y="0"/>
+          <a:chExt cx="0" cy="0"/>
+        </a:xfrm>
+      </p:grpSpPr>
+      <p:sp>
+        <p:nvSpPr>
+          <p:cNvPr id="3" name="TextBox 2">
+            <a:extLst>
+              <a:ext uri="{FF2B5EF4-FFF2-40B4-BE49-F238E27FC236}">
+                <a16:creationId xmlns:a16="http://schemas.microsoft.com/office/drawing/2014/main" id="{7DB19A1F-E8D1-61E1-4D25-BCE1C60D168E}"/>
+              </a:ext>
+            </a:extLst>
+          </p:cNvPr>
+          <p:cNvSpPr txBox="1"/>
+          <p:nvPr/>
+        </p:nvSpPr>
+        <p:spPr>
+          <a:xfrm>
+            <a:off x="118872" y="112448"/>
+            <a:ext cx="10643616" cy="2677656"/>
+          </a:xfrm>
+          <a:prstGeom prst="rect">
+            <a:avLst/>
+          </a:prstGeom>
+          <a:noFill/>
+        </p:spPr>
+        <p:txBody>
+          <a:bodyPr wrap="square">
+            <a:spAutoFit/>
+          </a:bodyPr>
+          <a:lstStyle/>
+          <a:p>
+            <a:pPr>
+              <a:buNone/>
+            </a:pPr>
+            <a:r>
+              <a:rPr lang="en-IN" sz="2400" b="1">
+                <a:solidFill>
+                  <a:schemeClr val="accent6">
+                    <a:lumMod val="60000"/>
+                    <a:lumOff val="40000"/>
+                  </a:schemeClr>
+                </a:solidFill>
+              </a:rPr>
+              <a:t>What is MLOps? </a:t>
+            </a:r>
+          </a:p>
+          <a:p>
+            <a:pPr>
+              <a:buNone/>
+            </a:pPr>
+            <a:endParaRPr lang="en-IN" sz="2400" b="1">
+              <a:solidFill>
+                <a:schemeClr val="accent6">
+                  <a:lumMod val="60000"/>
+                  <a:lumOff val="40000"/>
+                </a:schemeClr>
+              </a:solidFill>
+            </a:endParaRPr>
+          </a:p>
+          <a:p>
+            <a:pPr>
+              <a:buNone/>
+            </a:pPr>
+            <a:r>
+              <a:rPr lang="en-IN" sz="2400">
+                <a:solidFill>
+                  <a:schemeClr val="accent6">
+                    <a:lumMod val="60000"/>
+                    <a:lumOff val="40000"/>
+                  </a:schemeClr>
+                </a:solidFill>
+              </a:rPr>
+              <a:t>MLOps is a processes used to </a:t>
+            </a:r>
+          </a:p>
+          <a:p>
+            <a:pPr marL="342900" indent="-342900">
+              <a:buFont typeface="Arial" panose="020B0604020202020204" pitchFamily="34" charset="0"/>
+              <a:buChar char="•"/>
+            </a:pPr>
+            <a:r>
+              <a:rPr lang="en-IN" sz="2400">
+                <a:solidFill>
+                  <a:schemeClr val="accent6">
+                    <a:lumMod val="60000"/>
+                    <a:lumOff val="40000"/>
+                  </a:schemeClr>
+                </a:solidFill>
+              </a:rPr>
+              <a:t>Develop, </a:t>
+            </a:r>
+          </a:p>
+          <a:p>
+            <a:pPr marL="342900" indent="-342900">
+              <a:buFont typeface="Arial" panose="020B0604020202020204" pitchFamily="34" charset="0"/>
+              <a:buChar char="•"/>
+            </a:pPr>
+            <a:r>
+              <a:rPr lang="en-IN" sz="2400">
+                <a:solidFill>
+                  <a:schemeClr val="accent6">
+                    <a:lumMod val="60000"/>
+                    <a:lumOff val="40000"/>
+                  </a:schemeClr>
+                </a:solidFill>
+              </a:rPr>
+              <a:t>Deploy, </a:t>
+            </a:r>
+          </a:p>
+          <a:p>
+            <a:pPr marL="342900" indent="-342900">
+              <a:buFont typeface="Arial" panose="020B0604020202020204" pitchFamily="34" charset="0"/>
+              <a:buChar char="•"/>
+            </a:pPr>
+            <a:r>
+              <a:rPr lang="en-IN" sz="2400">
+                <a:solidFill>
+                  <a:schemeClr val="accent6">
+                    <a:lumMod val="60000"/>
+                    <a:lumOff val="40000"/>
+                  </a:schemeClr>
+                </a:solidFill>
+              </a:rPr>
+              <a:t>Monitor (and maintain)</a:t>
+            </a:r>
+          </a:p>
+          <a:p>
+            <a:pPr>
+              <a:buNone/>
+            </a:pPr>
+            <a:r>
+              <a:rPr lang="en-IN" sz="2400">
+                <a:solidFill>
+                  <a:schemeClr val="accent6">
+                    <a:lumMod val="60000"/>
+                    <a:lumOff val="40000"/>
+                  </a:schemeClr>
+                </a:solidFill>
+              </a:rPr>
+              <a:t>machine learning models in real-world applications.</a:t>
+            </a:r>
+          </a:p>
+        </p:txBody>
+      </p:sp>
+      <p:sp>
+        <p:nvSpPr>
+          <p:cNvPr id="2" name="Oval 1">
+            <a:extLst>
+              <a:ext uri="{FF2B5EF4-FFF2-40B4-BE49-F238E27FC236}">
+                <a16:creationId xmlns:a16="http://schemas.microsoft.com/office/drawing/2014/main" id="{76BF32FD-FDAD-ACA8-8595-D9B4BDE6C99D}"/>
+              </a:ext>
+            </a:extLst>
+          </p:cNvPr>
+          <p:cNvSpPr/>
+          <p:nvPr/>
+        </p:nvSpPr>
+        <p:spPr>
+          <a:xfrm>
+            <a:off x="256032" y="3310128"/>
+            <a:ext cx="1737360" cy="1517904"/>
+          </a:xfrm>
+          <a:prstGeom prst="ellipse">
+            <a:avLst/>
+          </a:prstGeom>
+        </p:spPr>
+        <p:style>
+          <a:lnRef idx="2">
+            <a:schemeClr val="accent1">
+              <a:shade val="15000"/>
+            </a:schemeClr>
+          </a:lnRef>
+          <a:fillRef idx="1">
+            <a:schemeClr val="accent1"/>
+          </a:fillRef>
+          <a:effectRef idx="0">
+            <a:schemeClr val="accent1"/>
+          </a:effectRef>
+          <a:fontRef idx="minor">
+            <a:schemeClr val="lt1"/>
+          </a:fontRef>
+        </p:style>
+        <p:txBody>
+          <a:bodyPr rtlCol="0" anchor="ctr"/>
+          <a:lstStyle/>
+          <a:p>
+            <a:pPr algn="ctr"/>
+            <a:r>
+              <a:rPr lang="en-US" sz="2400"/>
+              <a:t>Develop</a:t>
+            </a:r>
+            <a:endParaRPr lang="en-IN" sz="2400"/>
+          </a:p>
+        </p:txBody>
+      </p:sp>
+      <p:sp>
+        <p:nvSpPr>
+          <p:cNvPr id="5" name="Oval 4">
+            <a:extLst>
+              <a:ext uri="{FF2B5EF4-FFF2-40B4-BE49-F238E27FC236}">
+                <a16:creationId xmlns:a16="http://schemas.microsoft.com/office/drawing/2014/main" id="{76FC4383-7F1E-4E7E-9E89-36370BE0C59D}"/>
+              </a:ext>
+            </a:extLst>
+          </p:cNvPr>
+          <p:cNvSpPr/>
+          <p:nvPr/>
+        </p:nvSpPr>
+        <p:spPr>
+          <a:xfrm>
+            <a:off x="3948684" y="3310128"/>
+            <a:ext cx="1737360" cy="1517904"/>
+          </a:xfrm>
+          <a:prstGeom prst="ellipse">
+            <a:avLst/>
+          </a:prstGeom>
+        </p:spPr>
+        <p:style>
+          <a:lnRef idx="2">
+            <a:schemeClr val="accent1">
+              <a:shade val="15000"/>
+            </a:schemeClr>
+          </a:lnRef>
+          <a:fillRef idx="1">
+            <a:schemeClr val="accent1"/>
+          </a:fillRef>
+          <a:effectRef idx="0">
+            <a:schemeClr val="accent1"/>
+          </a:effectRef>
+          <a:fontRef idx="minor">
+            <a:schemeClr val="lt1"/>
+          </a:fontRef>
+        </p:style>
+        <p:txBody>
+          <a:bodyPr rtlCol="0" anchor="ctr"/>
+          <a:lstStyle/>
+          <a:p>
+            <a:pPr algn="ctr"/>
+            <a:r>
+              <a:rPr lang="en-US" sz="2400"/>
+              <a:t>Deploy</a:t>
+            </a:r>
+            <a:endParaRPr lang="en-IN" sz="2400"/>
+          </a:p>
+        </p:txBody>
+      </p:sp>
+      <p:sp>
+        <p:nvSpPr>
+          <p:cNvPr id="7" name="Oval 6">
+            <a:extLst>
+              <a:ext uri="{FF2B5EF4-FFF2-40B4-BE49-F238E27FC236}">
+                <a16:creationId xmlns:a16="http://schemas.microsoft.com/office/drawing/2014/main" id="{CCF946AD-4D03-3398-171F-7DA3B8AF0529}"/>
+              </a:ext>
+            </a:extLst>
+          </p:cNvPr>
+          <p:cNvSpPr/>
+          <p:nvPr/>
+        </p:nvSpPr>
+        <p:spPr>
+          <a:xfrm>
+            <a:off x="2138172" y="5321808"/>
+            <a:ext cx="1737360" cy="1517904"/>
+          </a:xfrm>
+          <a:prstGeom prst="ellipse">
+            <a:avLst/>
+          </a:prstGeom>
+        </p:spPr>
+        <p:style>
+          <a:lnRef idx="2">
+            <a:schemeClr val="accent1">
+              <a:shade val="15000"/>
+            </a:schemeClr>
+          </a:lnRef>
+          <a:fillRef idx="1">
+            <a:schemeClr val="accent1"/>
+          </a:fillRef>
+          <a:effectRef idx="0">
+            <a:schemeClr val="accent1"/>
+          </a:effectRef>
+          <a:fontRef idx="minor">
+            <a:schemeClr val="lt1"/>
+          </a:fontRef>
+        </p:style>
+        <p:txBody>
+          <a:bodyPr rtlCol="0" anchor="ctr"/>
+          <a:lstStyle/>
+          <a:p>
+            <a:pPr algn="ctr"/>
+            <a:r>
+              <a:rPr lang="en-US" sz="2400"/>
+              <a:t>Monitor</a:t>
+            </a:r>
+            <a:endParaRPr lang="en-IN" sz="2400"/>
+          </a:p>
+        </p:txBody>
+      </p:sp>
+      <p:sp>
+        <p:nvSpPr>
+          <p:cNvPr id="9" name="Arrow: Right 8">
+            <a:extLst>
+              <a:ext uri="{FF2B5EF4-FFF2-40B4-BE49-F238E27FC236}">
+                <a16:creationId xmlns:a16="http://schemas.microsoft.com/office/drawing/2014/main" id="{54423705-D30D-83DB-1AD0-75C0A3F6067E}"/>
+              </a:ext>
+            </a:extLst>
+          </p:cNvPr>
+          <p:cNvSpPr/>
+          <p:nvPr/>
+        </p:nvSpPr>
+        <p:spPr>
+          <a:xfrm>
+            <a:off x="2578608" y="3602736"/>
+            <a:ext cx="557784" cy="521208"/>
+          </a:xfrm>
+          <a:prstGeom prst="rightArrow">
+            <a:avLst/>
+          </a:prstGeom>
+        </p:spPr>
+        <p:style>
+          <a:lnRef idx="2">
+            <a:schemeClr val="accent1">
+              <a:shade val="15000"/>
+            </a:schemeClr>
+          </a:lnRef>
+          <a:fillRef idx="1">
+            <a:schemeClr val="accent1"/>
+          </a:fillRef>
+          <a:effectRef idx="0">
+            <a:schemeClr val="accent1"/>
+          </a:effectRef>
+          <a:fontRef idx="minor">
+            <a:schemeClr val="lt1"/>
+          </a:fontRef>
+        </p:style>
+        <p:txBody>
+          <a:bodyPr rtlCol="0" anchor="ctr"/>
+          <a:lstStyle/>
+          <a:p>
+            <a:pPr algn="ctr"/>
+            <a:endParaRPr lang="en-IN"/>
+          </a:p>
+        </p:txBody>
+      </p:sp>
+      <p:sp>
+        <p:nvSpPr>
+          <p:cNvPr id="11" name="Arrow: Right 10">
+            <a:extLst>
+              <a:ext uri="{FF2B5EF4-FFF2-40B4-BE49-F238E27FC236}">
+                <a16:creationId xmlns:a16="http://schemas.microsoft.com/office/drawing/2014/main" id="{DF126E34-6A4C-DD3D-4EB6-04AAC898B4B7}"/>
+              </a:ext>
+            </a:extLst>
+          </p:cNvPr>
+          <p:cNvSpPr/>
+          <p:nvPr/>
+        </p:nvSpPr>
+        <p:spPr>
+          <a:xfrm rot="7512883">
+            <a:off x="3875532" y="4828032"/>
+            <a:ext cx="557784" cy="521208"/>
+          </a:xfrm>
+          <a:prstGeom prst="rightArrow">
+            <a:avLst/>
+          </a:prstGeom>
+        </p:spPr>
+        <p:style>
+          <a:lnRef idx="2">
+            <a:schemeClr val="accent1">
+              <a:shade val="15000"/>
+            </a:schemeClr>
+          </a:lnRef>
+          <a:fillRef idx="1">
+            <a:schemeClr val="accent1"/>
+          </a:fillRef>
+          <a:effectRef idx="0">
+            <a:schemeClr val="accent1"/>
+          </a:effectRef>
+          <a:fontRef idx="minor">
+            <a:schemeClr val="lt1"/>
+          </a:fontRef>
+        </p:style>
+        <p:txBody>
+          <a:bodyPr rtlCol="0" anchor="ctr"/>
+          <a:lstStyle/>
+          <a:p>
+            <a:pPr algn="ctr"/>
+            <a:endParaRPr lang="en-IN"/>
+          </a:p>
+        </p:txBody>
+      </p:sp>
+      <p:sp>
+        <p:nvSpPr>
+          <p:cNvPr id="13" name="Arrow: Right 12">
+            <a:extLst>
+              <a:ext uri="{FF2B5EF4-FFF2-40B4-BE49-F238E27FC236}">
+                <a16:creationId xmlns:a16="http://schemas.microsoft.com/office/drawing/2014/main" id="{1E0E1AB4-BF4D-5E29-F3E2-5FAD25AE5534}"/>
+              </a:ext>
+            </a:extLst>
+          </p:cNvPr>
+          <p:cNvSpPr/>
+          <p:nvPr/>
+        </p:nvSpPr>
+        <p:spPr>
+          <a:xfrm rot="13580051">
+            <a:off x="1625974" y="4805171"/>
+            <a:ext cx="557784" cy="521208"/>
+          </a:xfrm>
+          <a:prstGeom prst="rightArrow">
+            <a:avLst/>
+          </a:prstGeom>
+        </p:spPr>
+        <p:style>
+          <a:lnRef idx="2">
+            <a:schemeClr val="accent1">
+              <a:shade val="15000"/>
+            </a:schemeClr>
+          </a:lnRef>
+          <a:fillRef idx="1">
+            <a:schemeClr val="accent1"/>
+          </a:fillRef>
+          <a:effectRef idx="0">
+            <a:schemeClr val="accent1"/>
+          </a:effectRef>
+          <a:fontRef idx="minor">
+            <a:schemeClr val="lt1"/>
+          </a:fontRef>
+        </p:style>
+        <p:txBody>
+          <a:bodyPr rtlCol="0" anchor="ctr"/>
+          <a:lstStyle/>
+          <a:p>
+            <a:pPr algn="ctr"/>
+            <a:endParaRPr lang="en-IN"/>
+          </a:p>
+        </p:txBody>
+      </p:sp>
+    </p:spTree>
+    <p:extLst>
+      <p:ext uri="{BB962C8B-B14F-4D97-AF65-F5344CB8AC3E}">
+        <p14:creationId xmlns:p14="http://schemas.microsoft.com/office/powerpoint/2010/main" val="3625312855"/>
+      </p:ext>
+    </p:extLst>
+  </p:cSld>
+  <p:clrMapOvr>
+    <a:masterClrMapping/>
+  </p:clrMapOvr>
+</p:sld>
+</file>
+
+<file path=ppt/slides/slide3.xml><?xml version="1.0" encoding="utf-8"?>
+<p:sld xmlns:a="http://schemas.openxmlformats.org/drawingml/2006/main" xmlns:r="http://schemas.openxmlformats.org/officeDocument/2006/relationships" xmlns:p="http://schemas.openxmlformats.org/presentationml/2006/main">
+  <p:cSld>
+    <p:bg>
+      <p:bgPr>
+        <a:solidFill>
+          <a:schemeClr val="tx1"/>
+        </a:solidFill>
+        <a:effectLst/>
+      </p:bgPr>
+    </p:bg>
+    <p:spTree>
+      <p:nvGrpSpPr>
+        <p:cNvPr id="1" name="">
+          <a:extLst>
+            <a:ext uri="{FF2B5EF4-FFF2-40B4-BE49-F238E27FC236}">
+              <a16:creationId xmlns:a16="http://schemas.microsoft.com/office/drawing/2014/main" id="{9F92120F-C0A4-512E-83D7-D1CB19EF0E6A}"/>
+            </a:ext>
+          </a:extLst>
+        </p:cNvPr>
+        <p:cNvGrpSpPr/>
+        <p:nvPr/>
+      </p:nvGrpSpPr>
+      <p:grpSpPr>
+        <a:xfrm>
+          <a:off x="0" y="0"/>
+          <a:ext cx="0" cy="0"/>
+          <a:chOff x="0" y="0"/>
+          <a:chExt cx="0" cy="0"/>
+        </a:xfrm>
+      </p:grpSpPr>
+      <p:sp>
+        <p:nvSpPr>
+          <p:cNvPr id="3" name="TextBox 2">
+            <a:extLst>
+              <a:ext uri="{FF2B5EF4-FFF2-40B4-BE49-F238E27FC236}">
+                <a16:creationId xmlns:a16="http://schemas.microsoft.com/office/drawing/2014/main" id="{8A71138C-18D1-1325-03A2-DFF98EBC6FC6}"/>
+              </a:ext>
+            </a:extLst>
+          </p:cNvPr>
+          <p:cNvSpPr txBox="1"/>
+          <p:nvPr/>
+        </p:nvSpPr>
+        <p:spPr>
+          <a:xfrm>
+            <a:off x="287682" y="36928"/>
+            <a:ext cx="11828118" cy="1938992"/>
+          </a:xfrm>
+          <a:prstGeom prst="rect">
+            <a:avLst/>
+          </a:prstGeom>
+          <a:noFill/>
+        </p:spPr>
+        <p:txBody>
+          <a:bodyPr wrap="square">
+            <a:spAutoFit/>
+          </a:bodyPr>
+          <a:lstStyle/>
+          <a:p>
+            <a:pPr>
+              <a:buNone/>
+            </a:pPr>
+            <a:r>
+              <a:rPr lang="en-IN" sz="2400" b="1">
+                <a:solidFill>
+                  <a:schemeClr val="accent6">
+                    <a:lumMod val="60000"/>
+                    <a:lumOff val="40000"/>
+                  </a:schemeClr>
+                </a:solidFill>
+              </a:rPr>
+              <a:t>Development</a:t>
+            </a:r>
+          </a:p>
+          <a:p>
+            <a:endParaRPr lang="en-IN" sz="2400" b="1">
+              <a:solidFill>
+                <a:schemeClr val="accent6">
+                  <a:lumMod val="60000"/>
+                  <a:lumOff val="40000"/>
+                </a:schemeClr>
+              </a:solidFill>
+            </a:endParaRPr>
+          </a:p>
+          <a:p>
+            <a:r>
+              <a:rPr lang="en-IN" sz="2400">
+                <a:solidFill>
+                  <a:schemeClr val="accent6">
+                    <a:lumMod val="60000"/>
+                    <a:lumOff val="40000"/>
+                  </a:schemeClr>
+                </a:solidFill>
+              </a:rPr>
+              <a:t>1. </a:t>
+            </a:r>
+            <a:r>
+              <a:rPr lang="en-IN" sz="2400" b="1">
+                <a:solidFill>
+                  <a:schemeClr val="accent6">
+                    <a:lumMod val="60000"/>
+                    <a:lumOff val="40000"/>
+                  </a:schemeClr>
+                </a:solidFill>
+              </a:rPr>
+              <a:t>Data Collection and Validation</a:t>
+            </a:r>
+            <a:r>
+              <a:rPr lang="en-IN" sz="2400">
+                <a:solidFill>
+                  <a:schemeClr val="accent6">
+                    <a:lumMod val="60000"/>
+                    <a:lumOff val="40000"/>
+                  </a:schemeClr>
+                </a:solidFill>
+              </a:rPr>
+              <a:t>:  Collect, validate, clean, and version the data.</a:t>
+            </a:r>
+          </a:p>
+          <a:p>
+            <a:r>
+              <a:rPr lang="en-IN" sz="2400">
+                <a:solidFill>
+                  <a:schemeClr val="accent6">
+                    <a:lumMod val="60000"/>
+                    <a:lumOff val="40000"/>
+                  </a:schemeClr>
+                </a:solidFill>
+              </a:rPr>
+              <a:t>2. </a:t>
+            </a:r>
+            <a:r>
+              <a:rPr lang="en-IN" sz="2400" b="1">
+                <a:solidFill>
+                  <a:schemeClr val="accent6">
+                    <a:lumMod val="60000"/>
+                    <a:lumOff val="40000"/>
+                  </a:schemeClr>
+                </a:solidFill>
+              </a:rPr>
+              <a:t>Model Training and Experimentation</a:t>
+            </a:r>
+            <a:r>
+              <a:rPr lang="en-IN" sz="2400">
+                <a:solidFill>
+                  <a:schemeClr val="accent6">
+                    <a:lumMod val="60000"/>
+                    <a:lumOff val="40000"/>
+                  </a:schemeClr>
+                </a:solidFill>
+              </a:rPr>
+              <a:t>: Train models, tune hyperparameters, record metrics.</a:t>
+            </a:r>
+          </a:p>
+          <a:p>
+            <a:r>
+              <a:rPr lang="en-IN" sz="2400">
+                <a:solidFill>
+                  <a:schemeClr val="accent6">
+                    <a:lumMod val="60000"/>
+                    <a:lumOff val="40000"/>
+                  </a:schemeClr>
+                </a:solidFill>
+              </a:rPr>
+              <a:t>3. </a:t>
+            </a:r>
+            <a:r>
+              <a:rPr lang="en-IN" sz="2400" b="1">
+                <a:solidFill>
+                  <a:schemeClr val="accent6">
+                    <a:lumMod val="60000"/>
+                    <a:lumOff val="40000"/>
+                  </a:schemeClr>
+                </a:solidFill>
+              </a:rPr>
+              <a:t>Model Evaluation and Approval</a:t>
+            </a:r>
+            <a:r>
+              <a:rPr lang="en-IN" sz="2400">
+                <a:solidFill>
+                  <a:schemeClr val="accent6">
+                    <a:lumMod val="60000"/>
+                    <a:lumOff val="40000"/>
+                  </a:schemeClr>
+                </a:solidFill>
+              </a:rPr>
+              <a:t>: Test accuracy, robustness, fairness, and biz requirements.</a:t>
+            </a:r>
+          </a:p>
+        </p:txBody>
+      </p:sp>
+      <p:sp>
+        <p:nvSpPr>
+          <p:cNvPr id="6" name="Oval 5">
+            <a:extLst>
+              <a:ext uri="{FF2B5EF4-FFF2-40B4-BE49-F238E27FC236}">
+                <a16:creationId xmlns:a16="http://schemas.microsoft.com/office/drawing/2014/main" id="{3E257BE4-6F24-87B3-10BB-4D37698B3BE3}"/>
+              </a:ext>
+            </a:extLst>
+          </p:cNvPr>
+          <p:cNvSpPr/>
+          <p:nvPr/>
+        </p:nvSpPr>
+        <p:spPr>
+          <a:xfrm>
+            <a:off x="256032" y="3310128"/>
+            <a:ext cx="1737360" cy="1517904"/>
+          </a:xfrm>
+          <a:prstGeom prst="ellipse">
+            <a:avLst/>
+          </a:prstGeom>
+        </p:spPr>
+        <p:style>
+          <a:lnRef idx="2">
+            <a:schemeClr val="accent1">
+              <a:shade val="15000"/>
+            </a:schemeClr>
+          </a:lnRef>
+          <a:fillRef idx="1">
+            <a:schemeClr val="accent1"/>
+          </a:fillRef>
+          <a:effectRef idx="0">
+            <a:schemeClr val="accent1"/>
+          </a:effectRef>
+          <a:fontRef idx="minor">
+            <a:schemeClr val="lt1"/>
+          </a:fontRef>
+        </p:style>
+        <p:txBody>
+          <a:bodyPr rtlCol="0" anchor="ctr"/>
+          <a:lstStyle/>
+          <a:p>
+            <a:pPr algn="ctr"/>
+            <a:r>
+              <a:rPr lang="en-US" sz="2400"/>
+              <a:t>Develop</a:t>
+            </a:r>
+            <a:endParaRPr lang="en-IN" sz="2400"/>
+          </a:p>
+        </p:txBody>
+      </p:sp>
+      <p:sp>
+        <p:nvSpPr>
+          <p:cNvPr id="10" name="Oval 9">
+            <a:extLst>
+              <a:ext uri="{FF2B5EF4-FFF2-40B4-BE49-F238E27FC236}">
+                <a16:creationId xmlns:a16="http://schemas.microsoft.com/office/drawing/2014/main" id="{C886FD61-5EB4-D803-38C4-933705B952D9}"/>
+              </a:ext>
+            </a:extLst>
+          </p:cNvPr>
+          <p:cNvSpPr/>
+          <p:nvPr/>
+        </p:nvSpPr>
+        <p:spPr>
+          <a:xfrm>
+            <a:off x="3948684" y="3310128"/>
+            <a:ext cx="1737360" cy="1517904"/>
+          </a:xfrm>
+          <a:prstGeom prst="ellipse">
+            <a:avLst/>
+          </a:prstGeom>
+        </p:spPr>
+        <p:style>
+          <a:lnRef idx="2">
+            <a:schemeClr val="accent1">
+              <a:shade val="15000"/>
+            </a:schemeClr>
+          </a:lnRef>
+          <a:fillRef idx="1">
+            <a:schemeClr val="accent1"/>
+          </a:fillRef>
+          <a:effectRef idx="0">
+            <a:schemeClr val="accent1"/>
+          </a:effectRef>
+          <a:fontRef idx="minor">
+            <a:schemeClr val="lt1"/>
+          </a:fontRef>
+        </p:style>
+        <p:txBody>
+          <a:bodyPr rtlCol="0" anchor="ctr"/>
+          <a:lstStyle/>
+          <a:p>
+            <a:pPr algn="ctr"/>
+            <a:r>
+              <a:rPr lang="en-US" sz="2400"/>
+              <a:t>Deploy</a:t>
+            </a:r>
+            <a:endParaRPr lang="en-IN" sz="2400"/>
+          </a:p>
+        </p:txBody>
+      </p:sp>
+      <p:sp>
+        <p:nvSpPr>
+          <p:cNvPr id="14" name="Oval 13">
+            <a:extLst>
+              <a:ext uri="{FF2B5EF4-FFF2-40B4-BE49-F238E27FC236}">
+                <a16:creationId xmlns:a16="http://schemas.microsoft.com/office/drawing/2014/main" id="{2FA068F8-62B7-FBCC-BFB2-D95DB71B15FA}"/>
+              </a:ext>
+            </a:extLst>
+          </p:cNvPr>
+          <p:cNvSpPr/>
+          <p:nvPr/>
+        </p:nvSpPr>
+        <p:spPr>
+          <a:xfrm>
+            <a:off x="2138172" y="5321808"/>
+            <a:ext cx="1737360" cy="1517904"/>
+          </a:xfrm>
+          <a:prstGeom prst="ellipse">
+            <a:avLst/>
+          </a:prstGeom>
+        </p:spPr>
+        <p:style>
+          <a:lnRef idx="2">
+            <a:schemeClr val="accent1">
+              <a:shade val="15000"/>
+            </a:schemeClr>
+          </a:lnRef>
+          <a:fillRef idx="1">
+            <a:schemeClr val="accent1"/>
+          </a:fillRef>
+          <a:effectRef idx="0">
+            <a:schemeClr val="accent1"/>
+          </a:effectRef>
+          <a:fontRef idx="minor">
+            <a:schemeClr val="lt1"/>
+          </a:fontRef>
+        </p:style>
+        <p:txBody>
+          <a:bodyPr rtlCol="0" anchor="ctr"/>
+          <a:lstStyle/>
+          <a:p>
+            <a:pPr algn="ctr"/>
+            <a:r>
+              <a:rPr lang="en-US" sz="2400"/>
+              <a:t>Monitor</a:t>
+            </a:r>
+            <a:endParaRPr lang="en-IN" sz="2400"/>
+          </a:p>
+        </p:txBody>
+      </p:sp>
+      <p:sp>
+        <p:nvSpPr>
+          <p:cNvPr id="16" name="Arrow: Right 15">
+            <a:extLst>
+              <a:ext uri="{FF2B5EF4-FFF2-40B4-BE49-F238E27FC236}">
+                <a16:creationId xmlns:a16="http://schemas.microsoft.com/office/drawing/2014/main" id="{B3314D71-526D-EABD-55E8-6E48D1AD36F4}"/>
+              </a:ext>
+            </a:extLst>
+          </p:cNvPr>
+          <p:cNvSpPr/>
+          <p:nvPr/>
+        </p:nvSpPr>
+        <p:spPr>
+          <a:xfrm>
+            <a:off x="2578608" y="3602736"/>
+            <a:ext cx="557784" cy="521208"/>
+          </a:xfrm>
+          <a:prstGeom prst="rightArrow">
+            <a:avLst/>
+          </a:prstGeom>
+        </p:spPr>
+        <p:style>
+          <a:lnRef idx="2">
+            <a:schemeClr val="accent1">
+              <a:shade val="15000"/>
+            </a:schemeClr>
+          </a:lnRef>
+          <a:fillRef idx="1">
+            <a:schemeClr val="accent1"/>
+          </a:fillRef>
+          <a:effectRef idx="0">
+            <a:schemeClr val="accent1"/>
+          </a:effectRef>
+          <a:fontRef idx="minor">
+            <a:schemeClr val="lt1"/>
+          </a:fontRef>
+        </p:style>
+        <p:txBody>
+          <a:bodyPr rtlCol="0" anchor="ctr"/>
+          <a:lstStyle/>
+          <a:p>
+            <a:pPr algn="ctr"/>
+            <a:endParaRPr lang="en-IN"/>
+          </a:p>
+        </p:txBody>
+      </p:sp>
+      <p:sp>
+        <p:nvSpPr>
+          <p:cNvPr id="18" name="Arrow: Right 17">
+            <a:extLst>
+              <a:ext uri="{FF2B5EF4-FFF2-40B4-BE49-F238E27FC236}">
+                <a16:creationId xmlns:a16="http://schemas.microsoft.com/office/drawing/2014/main" id="{E59D4832-2646-DF37-9735-24027088BDE6}"/>
+              </a:ext>
+            </a:extLst>
+          </p:cNvPr>
+          <p:cNvSpPr/>
+          <p:nvPr/>
+        </p:nvSpPr>
+        <p:spPr>
+          <a:xfrm rot="7512883">
+            <a:off x="3875532" y="4828032"/>
+            <a:ext cx="557784" cy="521208"/>
+          </a:xfrm>
+          <a:prstGeom prst="rightArrow">
+            <a:avLst/>
+          </a:prstGeom>
+        </p:spPr>
+        <p:style>
+          <a:lnRef idx="2">
+            <a:schemeClr val="accent1">
+              <a:shade val="15000"/>
+            </a:schemeClr>
+          </a:lnRef>
+          <a:fillRef idx="1">
+            <a:schemeClr val="accent1"/>
+          </a:fillRef>
+          <a:effectRef idx="0">
+            <a:schemeClr val="accent1"/>
+          </a:effectRef>
+          <a:fontRef idx="minor">
+            <a:schemeClr val="lt1"/>
+          </a:fontRef>
+        </p:style>
+        <p:txBody>
+          <a:bodyPr rtlCol="0" anchor="ctr"/>
+          <a:lstStyle/>
+          <a:p>
+            <a:pPr algn="ctr"/>
+            <a:endParaRPr lang="en-IN"/>
+          </a:p>
+        </p:txBody>
+      </p:sp>
+      <p:sp>
+        <p:nvSpPr>
+          <p:cNvPr id="20" name="Arrow: Right 19">
+            <a:extLst>
+              <a:ext uri="{FF2B5EF4-FFF2-40B4-BE49-F238E27FC236}">
+                <a16:creationId xmlns:a16="http://schemas.microsoft.com/office/drawing/2014/main" id="{D05933D7-3AF3-EF84-4390-BC2CF27ECBAD}"/>
+              </a:ext>
+            </a:extLst>
+          </p:cNvPr>
+          <p:cNvSpPr/>
+          <p:nvPr/>
+        </p:nvSpPr>
+        <p:spPr>
+          <a:xfrm rot="13580051">
+            <a:off x="1625974" y="4805171"/>
+            <a:ext cx="557784" cy="521208"/>
+          </a:xfrm>
+          <a:prstGeom prst="rightArrow">
+            <a:avLst/>
+          </a:prstGeom>
+        </p:spPr>
+        <p:style>
+          <a:lnRef idx="2">
+            <a:schemeClr val="accent1">
+              <a:shade val="15000"/>
+            </a:schemeClr>
+          </a:lnRef>
+          <a:fillRef idx="1">
+            <a:schemeClr val="accent1"/>
+          </a:fillRef>
+          <a:effectRef idx="0">
+            <a:schemeClr val="accent1"/>
+          </a:effectRef>
+          <a:fontRef idx="minor">
+            <a:schemeClr val="lt1"/>
+          </a:fontRef>
+        </p:style>
+        <p:txBody>
+          <a:bodyPr rtlCol="0" anchor="ctr"/>
+          <a:lstStyle/>
+          <a:p>
+            <a:pPr algn="ctr"/>
+            <a:endParaRPr lang="en-IN"/>
+          </a:p>
+        </p:txBody>
+      </p:sp>
+      <p:sp>
+        <p:nvSpPr>
+          <p:cNvPr id="34" name="TextBox 33">
+            <a:extLst>
+              <a:ext uri="{FF2B5EF4-FFF2-40B4-BE49-F238E27FC236}">
+                <a16:creationId xmlns:a16="http://schemas.microsoft.com/office/drawing/2014/main" id="{0BD86805-629C-B9A0-4135-3A83F7CACD87}"/>
+              </a:ext>
+            </a:extLst>
+          </p:cNvPr>
+          <p:cNvSpPr txBox="1"/>
+          <p:nvPr/>
+        </p:nvSpPr>
+        <p:spPr>
+          <a:xfrm>
+            <a:off x="6201741" y="4029146"/>
+            <a:ext cx="6094476" cy="2585323"/>
+          </a:xfrm>
+          <a:prstGeom prst="rect">
+            <a:avLst/>
+          </a:prstGeom>
+          <a:noFill/>
+        </p:spPr>
+        <p:txBody>
+          <a:bodyPr wrap="square">
+            <a:spAutoFit/>
+          </a:bodyPr>
+          <a:lstStyle/>
+          <a:p>
+            <a:r>
+              <a:rPr lang="en-IN">
+                <a:solidFill>
+                  <a:schemeClr val="accent6">
+                    <a:lumMod val="60000"/>
+                    <a:lumOff val="40000"/>
+                  </a:schemeClr>
+                </a:solidFill>
+              </a:rPr>
+              <a:t>A real-world example: House price prediction</a:t>
+            </a:r>
+          </a:p>
+          <a:p>
+            <a:r>
+              <a:rPr lang="en-IN">
+                <a:solidFill>
+                  <a:schemeClr val="accent6">
+                    <a:lumMod val="60000"/>
+                    <a:lumOff val="40000"/>
+                  </a:schemeClr>
+                </a:solidFill>
+              </a:rPr>
+              <a:t>Imagine a company builds a house price prediction application.</a:t>
+            </a:r>
+          </a:p>
+          <a:p>
+            <a:endParaRPr lang="en-IN">
+              <a:solidFill>
+                <a:schemeClr val="accent6">
+                  <a:lumMod val="60000"/>
+                  <a:lumOff val="40000"/>
+                </a:schemeClr>
+              </a:solidFill>
+            </a:endParaRPr>
+          </a:p>
+          <a:p>
+            <a:r>
+              <a:rPr lang="en-IN">
+                <a:solidFill>
+                  <a:schemeClr val="accent6">
+                    <a:lumMod val="60000"/>
+                    <a:lumOff val="40000"/>
+                  </a:schemeClr>
+                </a:solidFill>
+              </a:rPr>
+              <a:t>1) Collect historical house prices, locations, property sizes, and numbers of bedrooms.</a:t>
+            </a:r>
+          </a:p>
+          <a:p>
+            <a:endParaRPr lang="en-IN">
+              <a:solidFill>
+                <a:schemeClr val="accent6">
+                  <a:lumMod val="60000"/>
+                  <a:lumOff val="40000"/>
+                </a:schemeClr>
+              </a:solidFill>
+            </a:endParaRPr>
+          </a:p>
+          <a:p>
+            <a:r>
+              <a:rPr lang="en-IN">
+                <a:solidFill>
+                  <a:schemeClr val="accent6">
+                    <a:lumMod val="60000"/>
+                    <a:lumOff val="40000"/>
+                  </a:schemeClr>
+                </a:solidFill>
+              </a:rPr>
+              <a:t>2 ) Train a regression model </a:t>
+            </a:r>
+          </a:p>
+          <a:p>
+            <a:endParaRPr lang="en-IN">
+              <a:solidFill>
+                <a:schemeClr val="accent6">
+                  <a:lumMod val="60000"/>
+                  <a:lumOff val="40000"/>
+                </a:schemeClr>
+              </a:solidFill>
+            </a:endParaRPr>
+          </a:p>
+          <a:p>
+            <a:r>
+              <a:rPr lang="en-IN">
+                <a:solidFill>
+                  <a:schemeClr val="accent6">
+                    <a:lumMod val="60000"/>
+                    <a:lumOff val="40000"/>
+                  </a:schemeClr>
+                </a:solidFill>
+              </a:rPr>
+              <a:t>3) Evaluate it using metrics such as MAE and RMSE.</a:t>
+            </a:r>
+          </a:p>
+        </p:txBody>
+      </p:sp>
+      <p:pic>
+        <p:nvPicPr>
+          <p:cNvPr id="41" name="Picture 40" descr="Projeto de Casa Popular - Funcional, Moderna e Acessível! - Serviços - João de Deus, Petrolina 1477269806 | OLX">
+            <a:extLst>
+              <a:ext uri="{FF2B5EF4-FFF2-40B4-BE49-F238E27FC236}">
+                <a16:creationId xmlns:a16="http://schemas.microsoft.com/office/drawing/2014/main" id="{1BD80153-A45C-213D-91C8-2C2F7C4B597B}"/>
+              </a:ext>
+            </a:extLst>
+          </p:cNvPr>
+          <p:cNvPicPr>
+            <a:picLocks noChangeAspect="1"/>
+          </p:cNvPicPr>
+          <p:nvPr/>
+        </p:nvPicPr>
+        <p:blipFill>
+          <a:blip r:embed="rId2">
+            <a:extLst>
+              <a:ext uri="{28A0092B-C50C-407E-A947-70E740481C1C}">
+                <a14:useLocalDpi xmlns:a14="http://schemas.microsoft.com/office/drawing/2010/main" val="0"/>
+              </a:ext>
+            </a:extLst>
+          </a:blip>
+          <a:srcRect/>
+          <a:stretch>
+            <a:fillRect/>
+          </a:stretch>
+        </p:blipFill>
+        <p:spPr bwMode="auto">
+          <a:xfrm>
+            <a:off x="10307285" y="2035753"/>
+            <a:ext cx="1737360" cy="1737360"/>
+          </a:xfrm>
+          <a:prstGeom prst="rect">
+            <a:avLst/>
+          </a:prstGeom>
+          <a:noFill/>
+          <a:ln>
+            <a:noFill/>
+          </a:ln>
+        </p:spPr>
+      </p:pic>
+    </p:spTree>
+    <p:extLst>
+      <p:ext uri="{BB962C8B-B14F-4D97-AF65-F5344CB8AC3E}">
+        <p14:creationId xmlns:p14="http://schemas.microsoft.com/office/powerpoint/2010/main" val="2011146020"/>
+      </p:ext>
+    </p:extLst>
+  </p:cSld>
+  <p:clrMapOvr>
+    <a:masterClrMapping/>
+  </p:clrMapOvr>
+</p:sld>
+</file>
+
+<file path=ppt/slides/slide4.xml><?xml version="1.0" encoding="utf-8"?>
+<p:sld xmlns:a="http://schemas.openxmlformats.org/drawingml/2006/main" xmlns:r="http://schemas.openxmlformats.org/officeDocument/2006/relationships" xmlns:p="http://schemas.openxmlformats.org/presentationml/2006/main">
+  <p:cSld>
+    <p:bg>
+      <p:bgPr>
+        <a:solidFill>
+          <a:schemeClr val="tx1"/>
+        </a:solidFill>
+        <a:effectLst/>
+      </p:bgPr>
+    </p:bg>
+    <p:spTree>
+      <p:nvGrpSpPr>
+        <p:cNvPr id="1" name="">
+          <a:extLst>
+            <a:ext uri="{FF2B5EF4-FFF2-40B4-BE49-F238E27FC236}">
+              <a16:creationId xmlns:a16="http://schemas.microsoft.com/office/drawing/2014/main" id="{240CA770-003F-AF1E-E751-D14EBB899D5C}"/>
+            </a:ext>
+          </a:extLst>
+        </p:cNvPr>
+        <p:cNvGrpSpPr/>
+        <p:nvPr/>
+      </p:nvGrpSpPr>
+      <p:grpSpPr>
+        <a:xfrm>
+          <a:off x="0" y="0"/>
+          <a:ext cx="0" cy="0"/>
+          <a:chOff x="0" y="0"/>
+          <a:chExt cx="0" cy="0"/>
+        </a:xfrm>
+      </p:grpSpPr>
+      <p:sp>
+        <p:nvSpPr>
+          <p:cNvPr id="3" name="TextBox 2">
+            <a:extLst>
+              <a:ext uri="{FF2B5EF4-FFF2-40B4-BE49-F238E27FC236}">
+                <a16:creationId xmlns:a16="http://schemas.microsoft.com/office/drawing/2014/main" id="{FC63EF94-0236-B1F8-1EB6-80D0F1E2A7AE}"/>
+              </a:ext>
+            </a:extLst>
+          </p:cNvPr>
+          <p:cNvSpPr txBox="1"/>
+          <p:nvPr/>
+        </p:nvSpPr>
+        <p:spPr>
+          <a:xfrm>
+            <a:off x="287682" y="36928"/>
+            <a:ext cx="11828118" cy="1200329"/>
+          </a:xfrm>
+          <a:prstGeom prst="rect">
+            <a:avLst/>
+          </a:prstGeom>
+          <a:noFill/>
+        </p:spPr>
+        <p:txBody>
+          <a:bodyPr wrap="square">
+            <a:spAutoFit/>
+          </a:bodyPr>
+          <a:lstStyle/>
+          <a:p>
+            <a:r>
+              <a:rPr lang="en-IN" sz="2400" b="1" u="sng">
+                <a:solidFill>
+                  <a:schemeClr val="accent6">
+                    <a:lumMod val="60000"/>
+                    <a:lumOff val="40000"/>
+                  </a:schemeClr>
+                </a:solidFill>
+              </a:rPr>
+              <a:t>Deployment</a:t>
+            </a:r>
+          </a:p>
+          <a:p>
+            <a:endParaRPr lang="en-IN" sz="2400">
+              <a:solidFill>
+                <a:schemeClr val="accent6">
+                  <a:lumMod val="60000"/>
+                  <a:lumOff val="40000"/>
+                </a:schemeClr>
+              </a:solidFill>
+            </a:endParaRPr>
+          </a:p>
+          <a:p>
+            <a:r>
+              <a:rPr lang="en-IN" sz="2400">
+                <a:solidFill>
+                  <a:schemeClr val="accent6">
+                    <a:lumMod val="60000"/>
+                    <a:lumOff val="40000"/>
+                  </a:schemeClr>
+                </a:solidFill>
+              </a:rPr>
+              <a:t>Expose the approved model through an API, application, or batch job.</a:t>
+            </a:r>
+          </a:p>
+        </p:txBody>
+      </p:sp>
+      <p:sp>
+        <p:nvSpPr>
+          <p:cNvPr id="6" name="Oval 5">
+            <a:extLst>
+              <a:ext uri="{FF2B5EF4-FFF2-40B4-BE49-F238E27FC236}">
+                <a16:creationId xmlns:a16="http://schemas.microsoft.com/office/drawing/2014/main" id="{BE5E1DA2-F94C-F312-E42E-B71B9115FD0D}"/>
+              </a:ext>
+            </a:extLst>
+          </p:cNvPr>
+          <p:cNvSpPr/>
+          <p:nvPr/>
+        </p:nvSpPr>
+        <p:spPr>
+          <a:xfrm>
+            <a:off x="256032" y="3310128"/>
+            <a:ext cx="1737360" cy="1517904"/>
+          </a:xfrm>
+          <a:prstGeom prst="ellipse">
+            <a:avLst/>
+          </a:prstGeom>
+        </p:spPr>
+        <p:style>
+          <a:lnRef idx="2">
+            <a:schemeClr val="accent1">
+              <a:shade val="15000"/>
+            </a:schemeClr>
+          </a:lnRef>
+          <a:fillRef idx="1">
+            <a:schemeClr val="accent1"/>
+          </a:fillRef>
+          <a:effectRef idx="0">
+            <a:schemeClr val="accent1"/>
+          </a:effectRef>
+          <a:fontRef idx="minor">
+            <a:schemeClr val="lt1"/>
+          </a:fontRef>
+        </p:style>
+        <p:txBody>
+          <a:bodyPr rtlCol="0" anchor="ctr"/>
+          <a:lstStyle/>
+          <a:p>
+            <a:pPr algn="ctr"/>
+            <a:r>
+              <a:rPr lang="en-US" sz="2400"/>
+              <a:t>Develop</a:t>
+            </a:r>
+            <a:endParaRPr lang="en-IN" sz="2400"/>
+          </a:p>
+        </p:txBody>
+      </p:sp>
+      <p:sp>
+        <p:nvSpPr>
+          <p:cNvPr id="10" name="Oval 9">
+            <a:extLst>
+              <a:ext uri="{FF2B5EF4-FFF2-40B4-BE49-F238E27FC236}">
+                <a16:creationId xmlns:a16="http://schemas.microsoft.com/office/drawing/2014/main" id="{135FF29C-30C1-E2CF-B18F-2B5F3EE873A1}"/>
+              </a:ext>
+            </a:extLst>
+          </p:cNvPr>
+          <p:cNvSpPr/>
+          <p:nvPr/>
+        </p:nvSpPr>
+        <p:spPr>
+          <a:xfrm>
+            <a:off x="3948684" y="3310128"/>
+            <a:ext cx="1737360" cy="1517904"/>
+          </a:xfrm>
+          <a:prstGeom prst="ellipse">
+            <a:avLst/>
+          </a:prstGeom>
+        </p:spPr>
+        <p:style>
+          <a:lnRef idx="2">
+            <a:schemeClr val="accent1">
+              <a:shade val="15000"/>
+            </a:schemeClr>
+          </a:lnRef>
+          <a:fillRef idx="1">
+            <a:schemeClr val="accent1"/>
+          </a:fillRef>
+          <a:effectRef idx="0">
+            <a:schemeClr val="accent1"/>
+          </a:effectRef>
+          <a:fontRef idx="minor">
+            <a:schemeClr val="lt1"/>
+          </a:fontRef>
+        </p:style>
+        <p:txBody>
+          <a:bodyPr rtlCol="0" anchor="ctr"/>
+          <a:lstStyle/>
+          <a:p>
+            <a:pPr algn="ctr"/>
+            <a:r>
+              <a:rPr lang="en-US" sz="2400"/>
+              <a:t>Deploy</a:t>
+            </a:r>
+            <a:endParaRPr lang="en-IN" sz="2400"/>
+          </a:p>
+        </p:txBody>
+      </p:sp>
+      <p:sp>
+        <p:nvSpPr>
+          <p:cNvPr id="14" name="Oval 13">
+            <a:extLst>
+              <a:ext uri="{FF2B5EF4-FFF2-40B4-BE49-F238E27FC236}">
+                <a16:creationId xmlns:a16="http://schemas.microsoft.com/office/drawing/2014/main" id="{1A338EBF-9423-F8E7-A2FA-36CF634C94D2}"/>
+              </a:ext>
+            </a:extLst>
+          </p:cNvPr>
+          <p:cNvSpPr/>
+          <p:nvPr/>
+        </p:nvSpPr>
+        <p:spPr>
+          <a:xfrm>
+            <a:off x="2138172" y="5321808"/>
+            <a:ext cx="1737360" cy="1517904"/>
+          </a:xfrm>
+          <a:prstGeom prst="ellipse">
+            <a:avLst/>
+          </a:prstGeom>
+        </p:spPr>
+        <p:style>
+          <a:lnRef idx="2">
+            <a:schemeClr val="accent1">
+              <a:shade val="15000"/>
+            </a:schemeClr>
+          </a:lnRef>
+          <a:fillRef idx="1">
+            <a:schemeClr val="accent1"/>
+          </a:fillRef>
+          <a:effectRef idx="0">
+            <a:schemeClr val="accent1"/>
+          </a:effectRef>
+          <a:fontRef idx="minor">
+            <a:schemeClr val="lt1"/>
+          </a:fontRef>
+        </p:style>
+        <p:txBody>
+          <a:bodyPr rtlCol="0" anchor="ctr"/>
+          <a:lstStyle/>
+          <a:p>
+            <a:pPr algn="ctr"/>
+            <a:r>
+              <a:rPr lang="en-US" sz="2400"/>
+              <a:t>Monitor</a:t>
+            </a:r>
+            <a:endParaRPr lang="en-IN" sz="2400"/>
+          </a:p>
+        </p:txBody>
+      </p:sp>
+      <p:sp>
+        <p:nvSpPr>
+          <p:cNvPr id="16" name="Arrow: Right 15">
+            <a:extLst>
+              <a:ext uri="{FF2B5EF4-FFF2-40B4-BE49-F238E27FC236}">
+                <a16:creationId xmlns:a16="http://schemas.microsoft.com/office/drawing/2014/main" id="{8E37CB7F-3461-44F8-D8B1-0DEC73D07198}"/>
+              </a:ext>
+            </a:extLst>
+          </p:cNvPr>
+          <p:cNvSpPr/>
+          <p:nvPr/>
+        </p:nvSpPr>
+        <p:spPr>
+          <a:xfrm>
+            <a:off x="2578608" y="3602736"/>
+            <a:ext cx="557784" cy="521208"/>
+          </a:xfrm>
+          <a:prstGeom prst="rightArrow">
+            <a:avLst/>
+          </a:prstGeom>
+        </p:spPr>
+        <p:style>
+          <a:lnRef idx="2">
+            <a:schemeClr val="accent1">
+              <a:shade val="15000"/>
+            </a:schemeClr>
+          </a:lnRef>
+          <a:fillRef idx="1">
+            <a:schemeClr val="accent1"/>
+          </a:fillRef>
+          <a:effectRef idx="0">
+            <a:schemeClr val="accent1"/>
+          </a:effectRef>
+          <a:fontRef idx="minor">
+            <a:schemeClr val="lt1"/>
+          </a:fontRef>
+        </p:style>
+        <p:txBody>
+          <a:bodyPr rtlCol="0" anchor="ctr"/>
+          <a:lstStyle/>
+          <a:p>
+            <a:pPr algn="ctr"/>
+            <a:endParaRPr lang="en-IN"/>
+          </a:p>
+        </p:txBody>
+      </p:sp>
+      <p:sp>
+        <p:nvSpPr>
+          <p:cNvPr id="18" name="Arrow: Right 17">
+            <a:extLst>
+              <a:ext uri="{FF2B5EF4-FFF2-40B4-BE49-F238E27FC236}">
+                <a16:creationId xmlns:a16="http://schemas.microsoft.com/office/drawing/2014/main" id="{9DA63D79-8998-60AC-D6C5-8E65E0D69465}"/>
+              </a:ext>
+            </a:extLst>
+          </p:cNvPr>
+          <p:cNvSpPr/>
+          <p:nvPr/>
+        </p:nvSpPr>
+        <p:spPr>
+          <a:xfrm rot="7512883">
+            <a:off x="3875532" y="4828032"/>
+            <a:ext cx="557784" cy="521208"/>
+          </a:xfrm>
+          <a:prstGeom prst="rightArrow">
+            <a:avLst/>
+          </a:prstGeom>
+        </p:spPr>
+        <p:style>
+          <a:lnRef idx="2">
+            <a:schemeClr val="accent1">
+              <a:shade val="15000"/>
+            </a:schemeClr>
+          </a:lnRef>
+          <a:fillRef idx="1">
+            <a:schemeClr val="accent1"/>
+          </a:fillRef>
+          <a:effectRef idx="0">
+            <a:schemeClr val="accent1"/>
+          </a:effectRef>
+          <a:fontRef idx="minor">
+            <a:schemeClr val="lt1"/>
+          </a:fontRef>
+        </p:style>
+        <p:txBody>
+          <a:bodyPr rtlCol="0" anchor="ctr"/>
+          <a:lstStyle/>
+          <a:p>
+            <a:pPr algn="ctr"/>
+            <a:endParaRPr lang="en-IN"/>
+          </a:p>
+        </p:txBody>
+      </p:sp>
+      <p:sp>
+        <p:nvSpPr>
+          <p:cNvPr id="20" name="Arrow: Right 19">
+            <a:extLst>
+              <a:ext uri="{FF2B5EF4-FFF2-40B4-BE49-F238E27FC236}">
+                <a16:creationId xmlns:a16="http://schemas.microsoft.com/office/drawing/2014/main" id="{02E90B5B-CFCF-CF81-1D8A-0849A5D2C210}"/>
+              </a:ext>
+            </a:extLst>
+          </p:cNvPr>
+          <p:cNvSpPr/>
+          <p:nvPr/>
+        </p:nvSpPr>
+        <p:spPr>
+          <a:xfrm rot="13580051">
+            <a:off x="1625974" y="4805171"/>
+            <a:ext cx="557784" cy="521208"/>
+          </a:xfrm>
+          <a:prstGeom prst="rightArrow">
+            <a:avLst/>
+          </a:prstGeom>
+        </p:spPr>
+        <p:style>
+          <a:lnRef idx="2">
+            <a:schemeClr val="accent1">
+              <a:shade val="15000"/>
+            </a:schemeClr>
+          </a:lnRef>
+          <a:fillRef idx="1">
+            <a:schemeClr val="accent1"/>
+          </a:fillRef>
+          <a:effectRef idx="0">
+            <a:schemeClr val="accent1"/>
+          </a:effectRef>
+          <a:fontRef idx="minor">
+            <a:schemeClr val="lt1"/>
+          </a:fontRef>
+        </p:style>
+        <p:txBody>
+          <a:bodyPr rtlCol="0" anchor="ctr"/>
+          <a:lstStyle/>
+          <a:p>
+            <a:pPr algn="ctr"/>
+            <a:endParaRPr lang="en-IN"/>
+          </a:p>
+        </p:txBody>
+      </p:sp>
+      <p:sp>
+        <p:nvSpPr>
+          <p:cNvPr id="22" name="TextBox 21">
+            <a:extLst>
+              <a:ext uri="{FF2B5EF4-FFF2-40B4-BE49-F238E27FC236}">
+                <a16:creationId xmlns:a16="http://schemas.microsoft.com/office/drawing/2014/main" id="{429E6BC2-D2C7-4D61-8DEE-0066FBA41428}"/>
+              </a:ext>
+            </a:extLst>
+          </p:cNvPr>
+          <p:cNvSpPr txBox="1"/>
+          <p:nvPr/>
+        </p:nvSpPr>
+        <p:spPr>
+          <a:xfrm>
+            <a:off x="5686044" y="3863340"/>
+            <a:ext cx="6094476" cy="923330"/>
+          </a:xfrm>
+          <a:prstGeom prst="rect">
+            <a:avLst/>
+          </a:prstGeom>
+          <a:noFill/>
+        </p:spPr>
+        <p:txBody>
+          <a:bodyPr wrap="square">
+            <a:spAutoFit/>
+          </a:bodyPr>
+          <a:lstStyle/>
+          <a:p>
+            <a:pPr>
+              <a:buNone/>
+            </a:pPr>
+            <a:r>
+              <a:rPr lang="en-IN">
+                <a:solidFill>
+                  <a:schemeClr val="accent6">
+                    <a:lumMod val="60000"/>
+                    <a:lumOff val="40000"/>
+                  </a:schemeClr>
+                </a:solidFill>
+              </a:rPr>
+              <a:t>Example:</a:t>
+            </a:r>
+          </a:p>
+          <a:p>
+            <a:pPr>
+              <a:buNone/>
+            </a:pPr>
+            <a:r>
+              <a:rPr lang="en-IN">
+                <a:solidFill>
+                  <a:schemeClr val="accent6">
+                    <a:lumMod val="60000"/>
+                    <a:lumOff val="40000"/>
+                  </a:schemeClr>
+                </a:solidFill>
+              </a:rPr>
+              <a:t>Package the model in a container and expose a prediction endpoint using FastAPI.</a:t>
+            </a:r>
+          </a:p>
+        </p:txBody>
+      </p:sp>
+      <p:pic>
+        <p:nvPicPr>
+          <p:cNvPr id="26" name="Picture 25" descr="Projeto de Casa Popular - Funcional, Moderna e Acessível! - Serviços - João de Deus, Petrolina 1477269806 | OLX">
+            <a:extLst>
+              <a:ext uri="{FF2B5EF4-FFF2-40B4-BE49-F238E27FC236}">
+                <a16:creationId xmlns:a16="http://schemas.microsoft.com/office/drawing/2014/main" id="{ACF2A893-BD0B-C1E4-0A9F-1D0F4BC8AA83}"/>
+              </a:ext>
+            </a:extLst>
+          </p:cNvPr>
+          <p:cNvPicPr>
+            <a:picLocks noChangeAspect="1"/>
+          </p:cNvPicPr>
+          <p:nvPr/>
+        </p:nvPicPr>
+        <p:blipFill>
+          <a:blip r:embed="rId2">
+            <a:extLst>
+              <a:ext uri="{28A0092B-C50C-407E-A947-70E740481C1C}">
+                <a14:useLocalDpi xmlns:a14="http://schemas.microsoft.com/office/drawing/2010/main" val="0"/>
+              </a:ext>
+            </a:extLst>
+          </a:blip>
+          <a:srcRect/>
+          <a:stretch>
+            <a:fillRect/>
+          </a:stretch>
+        </p:blipFill>
+        <p:spPr bwMode="auto">
+          <a:xfrm>
+            <a:off x="10307285" y="2035753"/>
+            <a:ext cx="1737360" cy="1737360"/>
+          </a:xfrm>
+          <a:prstGeom prst="rect">
+            <a:avLst/>
+          </a:prstGeom>
+          <a:noFill/>
+          <a:ln>
+            <a:noFill/>
+          </a:ln>
+        </p:spPr>
+      </p:pic>
+    </p:spTree>
+    <p:extLst>
+      <p:ext uri="{BB962C8B-B14F-4D97-AF65-F5344CB8AC3E}">
+        <p14:creationId xmlns:p14="http://schemas.microsoft.com/office/powerpoint/2010/main" val="2864195226"/>
+      </p:ext>
+    </p:extLst>
+  </p:cSld>
+  <p:clrMapOvr>
+    <a:masterClrMapping/>
+  </p:clrMapOvr>
+</p:sld>
+</file>
+
+<file path=ppt/slides/slide5.xml><?xml version="1.0" encoding="utf-8"?>
+<p:sld xmlns:a="http://schemas.openxmlformats.org/drawingml/2006/main" xmlns:r="http://schemas.openxmlformats.org/officeDocument/2006/relationships" xmlns:p="http://schemas.openxmlformats.org/presentationml/2006/main">
+  <p:cSld>
+    <p:bg>
+      <p:bgPr>
+        <a:solidFill>
+          <a:schemeClr val="tx1"/>
+        </a:solidFill>
+        <a:effectLst/>
+      </p:bgPr>
+    </p:bg>
+    <p:spTree>
+      <p:nvGrpSpPr>
+        <p:cNvPr id="1" name="">
+          <a:extLst>
+            <a:ext uri="{FF2B5EF4-FFF2-40B4-BE49-F238E27FC236}">
+              <a16:creationId xmlns:a16="http://schemas.microsoft.com/office/drawing/2014/main" id="{8D1AFD39-5E07-C924-9C0F-F35A955969E1}"/>
+            </a:ext>
+          </a:extLst>
+        </p:cNvPr>
+        <p:cNvGrpSpPr/>
+        <p:nvPr/>
+      </p:nvGrpSpPr>
+      <p:grpSpPr>
+        <a:xfrm>
+          <a:off x="0" y="0"/>
+          <a:ext cx="0" cy="0"/>
+          <a:chOff x="0" y="0"/>
+          <a:chExt cx="0" cy="0"/>
+        </a:xfrm>
+      </p:grpSpPr>
+      <p:sp>
+        <p:nvSpPr>
+          <p:cNvPr id="3" name="TextBox 2">
+            <a:extLst>
+              <a:ext uri="{FF2B5EF4-FFF2-40B4-BE49-F238E27FC236}">
+                <a16:creationId xmlns:a16="http://schemas.microsoft.com/office/drawing/2014/main" id="{D2DFA902-35E4-3EF6-07C6-71D0ED3AF2B5}"/>
+              </a:ext>
+            </a:extLst>
+          </p:cNvPr>
+          <p:cNvSpPr txBox="1"/>
+          <p:nvPr/>
+        </p:nvSpPr>
+        <p:spPr>
+          <a:xfrm>
+            <a:off x="287682" y="36928"/>
+            <a:ext cx="3132174" cy="3046988"/>
+          </a:xfrm>
+          <a:prstGeom prst="rect">
+            <a:avLst/>
+          </a:prstGeom>
+          <a:noFill/>
+        </p:spPr>
+        <p:txBody>
+          <a:bodyPr wrap="square">
+            <a:spAutoFit/>
+          </a:bodyPr>
+          <a:lstStyle/>
+          <a:p>
+            <a:r>
+              <a:rPr lang="en-IN" sz="2400" b="1" u="sng">
+                <a:solidFill>
+                  <a:schemeClr val="accent6">
+                    <a:lumMod val="60000"/>
+                    <a:lumOff val="40000"/>
+                  </a:schemeClr>
+                </a:solidFill>
+              </a:rPr>
+              <a:t>Monitoring</a:t>
+            </a:r>
+          </a:p>
+          <a:p>
+            <a:endParaRPr lang="en-IN" sz="2400">
+              <a:solidFill>
+                <a:schemeClr val="accent6">
+                  <a:lumMod val="60000"/>
+                  <a:lumOff val="40000"/>
+                </a:schemeClr>
+              </a:solidFill>
+            </a:endParaRPr>
+          </a:p>
+          <a:p>
+            <a:r>
+              <a:rPr lang="en-IN" sz="2400">
+                <a:solidFill>
+                  <a:schemeClr val="accent6">
+                    <a:lumMod val="60000"/>
+                    <a:lumOff val="40000"/>
+                  </a:schemeClr>
+                </a:solidFill>
+              </a:rPr>
+              <a:t>Track model </a:t>
+            </a:r>
+          </a:p>
+          <a:p>
+            <a:pPr marL="342900" indent="-342900">
+              <a:buFont typeface="Arial" panose="020B0604020202020204" pitchFamily="34" charset="0"/>
+              <a:buChar char="•"/>
+            </a:pPr>
+            <a:r>
+              <a:rPr lang="en-IN" sz="2400">
+                <a:solidFill>
+                  <a:schemeClr val="accent6">
+                    <a:lumMod val="60000"/>
+                    <a:lumOff val="40000"/>
+                  </a:schemeClr>
+                </a:solidFill>
+              </a:rPr>
+              <a:t>quality, </a:t>
+            </a:r>
+          </a:p>
+          <a:p>
+            <a:pPr marL="342900" indent="-342900">
+              <a:buFont typeface="Arial" panose="020B0604020202020204" pitchFamily="34" charset="0"/>
+              <a:buChar char="•"/>
+            </a:pPr>
+            <a:r>
+              <a:rPr lang="en-IN" sz="2400">
+                <a:solidFill>
+                  <a:schemeClr val="accent6">
+                    <a:lumMod val="60000"/>
+                    <a:lumOff val="40000"/>
+                  </a:schemeClr>
+                </a:solidFill>
+              </a:rPr>
+              <a:t>data drift, </a:t>
+            </a:r>
+          </a:p>
+          <a:p>
+            <a:pPr marL="342900" indent="-342900">
+              <a:buFont typeface="Arial" panose="020B0604020202020204" pitchFamily="34" charset="0"/>
+              <a:buChar char="•"/>
+            </a:pPr>
+            <a:r>
+              <a:rPr lang="en-IN" sz="2400">
+                <a:solidFill>
+                  <a:schemeClr val="accent6">
+                    <a:lumMod val="60000"/>
+                    <a:lumOff val="40000"/>
+                  </a:schemeClr>
+                </a:solidFill>
+              </a:rPr>
+              <a:t>latency, </a:t>
+            </a:r>
+          </a:p>
+          <a:p>
+            <a:pPr marL="342900" indent="-342900">
+              <a:buFont typeface="Arial" panose="020B0604020202020204" pitchFamily="34" charset="0"/>
+              <a:buChar char="•"/>
+            </a:pPr>
+            <a:r>
+              <a:rPr lang="en-IN" sz="2400">
+                <a:solidFill>
+                  <a:schemeClr val="accent6">
+                    <a:lumMod val="60000"/>
+                    <a:lumOff val="40000"/>
+                  </a:schemeClr>
+                </a:solidFill>
+              </a:rPr>
+              <a:t>errors, and </a:t>
+            </a:r>
+          </a:p>
+          <a:p>
+            <a:pPr marL="342900" indent="-342900">
+              <a:buFont typeface="Arial" panose="020B0604020202020204" pitchFamily="34" charset="0"/>
+              <a:buChar char="•"/>
+            </a:pPr>
+            <a:r>
+              <a:rPr lang="en-IN" sz="2400">
+                <a:solidFill>
+                  <a:schemeClr val="accent6">
+                    <a:lumMod val="60000"/>
+                    <a:lumOff val="40000"/>
+                  </a:schemeClr>
+                </a:solidFill>
+              </a:rPr>
+              <a:t>resource usage.</a:t>
+            </a:r>
+          </a:p>
+        </p:txBody>
+      </p:sp>
+      <p:sp>
+        <p:nvSpPr>
+          <p:cNvPr id="6" name="Oval 5">
+            <a:extLst>
+              <a:ext uri="{FF2B5EF4-FFF2-40B4-BE49-F238E27FC236}">
+                <a16:creationId xmlns:a16="http://schemas.microsoft.com/office/drawing/2014/main" id="{88539DAB-CEEF-FAD6-CEB3-7063C4B28827}"/>
+              </a:ext>
+            </a:extLst>
+          </p:cNvPr>
+          <p:cNvSpPr/>
+          <p:nvPr/>
+        </p:nvSpPr>
+        <p:spPr>
+          <a:xfrm>
+            <a:off x="256032" y="3310128"/>
+            <a:ext cx="1737360" cy="1517904"/>
+          </a:xfrm>
+          <a:prstGeom prst="ellipse">
+            <a:avLst/>
+          </a:prstGeom>
+        </p:spPr>
+        <p:style>
+          <a:lnRef idx="2">
+            <a:schemeClr val="accent1">
+              <a:shade val="15000"/>
+            </a:schemeClr>
+          </a:lnRef>
+          <a:fillRef idx="1">
+            <a:schemeClr val="accent1"/>
+          </a:fillRef>
+          <a:effectRef idx="0">
+            <a:schemeClr val="accent1"/>
+          </a:effectRef>
+          <a:fontRef idx="minor">
+            <a:schemeClr val="lt1"/>
+          </a:fontRef>
+        </p:style>
+        <p:txBody>
+          <a:bodyPr rtlCol="0" anchor="ctr"/>
+          <a:lstStyle/>
+          <a:p>
+            <a:pPr algn="ctr"/>
+            <a:r>
+              <a:rPr lang="en-US" sz="2400"/>
+              <a:t>Develop</a:t>
+            </a:r>
+            <a:endParaRPr lang="en-IN" sz="2400"/>
+          </a:p>
+        </p:txBody>
+      </p:sp>
+      <p:sp>
+        <p:nvSpPr>
+          <p:cNvPr id="10" name="Oval 9">
+            <a:extLst>
+              <a:ext uri="{FF2B5EF4-FFF2-40B4-BE49-F238E27FC236}">
+                <a16:creationId xmlns:a16="http://schemas.microsoft.com/office/drawing/2014/main" id="{61ABF904-D0A6-F76D-5D00-71DF4766BF03}"/>
+              </a:ext>
+            </a:extLst>
+          </p:cNvPr>
+          <p:cNvSpPr/>
+          <p:nvPr/>
+        </p:nvSpPr>
+        <p:spPr>
+          <a:xfrm>
+            <a:off x="3948684" y="3310128"/>
+            <a:ext cx="1737360" cy="1517904"/>
+          </a:xfrm>
+          <a:prstGeom prst="ellipse">
+            <a:avLst/>
+          </a:prstGeom>
+        </p:spPr>
+        <p:style>
+          <a:lnRef idx="2">
+            <a:schemeClr val="accent1">
+              <a:shade val="15000"/>
+            </a:schemeClr>
+          </a:lnRef>
+          <a:fillRef idx="1">
+            <a:schemeClr val="accent1"/>
+          </a:fillRef>
+          <a:effectRef idx="0">
+            <a:schemeClr val="accent1"/>
+          </a:effectRef>
+          <a:fontRef idx="minor">
+            <a:schemeClr val="lt1"/>
+          </a:fontRef>
+        </p:style>
+        <p:txBody>
+          <a:bodyPr rtlCol="0" anchor="ctr"/>
+          <a:lstStyle/>
+          <a:p>
+            <a:pPr algn="ctr"/>
+            <a:r>
+              <a:rPr lang="en-US" sz="2400"/>
+              <a:t>Deploy</a:t>
+            </a:r>
+            <a:endParaRPr lang="en-IN" sz="2400"/>
+          </a:p>
+        </p:txBody>
+      </p:sp>
+      <p:sp>
+        <p:nvSpPr>
+          <p:cNvPr id="14" name="Oval 13">
+            <a:extLst>
+              <a:ext uri="{FF2B5EF4-FFF2-40B4-BE49-F238E27FC236}">
+                <a16:creationId xmlns:a16="http://schemas.microsoft.com/office/drawing/2014/main" id="{3D235E68-2E3B-199F-24A6-1508DD802DDA}"/>
+              </a:ext>
+            </a:extLst>
+          </p:cNvPr>
+          <p:cNvSpPr/>
+          <p:nvPr/>
+        </p:nvSpPr>
+        <p:spPr>
+          <a:xfrm>
+            <a:off x="2138172" y="5321808"/>
+            <a:ext cx="1737360" cy="1517904"/>
+          </a:xfrm>
+          <a:prstGeom prst="ellipse">
+            <a:avLst/>
+          </a:prstGeom>
+        </p:spPr>
+        <p:style>
+          <a:lnRef idx="2">
+            <a:schemeClr val="accent1">
+              <a:shade val="15000"/>
+            </a:schemeClr>
+          </a:lnRef>
+          <a:fillRef idx="1">
+            <a:schemeClr val="accent1"/>
+          </a:fillRef>
+          <a:effectRef idx="0">
+            <a:schemeClr val="accent1"/>
+          </a:effectRef>
+          <a:fontRef idx="minor">
+            <a:schemeClr val="lt1"/>
+          </a:fontRef>
+        </p:style>
+        <p:txBody>
+          <a:bodyPr rtlCol="0" anchor="ctr"/>
+          <a:lstStyle/>
+          <a:p>
+            <a:pPr algn="ctr"/>
+            <a:r>
+              <a:rPr lang="en-US" sz="2400"/>
+              <a:t>Monitor</a:t>
+            </a:r>
+            <a:endParaRPr lang="en-IN" sz="2400"/>
+          </a:p>
+        </p:txBody>
+      </p:sp>
+      <p:sp>
+        <p:nvSpPr>
+          <p:cNvPr id="16" name="Arrow: Right 15">
+            <a:extLst>
+              <a:ext uri="{FF2B5EF4-FFF2-40B4-BE49-F238E27FC236}">
+                <a16:creationId xmlns:a16="http://schemas.microsoft.com/office/drawing/2014/main" id="{BD66C6E5-3224-EA69-B287-265A0130430B}"/>
+              </a:ext>
+            </a:extLst>
+          </p:cNvPr>
+          <p:cNvSpPr/>
+          <p:nvPr/>
+        </p:nvSpPr>
+        <p:spPr>
+          <a:xfrm>
+            <a:off x="2578608" y="3602736"/>
+            <a:ext cx="557784" cy="521208"/>
+          </a:xfrm>
+          <a:prstGeom prst="rightArrow">
+            <a:avLst/>
+          </a:prstGeom>
+        </p:spPr>
+        <p:style>
+          <a:lnRef idx="2">
+            <a:schemeClr val="accent1">
+              <a:shade val="15000"/>
+            </a:schemeClr>
+          </a:lnRef>
+          <a:fillRef idx="1">
+            <a:schemeClr val="accent1"/>
+          </a:fillRef>
+          <a:effectRef idx="0">
+            <a:schemeClr val="accent1"/>
+          </a:effectRef>
+          <a:fontRef idx="minor">
+            <a:schemeClr val="lt1"/>
+          </a:fontRef>
+        </p:style>
+        <p:txBody>
+          <a:bodyPr rtlCol="0" anchor="ctr"/>
+          <a:lstStyle/>
+          <a:p>
+            <a:pPr algn="ctr"/>
+            <a:endParaRPr lang="en-IN"/>
+          </a:p>
+        </p:txBody>
+      </p:sp>
+      <p:sp>
+        <p:nvSpPr>
+          <p:cNvPr id="18" name="Arrow: Right 17">
+            <a:extLst>
+              <a:ext uri="{FF2B5EF4-FFF2-40B4-BE49-F238E27FC236}">
+                <a16:creationId xmlns:a16="http://schemas.microsoft.com/office/drawing/2014/main" id="{532C1E59-A0D4-618C-2D7B-FECCAAA0F224}"/>
+              </a:ext>
+            </a:extLst>
+          </p:cNvPr>
+          <p:cNvSpPr/>
+          <p:nvPr/>
+        </p:nvSpPr>
+        <p:spPr>
+          <a:xfrm rot="7512883">
+            <a:off x="3875532" y="4828032"/>
+            <a:ext cx="557784" cy="521208"/>
+          </a:xfrm>
+          <a:prstGeom prst="rightArrow">
+            <a:avLst/>
+          </a:prstGeom>
+        </p:spPr>
+        <p:style>
+          <a:lnRef idx="2">
+            <a:schemeClr val="accent1">
+              <a:shade val="15000"/>
+            </a:schemeClr>
+          </a:lnRef>
+          <a:fillRef idx="1">
+            <a:schemeClr val="accent1"/>
+          </a:fillRef>
+          <a:effectRef idx="0">
+            <a:schemeClr val="accent1"/>
+          </a:effectRef>
+          <a:fontRef idx="minor">
+            <a:schemeClr val="lt1"/>
+          </a:fontRef>
+        </p:style>
+        <p:txBody>
+          <a:bodyPr rtlCol="0" anchor="ctr"/>
+          <a:lstStyle/>
+          <a:p>
+            <a:pPr algn="ctr"/>
+            <a:endParaRPr lang="en-IN"/>
+          </a:p>
+        </p:txBody>
+      </p:sp>
+      <p:sp>
+        <p:nvSpPr>
+          <p:cNvPr id="20" name="Arrow: Right 19">
+            <a:extLst>
+              <a:ext uri="{FF2B5EF4-FFF2-40B4-BE49-F238E27FC236}">
+                <a16:creationId xmlns:a16="http://schemas.microsoft.com/office/drawing/2014/main" id="{E7F3C3CD-7558-493A-CA4E-7230855B52A3}"/>
+              </a:ext>
+            </a:extLst>
+          </p:cNvPr>
+          <p:cNvSpPr/>
+          <p:nvPr/>
+        </p:nvSpPr>
+        <p:spPr>
+          <a:xfrm rot="13580051">
+            <a:off x="1625974" y="4805171"/>
+            <a:ext cx="557784" cy="521208"/>
+          </a:xfrm>
+          <a:prstGeom prst="rightArrow">
+            <a:avLst/>
+          </a:prstGeom>
+        </p:spPr>
+        <p:style>
+          <a:lnRef idx="2">
+            <a:schemeClr val="accent1">
+              <a:shade val="15000"/>
+            </a:schemeClr>
+          </a:lnRef>
+          <a:fillRef idx="1">
+            <a:schemeClr val="accent1"/>
+          </a:fillRef>
+          <a:effectRef idx="0">
+            <a:schemeClr val="accent1"/>
+          </a:effectRef>
+          <a:fontRef idx="minor">
+            <a:schemeClr val="lt1"/>
+          </a:fontRef>
+        </p:style>
+        <p:txBody>
+          <a:bodyPr rtlCol="0" anchor="ctr"/>
+          <a:lstStyle/>
+          <a:p>
+            <a:pPr algn="ctr"/>
+            <a:endParaRPr lang="en-IN"/>
+          </a:p>
+        </p:txBody>
+      </p:sp>
+      <p:sp>
+        <p:nvSpPr>
+          <p:cNvPr id="22" name="TextBox 21">
+            <a:extLst>
+              <a:ext uri="{FF2B5EF4-FFF2-40B4-BE49-F238E27FC236}">
+                <a16:creationId xmlns:a16="http://schemas.microsoft.com/office/drawing/2014/main" id="{1BCFCDB8-96C9-9B56-BAFB-BD7746DC4C25}"/>
+              </a:ext>
+            </a:extLst>
+          </p:cNvPr>
+          <p:cNvSpPr txBox="1"/>
+          <p:nvPr/>
+        </p:nvSpPr>
+        <p:spPr>
+          <a:xfrm>
+            <a:off x="4154424" y="5666815"/>
+            <a:ext cx="6094476" cy="1200329"/>
+          </a:xfrm>
+          <a:prstGeom prst="rect">
+            <a:avLst/>
+          </a:prstGeom>
+          <a:noFill/>
+        </p:spPr>
+        <p:txBody>
+          <a:bodyPr wrap="square">
+            <a:spAutoFit/>
+          </a:bodyPr>
+          <a:lstStyle/>
+          <a:p>
+            <a:pPr>
+              <a:buNone/>
+            </a:pPr>
+            <a:r>
+              <a:rPr lang="en-IN">
+                <a:solidFill>
+                  <a:schemeClr val="accent6">
+                    <a:lumMod val="60000"/>
+                    <a:lumOff val="40000"/>
+                  </a:schemeClr>
+                </a:solidFill>
+              </a:rPr>
+              <a:t>Example:</a:t>
+            </a:r>
+          </a:p>
+          <a:p>
+            <a:pPr>
+              <a:buNone/>
+            </a:pPr>
+            <a:r>
+              <a:rPr lang="en-IN">
+                <a:solidFill>
+                  <a:schemeClr val="accent6">
+                    <a:lumMod val="60000"/>
+                    <a:lumOff val="40000"/>
+                  </a:schemeClr>
+                </a:solidFill>
+              </a:rPr>
+              <a:t>Monitor prediction latency and errors. If actual sale prices show that predictions have deteriorated, investigate and retrain when justified.</a:t>
+            </a:r>
+          </a:p>
+        </p:txBody>
+      </p:sp>
+      <p:pic>
+        <p:nvPicPr>
+          <p:cNvPr id="26" name="Picture 25" descr="Projeto de Casa Popular - Funcional, Moderna e Acessível! - Serviços - João de Deus, Petrolina 1477269806 | OLX">
+            <a:extLst>
+              <a:ext uri="{FF2B5EF4-FFF2-40B4-BE49-F238E27FC236}">
+                <a16:creationId xmlns:a16="http://schemas.microsoft.com/office/drawing/2014/main" id="{1599FB0E-D79C-EE6A-A09C-B37D5DA539E5}"/>
+              </a:ext>
+            </a:extLst>
+          </p:cNvPr>
+          <p:cNvPicPr>
+            <a:picLocks noChangeAspect="1"/>
+          </p:cNvPicPr>
+          <p:nvPr/>
+        </p:nvPicPr>
+        <p:blipFill>
+          <a:blip r:embed="rId2">
+            <a:extLst>
+              <a:ext uri="{28A0092B-C50C-407E-A947-70E740481C1C}">
+                <a14:useLocalDpi xmlns:a14="http://schemas.microsoft.com/office/drawing/2010/main" val="0"/>
+              </a:ext>
+            </a:extLst>
+          </a:blip>
+          <a:srcRect/>
+          <a:stretch>
+            <a:fillRect/>
+          </a:stretch>
+        </p:blipFill>
+        <p:spPr bwMode="auto">
+          <a:xfrm>
+            <a:off x="10307285" y="2035753"/>
+            <a:ext cx="1737360" cy="1737360"/>
+          </a:xfrm>
+          <a:prstGeom prst="rect">
+            <a:avLst/>
+          </a:prstGeom>
+          <a:noFill/>
+          <a:ln>
+            <a:noFill/>
+          </a:ln>
+        </p:spPr>
+      </p:pic>
+    </p:spTree>
+    <p:extLst>
+      <p:ext uri="{BB962C8B-B14F-4D97-AF65-F5344CB8AC3E}">
+        <p14:creationId xmlns:p14="http://schemas.microsoft.com/office/powerpoint/2010/main" val="4109745484"/>
+      </p:ext>
+    </p:extLst>
+  </p:cSld>
+  <p:clrMapOvr>
+    <a:masterClrMapping/>
+  </p:clrMapOvr>
+</p:sld>
+</file>
+
+<file path=ppt/slides/slide6.xml><?xml version="1.0" encoding="utf-8"?>
+<p:sld xmlns:a="http://schemas.openxmlformats.org/drawingml/2006/main" xmlns:r="http://schemas.openxmlformats.org/officeDocument/2006/relationships" xmlns:p="http://schemas.openxmlformats.org/presentationml/2006/main">
+  <p:cSld>
+    <p:bg>
+      <p:bgPr>
+        <a:solidFill>
+          <a:schemeClr val="tx1"/>
+        </a:solidFill>
+        <a:effectLst/>
+      </p:bgPr>
+    </p:bg>
+    <p:spTree>
+      <p:nvGrpSpPr>
+        <p:cNvPr id="1" name="">
+          <a:extLst>
+            <a:ext uri="{FF2B5EF4-FFF2-40B4-BE49-F238E27FC236}">
+              <a16:creationId xmlns:a16="http://schemas.microsoft.com/office/drawing/2014/main" id="{EE3ECD5D-704C-5E47-8E9F-837EAD4BFB55}"/>
+            </a:ext>
+          </a:extLst>
+        </p:cNvPr>
+        <p:cNvGrpSpPr/>
+        <p:nvPr/>
+      </p:nvGrpSpPr>
+      <p:grpSpPr>
+        <a:xfrm>
+          <a:off x="0" y="0"/>
+          <a:ext cx="0" cy="0"/>
+          <a:chOff x="0" y="0"/>
+          <a:chExt cx="0" cy="0"/>
+        </a:xfrm>
+      </p:grpSpPr>
+      <p:sp>
+        <p:nvSpPr>
+          <p:cNvPr id="3" name="TextBox 2">
+            <a:extLst>
+              <a:ext uri="{FF2B5EF4-FFF2-40B4-BE49-F238E27FC236}">
+                <a16:creationId xmlns:a16="http://schemas.microsoft.com/office/drawing/2014/main" id="{E0ED9B0D-3D27-3E39-0B4D-BADDCF3BB5F3}"/>
+              </a:ext>
+            </a:extLst>
+          </p:cNvPr>
+          <p:cNvSpPr txBox="1"/>
+          <p:nvPr/>
+        </p:nvSpPr>
+        <p:spPr>
+          <a:xfrm>
+            <a:off x="530352" y="221456"/>
+            <a:ext cx="10643616" cy="461665"/>
+          </a:xfrm>
+          <a:prstGeom prst="rect">
+            <a:avLst/>
+          </a:prstGeom>
+          <a:noFill/>
+        </p:spPr>
+        <p:txBody>
+          <a:bodyPr wrap="square">
+            <a:spAutoFit/>
+          </a:bodyPr>
+          <a:lstStyle/>
+          <a:p>
+            <a:pPr lvl="0"/>
+            <a:r>
+              <a:rPr lang="en-IN" sz="2400" b="1">
+                <a:solidFill>
+                  <a:schemeClr val="accent6">
+                    <a:lumMod val="60000"/>
+                    <a:lumOff val="40000"/>
+                  </a:schemeClr>
+                </a:solidFill>
+              </a:rPr>
+              <a:t>How is it different from Machine Learning ?</a:t>
+            </a:r>
+          </a:p>
+        </p:txBody>
+      </p:sp>
+      <p:sp>
+        <p:nvSpPr>
+          <p:cNvPr id="6" name="TextBox 5">
+            <a:extLst>
+              <a:ext uri="{FF2B5EF4-FFF2-40B4-BE49-F238E27FC236}">
+                <a16:creationId xmlns:a16="http://schemas.microsoft.com/office/drawing/2014/main" id="{9BA9583D-9F94-9E9F-9B29-0083D25675D9}"/>
+              </a:ext>
+            </a:extLst>
+          </p:cNvPr>
+          <p:cNvSpPr txBox="1"/>
+          <p:nvPr/>
+        </p:nvSpPr>
+        <p:spPr>
+          <a:xfrm>
+            <a:off x="203454" y="1612682"/>
+            <a:ext cx="5218938" cy="1938992"/>
+          </a:xfrm>
+          <a:prstGeom prst="rect">
+            <a:avLst/>
+          </a:prstGeom>
+          <a:noFill/>
+        </p:spPr>
+        <p:txBody>
+          <a:bodyPr wrap="square">
+            <a:spAutoFit/>
+          </a:bodyPr>
+          <a:lstStyle/>
+          <a:p>
+            <a:pPr lvl="0"/>
+            <a:r>
+              <a:rPr lang="en-IN" sz="2400">
+                <a:solidFill>
+                  <a:schemeClr val="accent6">
+                    <a:lumMod val="60000"/>
+                    <a:lumOff val="40000"/>
+                  </a:schemeClr>
+                </a:solidFill>
+              </a:rPr>
+              <a:t>Machine Learning (ML) focuses on </a:t>
+            </a:r>
+            <a:r>
+              <a:rPr lang="en-IN" sz="2400" b="1" i="1">
+                <a:solidFill>
+                  <a:schemeClr val="accent6">
+                    <a:lumMod val="60000"/>
+                    <a:lumOff val="40000"/>
+                  </a:schemeClr>
+                </a:solidFill>
+              </a:rPr>
+              <a:t>building a model </a:t>
+            </a:r>
+            <a:r>
+              <a:rPr lang="en-IN" sz="2400">
+                <a:solidFill>
+                  <a:schemeClr val="accent6">
+                    <a:lumMod val="60000"/>
+                    <a:lumOff val="40000"/>
+                  </a:schemeClr>
+                </a:solidFill>
+              </a:rPr>
+              <a:t>that learns from data.</a:t>
+            </a:r>
+          </a:p>
+          <a:p>
+            <a:pPr lvl="0"/>
+            <a:endParaRPr lang="en-IN" sz="2400">
+              <a:solidFill>
+                <a:schemeClr val="accent6">
+                  <a:lumMod val="60000"/>
+                  <a:lumOff val="40000"/>
+                </a:schemeClr>
+              </a:solidFill>
+            </a:endParaRPr>
+          </a:p>
+          <a:p>
+            <a:r>
+              <a:rPr lang="en-IN" sz="2400">
+                <a:solidFill>
+                  <a:schemeClr val="accent6">
+                    <a:lumMod val="60000"/>
+                    <a:lumOff val="40000"/>
+                  </a:schemeClr>
+                </a:solidFill>
+              </a:rPr>
+              <a:t>For example, you build a ML model that predicts house prices with 92% accuracy. </a:t>
+            </a:r>
+          </a:p>
+        </p:txBody>
+      </p:sp>
+      <p:sp>
+        <p:nvSpPr>
+          <p:cNvPr id="10" name="TextBox 9">
+            <a:extLst>
+              <a:ext uri="{FF2B5EF4-FFF2-40B4-BE49-F238E27FC236}">
+                <a16:creationId xmlns:a16="http://schemas.microsoft.com/office/drawing/2014/main" id="{634E80B9-1601-2D61-50AB-0D3A386A3AE2}"/>
+              </a:ext>
+            </a:extLst>
+          </p:cNvPr>
+          <p:cNvSpPr txBox="1"/>
+          <p:nvPr/>
+        </p:nvSpPr>
+        <p:spPr>
+          <a:xfrm>
+            <a:off x="5852160" y="1612682"/>
+            <a:ext cx="6094476" cy="3416320"/>
+          </a:xfrm>
+          <a:prstGeom prst="rect">
+            <a:avLst/>
+          </a:prstGeom>
+          <a:noFill/>
+        </p:spPr>
+        <p:txBody>
+          <a:bodyPr wrap="square">
+            <a:spAutoFit/>
+          </a:bodyPr>
+          <a:lstStyle/>
+          <a:p>
+            <a:pPr lvl="0"/>
+            <a:r>
+              <a:rPr lang="en-IN" sz="2400">
+                <a:solidFill>
+                  <a:schemeClr val="accent6">
+                    <a:lumMod val="60000"/>
+                    <a:lumOff val="40000"/>
+                  </a:schemeClr>
+                </a:solidFill>
+              </a:rPr>
+              <a:t>MLOps focuses on making that model available to users, keeping it reliable, monitoring its performance, and updating it when necessary.</a:t>
+            </a:r>
+          </a:p>
+          <a:p>
+            <a:endParaRPr lang="en-IN" sz="2400">
+              <a:solidFill>
+                <a:schemeClr val="accent6">
+                  <a:lumMod val="60000"/>
+                  <a:lumOff val="40000"/>
+                </a:schemeClr>
+              </a:solidFill>
+            </a:endParaRPr>
+          </a:p>
+          <a:p>
+            <a:r>
+              <a:rPr lang="en-IN" sz="2400">
+                <a:solidFill>
+                  <a:schemeClr val="accent6">
+                    <a:lumMod val="60000"/>
+                    <a:lumOff val="40000"/>
+                  </a:schemeClr>
+                </a:solidFill>
+              </a:rPr>
+              <a:t>MLOps helps you </a:t>
+            </a:r>
+            <a:r>
+              <a:rPr lang="en-IN" sz="2400" b="1" i="1">
+                <a:solidFill>
+                  <a:schemeClr val="accent6">
+                    <a:lumMod val="60000"/>
+                    <a:lumOff val="40000"/>
+                  </a:schemeClr>
+                </a:solidFill>
+              </a:rPr>
+              <a:t>deploy that model into a website, serve predictions to users, track errors, monitor changing data, and retrain </a:t>
+            </a:r>
+            <a:r>
+              <a:rPr lang="en-IN" sz="2400">
+                <a:solidFill>
+                  <a:schemeClr val="accent6">
+                    <a:lumMod val="60000"/>
+                    <a:lumOff val="40000"/>
+                  </a:schemeClr>
+                </a:solidFill>
+              </a:rPr>
+              <a:t>the model when needed.</a:t>
+            </a:r>
+          </a:p>
+          <a:p>
+            <a:pPr lvl="0"/>
+            <a:endParaRPr lang="en-IN" sz="2400">
+              <a:solidFill>
+                <a:schemeClr val="accent6">
+                  <a:lumMod val="60000"/>
+                  <a:lumOff val="40000"/>
+                </a:schemeClr>
+              </a:solidFill>
+            </a:endParaRPr>
+          </a:p>
+        </p:txBody>
+      </p:sp>
+    </p:spTree>
+    <p:extLst>
+      <p:ext uri="{BB962C8B-B14F-4D97-AF65-F5344CB8AC3E}">
+        <p14:creationId xmlns:p14="http://schemas.microsoft.com/office/powerpoint/2010/main" val="36446097"/>
+      </p:ext>
+    </p:extLst>
+  </p:cSld>
+  <p:clrMapOvr>
+    <a:masterClrMapping/>
+  </p:clrMapOvr>
+</p:sld>
+</file>
+
+<file path=ppt/slides/slide7.xml><?xml version="1.0" encoding="utf-8"?>
+<p:sld xmlns:a="http://schemas.openxmlformats.org/drawingml/2006/main" xmlns:r="http://schemas.openxmlformats.org/officeDocument/2006/relationships" xmlns:p="http://schemas.openxmlformats.org/presentationml/2006/main">
+  <p:cSld>
+    <p:bg>
+      <p:bgPr>
+        <a:solidFill>
+          <a:schemeClr val="tx1"/>
+        </a:solidFill>
+        <a:effectLst/>
+      </p:bgPr>
+    </p:bg>
+    <p:spTree>
+      <p:nvGrpSpPr>
+        <p:cNvPr id="1" name="">
+          <a:extLst>
+            <a:ext uri="{FF2B5EF4-FFF2-40B4-BE49-F238E27FC236}">
+              <a16:creationId xmlns:a16="http://schemas.microsoft.com/office/drawing/2014/main" id="{C8EFA0BE-EA72-8E77-57A9-BC7D9365B1F3}"/>
+            </a:ext>
+          </a:extLst>
+        </p:cNvPr>
+        <p:cNvGrpSpPr/>
+        <p:nvPr/>
+      </p:nvGrpSpPr>
+      <p:grpSpPr>
+        <a:xfrm>
+          <a:off x="0" y="0"/>
+          <a:ext cx="0" cy="0"/>
+          <a:chOff x="0" y="0"/>
+          <a:chExt cx="0" cy="0"/>
+        </a:xfrm>
+      </p:grpSpPr>
+      <p:sp>
+        <p:nvSpPr>
+          <p:cNvPr id="3" name="TextBox 2">
+            <a:extLst>
+              <a:ext uri="{FF2B5EF4-FFF2-40B4-BE49-F238E27FC236}">
+                <a16:creationId xmlns:a16="http://schemas.microsoft.com/office/drawing/2014/main" id="{6428C246-90D3-2BB6-0BC9-02BA715370EE}"/>
+              </a:ext>
+            </a:extLst>
+          </p:cNvPr>
+          <p:cNvSpPr txBox="1"/>
+          <p:nvPr/>
+        </p:nvSpPr>
+        <p:spPr>
+          <a:xfrm>
+            <a:off x="530352" y="221456"/>
+            <a:ext cx="10643616" cy="4154984"/>
+          </a:xfrm>
+          <a:prstGeom prst="rect">
+            <a:avLst/>
+          </a:prstGeom>
+          <a:noFill/>
+        </p:spPr>
+        <p:txBody>
+          <a:bodyPr wrap="square">
+            <a:spAutoFit/>
+          </a:bodyPr>
+          <a:lstStyle/>
+          <a:p>
+            <a:r>
+              <a:rPr lang="en-IN" sz="2400" b="1">
+                <a:solidFill>
+                  <a:schemeClr val="accent6">
+                    <a:lumMod val="60000"/>
+                    <a:lumOff val="40000"/>
+                  </a:schemeClr>
+                </a:solidFill>
+              </a:rPr>
+              <a:t>Why do we need MLOps?</a:t>
+            </a:r>
+          </a:p>
+          <a:p>
+            <a:endParaRPr lang="en-IN" sz="2400" b="1">
+              <a:solidFill>
+                <a:schemeClr val="accent6">
+                  <a:lumMod val="60000"/>
+                  <a:lumOff val="40000"/>
+                </a:schemeClr>
+              </a:solidFill>
+            </a:endParaRPr>
+          </a:p>
+          <a:p>
+            <a:r>
+              <a:rPr lang="en-IN" sz="2400">
+                <a:solidFill>
+                  <a:schemeClr val="accent6">
+                    <a:lumMod val="60000"/>
+                    <a:lumOff val="40000"/>
+                  </a:schemeClr>
+                </a:solidFill>
+              </a:rPr>
+              <a:t>Suppose you train a model. It works well during testing, but your organization wants thousands of customers to use it every day.</a:t>
+            </a:r>
+          </a:p>
+          <a:p>
+            <a:r>
+              <a:rPr lang="en-IN" sz="2400">
+                <a:solidFill>
+                  <a:schemeClr val="accent6">
+                    <a:lumMod val="60000"/>
+                    <a:lumOff val="40000"/>
+                  </a:schemeClr>
+                </a:solidFill>
+              </a:rPr>
+              <a:t>Several problems can arise:</a:t>
+            </a:r>
+          </a:p>
+          <a:p>
+            <a:pPr marL="342900" lvl="0" indent="-342900">
+              <a:buFont typeface="Arial" panose="020B0604020202020204" pitchFamily="34" charset="0"/>
+              <a:buChar char="•"/>
+            </a:pPr>
+            <a:r>
+              <a:rPr lang="en-IN" sz="2400">
+                <a:solidFill>
+                  <a:schemeClr val="accent6">
+                    <a:lumMod val="60000"/>
+                    <a:lumOff val="40000"/>
+                  </a:schemeClr>
+                </a:solidFill>
+              </a:rPr>
+              <a:t>How do you deploy the model to a server?</a:t>
+            </a:r>
+          </a:p>
+          <a:p>
+            <a:pPr marL="342900" lvl="0" indent="-342900">
+              <a:buFont typeface="Arial" panose="020B0604020202020204" pitchFamily="34" charset="0"/>
+              <a:buChar char="•"/>
+            </a:pPr>
+            <a:r>
+              <a:rPr lang="en-IN" sz="2400">
+                <a:solidFill>
+                  <a:schemeClr val="accent6">
+                    <a:lumMod val="60000"/>
+                    <a:lumOff val="40000"/>
+                  </a:schemeClr>
+                </a:solidFill>
+              </a:rPr>
+              <a:t>What happens when new data changes the model's accuracy?</a:t>
+            </a:r>
+          </a:p>
+          <a:p>
+            <a:pPr marL="342900" lvl="0" indent="-342900">
+              <a:buFont typeface="Arial" panose="020B0604020202020204" pitchFamily="34" charset="0"/>
+              <a:buChar char="•"/>
+            </a:pPr>
+            <a:r>
+              <a:rPr lang="en-IN" sz="2400">
+                <a:solidFill>
+                  <a:schemeClr val="accent6">
+                    <a:lumMod val="60000"/>
+                    <a:lumOff val="40000"/>
+                  </a:schemeClr>
+                </a:solidFill>
+              </a:rPr>
+              <a:t>How do you retrain the model automatically?</a:t>
+            </a:r>
+          </a:p>
+          <a:p>
+            <a:pPr marL="342900" lvl="0" indent="-342900">
+              <a:buFont typeface="Arial" panose="020B0604020202020204" pitchFamily="34" charset="0"/>
+              <a:buChar char="•"/>
+            </a:pPr>
+            <a:r>
+              <a:rPr lang="en-IN" sz="2400">
+                <a:solidFill>
+                  <a:schemeClr val="accent6">
+                    <a:lumMod val="60000"/>
+                    <a:lumOff val="40000"/>
+                  </a:schemeClr>
+                </a:solidFill>
+              </a:rPr>
+              <a:t>How do you track which model version is currently deployed?</a:t>
+            </a:r>
+          </a:p>
+          <a:p>
+            <a:pPr marL="342900" lvl="0" indent="-342900">
+              <a:buFont typeface="Arial" panose="020B0604020202020204" pitchFamily="34" charset="0"/>
+              <a:buChar char="•"/>
+            </a:pPr>
+            <a:r>
+              <a:rPr lang="en-IN" sz="2400">
+                <a:solidFill>
+                  <a:schemeClr val="accent6">
+                    <a:lumMod val="60000"/>
+                    <a:lumOff val="40000"/>
+                  </a:schemeClr>
+                </a:solidFill>
+              </a:rPr>
+              <a:t>How do you roll back if a new model performs poorly?</a:t>
+            </a:r>
+          </a:p>
+          <a:p>
+            <a:r>
+              <a:rPr lang="en-IN" sz="2400">
+                <a:solidFill>
+                  <a:schemeClr val="accent6">
+                    <a:lumMod val="60000"/>
+                    <a:lumOff val="40000"/>
+                  </a:schemeClr>
+                </a:solidFill>
+              </a:rPr>
+              <a:t>MLOps addresses these challenges.</a:t>
+            </a:r>
+          </a:p>
+        </p:txBody>
+      </p:sp>
+    </p:spTree>
+    <p:extLst>
+      <p:ext uri="{BB962C8B-B14F-4D97-AF65-F5344CB8AC3E}">
+        <p14:creationId xmlns:p14="http://schemas.microsoft.com/office/powerpoint/2010/main" val="2581421227"/>
+      </p:ext>
+    </p:extLst>
+  </p:cSld>
+  <p:clrMapOvr>
+    <a:masterClrMapping/>
+  </p:clrMapOvr>
+</p:sld>
+</file>
+
+<file path=ppt/slides/slide8.xml><?xml version="1.0" encoding="utf-8"?>
+<p:sld xmlns:a="http://schemas.openxmlformats.org/drawingml/2006/main" xmlns:r="http://schemas.openxmlformats.org/officeDocument/2006/relationships" xmlns:p="http://schemas.openxmlformats.org/presentationml/2006/main">
+  <p:cSld>
+    <p:bg>
+      <p:bgPr>
+        <a:solidFill>
+          <a:schemeClr val="tx1"/>
+        </a:solidFill>
+        <a:effectLst/>
+      </p:bgPr>
+    </p:bg>
+    <p:spTree>
+      <p:nvGrpSpPr>
+        <p:cNvPr id="1" name="">
+          <a:extLst>
+            <a:ext uri="{FF2B5EF4-FFF2-40B4-BE49-F238E27FC236}">
+              <a16:creationId xmlns:a16="http://schemas.microsoft.com/office/drawing/2014/main" id="{F7DA5F1B-CE86-B927-1B4C-5786334218A3}"/>
+            </a:ext>
+          </a:extLst>
+        </p:cNvPr>
+        <p:cNvGrpSpPr/>
+        <p:nvPr/>
+      </p:nvGrpSpPr>
+      <p:grpSpPr>
+        <a:xfrm>
+          <a:off x="0" y="0"/>
+          <a:ext cx="0" cy="0"/>
+          <a:chOff x="0" y="0"/>
+          <a:chExt cx="0" cy="0"/>
+        </a:xfrm>
+      </p:grpSpPr>
+      <p:sp>
+        <p:nvSpPr>
+          <p:cNvPr id="3" name="TextBox 2">
+            <a:extLst>
+              <a:ext uri="{FF2B5EF4-FFF2-40B4-BE49-F238E27FC236}">
+                <a16:creationId xmlns:a16="http://schemas.microsoft.com/office/drawing/2014/main" id="{5A99871A-E391-0694-6429-D07A2301BE80}"/>
+              </a:ext>
+            </a:extLst>
+          </p:cNvPr>
+          <p:cNvSpPr txBox="1"/>
+          <p:nvPr/>
+        </p:nvSpPr>
+        <p:spPr>
+          <a:xfrm>
+            <a:off x="530352" y="221456"/>
+            <a:ext cx="10643616" cy="461665"/>
+          </a:xfrm>
+          <a:prstGeom prst="rect">
+            <a:avLst/>
+          </a:prstGeom>
+          <a:noFill/>
+        </p:spPr>
+        <p:txBody>
+          <a:bodyPr wrap="square">
+            <a:spAutoFit/>
+          </a:bodyPr>
+          <a:lstStyle/>
+          <a:p>
+            <a:r>
+              <a:rPr lang="en-IN" sz="2400">
+                <a:solidFill>
+                  <a:schemeClr val="accent6">
+                    <a:lumMod val="60000"/>
+                    <a:lumOff val="40000"/>
+                  </a:schemeClr>
+                </a:solidFill>
+              </a:rPr>
+              <a:t> MLOps Lifecycle in Detail</a:t>
+            </a:r>
+          </a:p>
+        </p:txBody>
+      </p:sp>
+      <p:pic>
+        <p:nvPicPr>
+          <p:cNvPr id="4" name="Picture 3">
+            <a:extLst>
+              <a:ext uri="{FF2B5EF4-FFF2-40B4-BE49-F238E27FC236}">
+                <a16:creationId xmlns:a16="http://schemas.microsoft.com/office/drawing/2014/main" id="{83CE5EA3-8C0F-47B3-BB0E-CB4E3D67CC0D}"/>
+              </a:ext>
+            </a:extLst>
+          </p:cNvPr>
+          <p:cNvPicPr>
+            <a:picLocks noChangeAspect="1"/>
+          </p:cNvPicPr>
+          <p:nvPr/>
+        </p:nvPicPr>
+        <p:blipFill>
+          <a:blip r:embed="rId2">
+            <a:extLst>
+              <a:ext uri="{28A0092B-C50C-407E-A947-70E740481C1C}">
+                <a14:useLocalDpi xmlns:a14="http://schemas.microsoft.com/office/drawing/2010/main" val="0"/>
+              </a:ext>
+            </a:extLst>
+          </a:blip>
+          <a:stretch>
+            <a:fillRect/>
+          </a:stretch>
+        </p:blipFill>
+        <p:spPr>
+          <a:xfrm>
+            <a:off x="8635952" y="0"/>
+            <a:ext cx="3556048" cy="6318504"/>
+          </a:xfrm>
+          <a:prstGeom prst="rect">
+            <a:avLst/>
+          </a:prstGeom>
+        </p:spPr>
+      </p:pic>
+      <p:pic>
+        <p:nvPicPr>
+          <p:cNvPr id="8" name="Picture 7">
+            <a:extLst>
+              <a:ext uri="{FF2B5EF4-FFF2-40B4-BE49-F238E27FC236}">
+                <a16:creationId xmlns:a16="http://schemas.microsoft.com/office/drawing/2014/main" id="{662C5BBD-6AE2-3CDA-0A0F-2D248A76DB3D}"/>
+              </a:ext>
+            </a:extLst>
+          </p:cNvPr>
+          <p:cNvPicPr>
+            <a:picLocks noChangeAspect="1"/>
+          </p:cNvPicPr>
+          <p:nvPr/>
+        </p:nvPicPr>
+        <p:blipFill>
+          <a:blip r:embed="rId3"/>
+          <a:stretch>
+            <a:fillRect/>
+          </a:stretch>
+        </p:blipFill>
+        <p:spPr>
+          <a:xfrm>
+            <a:off x="34220" y="709697"/>
+            <a:ext cx="7845175" cy="1854314"/>
+          </a:xfrm>
+          <a:prstGeom prst="rect">
+            <a:avLst/>
+          </a:prstGeom>
+        </p:spPr>
+      </p:pic>
+      <p:pic>
+        <p:nvPicPr>
+          <p:cNvPr id="10" name="Picture 9">
+            <a:extLst>
+              <a:ext uri="{FF2B5EF4-FFF2-40B4-BE49-F238E27FC236}">
+                <a16:creationId xmlns:a16="http://schemas.microsoft.com/office/drawing/2014/main" id="{0354C3A0-1DC7-1897-237D-DF5A68DC1F4D}"/>
+              </a:ext>
+            </a:extLst>
+          </p:cNvPr>
+          <p:cNvPicPr>
+            <a:picLocks noChangeAspect="1"/>
+          </p:cNvPicPr>
+          <p:nvPr/>
+        </p:nvPicPr>
+        <p:blipFill>
+          <a:blip r:embed="rId4"/>
+          <a:stretch>
+            <a:fillRect/>
+          </a:stretch>
+        </p:blipFill>
+        <p:spPr>
+          <a:xfrm>
+            <a:off x="43364" y="2697480"/>
+            <a:ext cx="7811422" cy="1942300"/>
+          </a:xfrm>
+          <a:prstGeom prst="rect">
+            <a:avLst/>
+          </a:prstGeom>
+        </p:spPr>
+      </p:pic>
+      <p:pic>
+        <p:nvPicPr>
+          <p:cNvPr id="12" name="Picture 11">
+            <a:extLst>
+              <a:ext uri="{FF2B5EF4-FFF2-40B4-BE49-F238E27FC236}">
+                <a16:creationId xmlns:a16="http://schemas.microsoft.com/office/drawing/2014/main" id="{4DAFAA92-FF1B-DAFA-7C83-FD3BE687343B}"/>
+              </a:ext>
+            </a:extLst>
+          </p:cNvPr>
+          <p:cNvPicPr>
+            <a:picLocks noChangeAspect="1"/>
+          </p:cNvPicPr>
+          <p:nvPr/>
+        </p:nvPicPr>
+        <p:blipFill>
+          <a:blip r:embed="rId5"/>
+          <a:stretch>
+            <a:fillRect/>
+          </a:stretch>
+        </p:blipFill>
+        <p:spPr>
+          <a:xfrm>
+            <a:off x="-24261" y="4745654"/>
+            <a:ext cx="8092915" cy="1942300"/>
+          </a:xfrm>
+          <a:prstGeom prst="rect">
+            <a:avLst/>
+          </a:prstGeom>
+        </p:spPr>
+      </p:pic>
+    </p:spTree>
+    <p:extLst>
+      <p:ext uri="{BB962C8B-B14F-4D97-AF65-F5344CB8AC3E}">
+        <p14:creationId xmlns:p14="http://schemas.microsoft.com/office/powerpoint/2010/main" val="4045377328"/>
+      </p:ext>
+    </p:extLst>
+  </p:cSld>
+  <p:clrMapOvr>
+    <a:masterClrMapping/>
+  </p:clrMapOvr>
+</p:sld>
+</file>
+
+<file path=ppt/slides/slide9.xml><?xml version="1.0" encoding="utf-8"?>
+<p:sld xmlns:a="http://schemas.openxmlformats.org/drawingml/2006/main" xmlns:r="http://schemas.openxmlformats.org/officeDocument/2006/relationships" xmlns:p="http://schemas.openxmlformats.org/presentationml/2006/main">
+  <p:cSld>
+    <p:bg>
+      <p:bgPr>
+        <a:solidFill>
+          <a:schemeClr val="tx1"/>
+        </a:solidFill>
+        <a:effectLst/>
+      </p:bgPr>
+    </p:bg>
+    <p:spTree>
+      <p:nvGrpSpPr>
+        <p:cNvPr id="1" name="">
+          <a:extLst>
+            <a:ext uri="{FF2B5EF4-FFF2-40B4-BE49-F238E27FC236}">
+              <a16:creationId xmlns:a16="http://schemas.microsoft.com/office/drawing/2014/main" id="{DD1441CD-1E04-1914-89AA-10031E42BC97}"/>
+            </a:ext>
+          </a:extLst>
+        </p:cNvPr>
+        <p:cNvGrpSpPr/>
+        <p:nvPr/>
+      </p:nvGrpSpPr>
+      <p:grpSpPr>
+        <a:xfrm>
+          <a:off x="0" y="0"/>
+          <a:ext cx="0" cy="0"/>
+          <a:chOff x="0" y="0"/>
+          <a:chExt cx="0" cy="0"/>
+        </a:xfrm>
+      </p:grpSpPr>
+      <p:sp>
+        <p:nvSpPr>
+          <p:cNvPr id="3" name="TextBox 2">
+            <a:extLst>
+              <a:ext uri="{FF2B5EF4-FFF2-40B4-BE49-F238E27FC236}">
+                <a16:creationId xmlns:a16="http://schemas.microsoft.com/office/drawing/2014/main" id="{C8D9F335-E539-CB58-108A-4EE7D381A818}"/>
+              </a:ext>
+            </a:extLst>
+          </p:cNvPr>
+          <p:cNvSpPr txBox="1"/>
+          <p:nvPr/>
+        </p:nvSpPr>
+        <p:spPr>
+          <a:xfrm>
+            <a:off x="530352" y="221456"/>
+            <a:ext cx="10643616" cy="461665"/>
+          </a:xfrm>
+          <a:prstGeom prst="rect">
+            <a:avLst/>
+          </a:prstGeom>
+          <a:noFill/>
+        </p:spPr>
+        <p:txBody>
+          <a:bodyPr wrap="square">
+            <a:spAutoFit/>
+          </a:bodyPr>
+          <a:lstStyle/>
+          <a:p>
+            <a:r>
+              <a:rPr lang="en-IN" sz="2400">
+                <a:solidFill>
+                  <a:schemeClr val="accent6">
+                    <a:lumMod val="60000"/>
+                    <a:lumOff val="40000"/>
+                  </a:schemeClr>
+                </a:solidFill>
+              </a:rPr>
+              <a:t> MLOps Lifecycle in Detail</a:t>
+            </a:r>
+          </a:p>
+        </p:txBody>
+      </p:sp>
+      <p:pic>
+        <p:nvPicPr>
+          <p:cNvPr id="4" name="Picture 3">
+            <a:extLst>
+              <a:ext uri="{FF2B5EF4-FFF2-40B4-BE49-F238E27FC236}">
+                <a16:creationId xmlns:a16="http://schemas.microsoft.com/office/drawing/2014/main" id="{F0E4EF50-89B0-C377-7895-8E92BD97D3C9}"/>
+              </a:ext>
+            </a:extLst>
+          </p:cNvPr>
+          <p:cNvPicPr>
+            <a:picLocks noChangeAspect="1"/>
+          </p:cNvPicPr>
+          <p:nvPr/>
+        </p:nvPicPr>
+        <p:blipFill>
+          <a:blip r:embed="rId2">
+            <a:extLst>
+              <a:ext uri="{28A0092B-C50C-407E-A947-70E740481C1C}">
+                <a14:useLocalDpi xmlns:a14="http://schemas.microsoft.com/office/drawing/2010/main" val="0"/>
+              </a:ext>
+            </a:extLst>
+          </a:blip>
+          <a:stretch>
+            <a:fillRect/>
+          </a:stretch>
+        </p:blipFill>
+        <p:spPr>
+          <a:xfrm>
+            <a:off x="8635952" y="0"/>
+            <a:ext cx="3556048" cy="6318504"/>
+          </a:xfrm>
+          <a:prstGeom prst="rect">
+            <a:avLst/>
+          </a:prstGeom>
+        </p:spPr>
+      </p:pic>
+      <p:pic>
+        <p:nvPicPr>
+          <p:cNvPr id="5" name="Picture 4">
+            <a:extLst>
+              <a:ext uri="{FF2B5EF4-FFF2-40B4-BE49-F238E27FC236}">
+                <a16:creationId xmlns:a16="http://schemas.microsoft.com/office/drawing/2014/main" id="{B8F2FAB1-5C87-F0E9-5DDB-DF8326833AE1}"/>
+              </a:ext>
+            </a:extLst>
+          </p:cNvPr>
+          <p:cNvPicPr>
+            <a:picLocks noChangeAspect="1"/>
+          </p:cNvPicPr>
+          <p:nvPr/>
+        </p:nvPicPr>
+        <p:blipFill>
+          <a:blip r:embed="rId3"/>
+          <a:stretch>
+            <a:fillRect/>
+          </a:stretch>
+        </p:blipFill>
+        <p:spPr>
+          <a:xfrm>
+            <a:off x="91440" y="683121"/>
+            <a:ext cx="7915743" cy="1976796"/>
+          </a:xfrm>
+          <a:prstGeom prst="rect">
+            <a:avLst/>
+          </a:prstGeom>
+        </p:spPr>
+      </p:pic>
+      <p:pic>
+        <p:nvPicPr>
+          <p:cNvPr id="7" name="Picture 6">
+            <a:extLst>
+              <a:ext uri="{FF2B5EF4-FFF2-40B4-BE49-F238E27FC236}">
+                <a16:creationId xmlns:a16="http://schemas.microsoft.com/office/drawing/2014/main" id="{3C8E45B0-1274-5EE4-75F4-A1D9B4A7B028}"/>
+              </a:ext>
+            </a:extLst>
+          </p:cNvPr>
+          <p:cNvPicPr>
+            <a:picLocks noChangeAspect="1"/>
+          </p:cNvPicPr>
+          <p:nvPr/>
+        </p:nvPicPr>
+        <p:blipFill>
+          <a:blip r:embed="rId4"/>
+          <a:stretch>
+            <a:fillRect/>
+          </a:stretch>
+        </p:blipFill>
+        <p:spPr>
+          <a:xfrm>
+            <a:off x="0" y="2808608"/>
+            <a:ext cx="8051688" cy="1909695"/>
+          </a:xfrm>
+          <a:prstGeom prst="rect">
+            <a:avLst/>
+          </a:prstGeom>
+        </p:spPr>
+      </p:pic>
+      <p:pic>
+        <p:nvPicPr>
+          <p:cNvPr id="11" name="Picture 10">
+            <a:extLst>
+              <a:ext uri="{FF2B5EF4-FFF2-40B4-BE49-F238E27FC236}">
+                <a16:creationId xmlns:a16="http://schemas.microsoft.com/office/drawing/2014/main" id="{B5A0E44B-38DF-9B70-F34D-5844A6845F49}"/>
+              </a:ext>
+            </a:extLst>
+          </p:cNvPr>
+          <p:cNvPicPr>
+            <a:picLocks noChangeAspect="1"/>
+          </p:cNvPicPr>
+          <p:nvPr/>
+        </p:nvPicPr>
+        <p:blipFill>
+          <a:blip r:embed="rId5"/>
+          <a:stretch>
+            <a:fillRect/>
+          </a:stretch>
+        </p:blipFill>
+        <p:spPr>
+          <a:xfrm>
+            <a:off x="0" y="4981249"/>
+            <a:ext cx="8174736" cy="1798919"/>
+          </a:xfrm>
+          <a:prstGeom prst="rect">
+            <a:avLst/>
+          </a:prstGeom>
+        </p:spPr>
+      </p:pic>
+    </p:spTree>
+    <p:extLst>
+      <p:ext uri="{BB962C8B-B14F-4D97-AF65-F5344CB8AC3E}">
+        <p14:creationId xmlns:p14="http://schemas.microsoft.com/office/powerpoint/2010/main" val="1535877400"/>
       </p:ext>
     </p:extLst>
   </p:cSld>
